--- a/presentaciones/Sesion-1-HTML.pptx
+++ b/presentaciones/Sesion-1-HTML.pptx
@@ -49,6 +49,7 @@
     <p:sldId id="297" r:id="rId48"/>
     <p:sldId id="298" r:id="rId49"/>
     <p:sldId id="299" r:id="rId50"/>
+    <p:sldId id="300" r:id="rId51"/>
   </p:sldIdLst>
   <p:sldSz cx="12191695" cy="6858000" type="screen4x3"/>
   <p:notesSz cx="6858000" cy="9144000"/>
@@ -10476,177 +10477,375 @@
           <a:p>
             <a:pPr>
               <a:lnSpc>
-                <a:spcPct val="140000"/>
-              </a:lnSpc>
-              <a:spcBef>
-                <a:spcPts val="0"/>
-              </a:spcBef>
-              <a:spcAft>
-                <a:spcPts val="500"/>
-              </a:spcAft>
-            </a:pPr>
-            <a:r>
-              <a:rPr sz="1450" b="0" i="0">
+                <a:spcPct val="125000"/>
+              </a:lnSpc>
+              <a:spcBef>
+                <a:spcPts val="1000"/>
+              </a:spcBef>
+              <a:spcAft>
+                <a:spcPts val="400"/>
+              </a:spcAft>
+            </a:pPr>
+            <a:r>
+              <a:rPr sz="1000" b="0" i="0" spc="500">
+                <a:solidFill>
+                  <a:srgbClr val="8A7C14"/>
+                </a:solidFill>
+                <a:latin typeface="Menlo"/>
+              </a:rPr>
+              <a:t>HAY QUE</a:t>
+            </a:r>
+          </a:p>
+          <a:p>
+            <a:pPr>
+              <a:lnSpc>
+                <a:spcPct val="135000"/>
+              </a:lnSpc>
+              <a:spcBef>
+                <a:spcPts val="0"/>
+              </a:spcBef>
+              <a:spcAft>
+                <a:spcPts val="300"/>
+              </a:spcAft>
+            </a:pPr>
+            <a:r>
+              <a:rPr sz="1350" b="0" i="0">
                 <a:solidFill>
                   <a:srgbClr val="444444"/>
                 </a:solidFill>
                 <a:latin typeface="Iowan Old Style"/>
               </a:rPr>
-              <a:t>☐  Tu nombre en el &lt;h1&gt; y también en el &lt;title&gt;.</a:t>
-            </a:r>
-          </a:p>
-          <a:p>
-            <a:pPr>
-              <a:lnSpc>
-                <a:spcPct val="140000"/>
-              </a:lnSpc>
-              <a:spcBef>
-                <a:spcPts val="0"/>
-              </a:spcBef>
-              <a:spcAft>
-                <a:spcPts val="500"/>
-              </a:spcAft>
-            </a:pPr>
-            <a:r>
-              <a:rPr sz="1450" b="0" i="0">
+              <a:t>☐  Tu nombre en el h1 y en el title</a:t>
+            </a:r>
+          </a:p>
+          <a:p>
+            <a:pPr>
+              <a:lnSpc>
+                <a:spcPct val="135000"/>
+              </a:lnSpc>
+              <a:spcBef>
+                <a:spcPts val="0"/>
+              </a:spcBef>
+              <a:spcAft>
+                <a:spcPts val="300"/>
+              </a:spcAft>
+            </a:pPr>
+            <a:r>
+              <a:rPr sz="1350" b="0" i="0">
                 <a:solidFill>
                   <a:srgbClr val="444444"/>
                 </a:solidFill>
                 <a:latin typeface="Iowan Old Style"/>
               </a:rPr>
-              <a:t>☐  Tu bio en dos o tres &lt;p&gt; separados, uno por idea.</a:t>
-            </a:r>
-          </a:p>
-          <a:p>
-            <a:pPr>
-              <a:lnSpc>
-                <a:spcPct val="140000"/>
-              </a:lnSpc>
-              <a:spcBef>
-                <a:spcPts val="0"/>
-              </a:spcBef>
-              <a:spcAft>
-                <a:spcPts val="500"/>
-              </a:spcAft>
-            </a:pPr>
-            <a:r>
-              <a:rPr sz="1450" b="0" i="0">
+              <a:t>☐  Tu bio en dos o tres p</a:t>
+            </a:r>
+          </a:p>
+          <a:p>
+            <a:pPr>
+              <a:lnSpc>
+                <a:spcPct val="135000"/>
+              </a:lnSpc>
+              <a:spcBef>
+                <a:spcPts val="0"/>
+              </a:spcBef>
+              <a:spcAft>
+                <a:spcPts val="300"/>
+              </a:spcAft>
+            </a:pPr>
+            <a:r>
+              <a:rPr sz="1350" b="0" i="0">
                 <a:solidFill>
                   <a:srgbClr val="444444"/>
                 </a:solidFill>
                 <a:latin typeface="Iowan Old Style"/>
               </a:rPr>
-              <a:t>☐  Una imagen tuya o de tu trabajo, con su alt escrito.</a:t>
-            </a:r>
-          </a:p>
-          <a:p>
-            <a:pPr>
-              <a:lnSpc>
-                <a:spcPct val="140000"/>
-              </a:lnSpc>
-              <a:spcBef>
-                <a:spcPts val="0"/>
-              </a:spcBef>
-              <a:spcAft>
-                <a:spcPts val="500"/>
-              </a:spcAft>
-            </a:pPr>
-            <a:r>
-              <a:rPr sz="1450" b="0" i="0">
+              <a:t>☐  Una imagen con su alt escrito</a:t>
+            </a:r>
+          </a:p>
+          <a:p>
+            <a:pPr>
+              <a:lnSpc>
+                <a:spcPct val="135000"/>
+              </a:lnSpc>
+              <a:spcBef>
+                <a:spcPts val="0"/>
+              </a:spcBef>
+              <a:spcAft>
+                <a:spcPts val="300"/>
+              </a:spcAft>
+            </a:pPr>
+            <a:r>
+              <a:rPr sz="1350" b="0" i="0">
                 <a:solidFill>
                   <a:srgbClr val="444444"/>
                 </a:solidFill>
                 <a:latin typeface="Iowan Old Style"/>
               </a:rPr>
-              <a:t>☐  Tu correo en el pie, funcionando con mailto:.</a:t>
-            </a:r>
-          </a:p>
-          <a:p>
-            <a:pPr>
-              <a:lnSpc>
-                <a:spcPct val="140000"/>
-              </a:lnSpc>
-              <a:spcBef>
-                <a:spcPts val="0"/>
-              </a:spcBef>
-              <a:spcAft>
-                <a:spcPts val="500"/>
-              </a:spcAft>
-            </a:pPr>
-            <a:r>
-              <a:rPr sz="1450" b="0" i="0">
+              <a:t>☐  Tu correo en el pie con mailto:</a:t>
+            </a:r>
+          </a:p>
+          <a:p>
+            <a:pPr>
+              <a:lnSpc>
+                <a:spcPct val="135000"/>
+              </a:lnSpc>
+              <a:spcBef>
+                <a:spcPts val="0"/>
+              </a:spcBef>
+              <a:spcAft>
+                <a:spcPts val="300"/>
+              </a:spcAft>
+            </a:pPr>
+            <a:r>
+              <a:rPr sz="1350" b="0" i="0">
                 <a:solidFill>
                   <a:srgbClr val="444444"/>
                 </a:solidFill>
                 <a:latin typeface="Iowan Old Style"/>
               </a:rPr>
-              <a:t>☐  Todos los comentarios de instrucciones borrados.</a:t>
-            </a:r>
-          </a:p>
-          <a:p>
-            <a:pPr>
-              <a:lnSpc>
-                <a:spcPct val="140000"/>
-              </a:lnSpc>
-              <a:spcBef>
-                <a:spcPts val="0"/>
-              </a:spcBef>
-              <a:spcAft>
-                <a:spcPts val="500"/>
-              </a:spcAft>
-            </a:pPr>
-            <a:r>
-              <a:rPr sz="1450" b="0" i="0">
+              <a:t>☐  Los comentarios de instrucciones borrados</a:t>
+            </a:r>
+          </a:p>
+          <a:p>
+            <a:pPr>
+              <a:lnSpc>
+                <a:spcPct val="125000"/>
+              </a:lnSpc>
+              <a:spcBef>
+                <a:spcPts val="1000"/>
+              </a:spcBef>
+              <a:spcAft>
+                <a:spcPts val="400"/>
+              </a:spcAft>
+            </a:pPr>
+            <a:r>
+              <a:rPr sz="1000" b="0" i="0" spc="500">
+                <a:solidFill>
+                  <a:srgbClr val="8A7C14"/>
+                </a:solidFill>
+                <a:latin typeface="Menlo"/>
+              </a:rPr>
+              <a:t>PUEDES</a:t>
+            </a:r>
+          </a:p>
+          <a:p>
+            <a:pPr>
+              <a:lnSpc>
+                <a:spcPct val="135000"/>
+              </a:lnSpc>
+              <a:spcBef>
+                <a:spcPts val="0"/>
+              </a:spcBef>
+              <a:spcAft>
+                <a:spcPts val="300"/>
+              </a:spcAft>
+            </a:pPr>
+            <a:r>
+              <a:rPr sz="1350" b="0" i="0">
                 <a:solidFill>
                   <a:srgbClr val="444444"/>
                 </a:solidFill>
                 <a:latin typeface="Iowan Old Style"/>
               </a:rPr>
-              <a:t>·  Un enlace a alguna web tuya o de alguien que admires.</a:t>
-            </a:r>
-          </a:p>
-          <a:p>
-            <a:pPr>
-              <a:lnSpc>
-                <a:spcPct val="140000"/>
-              </a:lnSpc>
-              <a:spcBef>
-                <a:spcPts val="0"/>
-              </a:spcBef>
-              <a:spcAft>
-                <a:spcPts val="500"/>
-              </a:spcAft>
-            </a:pPr>
-            <a:r>
-              <a:rPr sz="1450" b="0" i="0">
+              <a:t>☐  Un enlace a otra web tuya o que admires</a:t>
+            </a:r>
+          </a:p>
+          <a:p>
+            <a:pPr>
+              <a:lnSpc>
+                <a:spcPct val="135000"/>
+              </a:lnSpc>
+              <a:spcBef>
+                <a:spcPts val="0"/>
+              </a:spcBef>
+              <a:spcAft>
+                <a:spcPts val="300"/>
+              </a:spcAft>
+            </a:pPr>
+            <a:r>
+              <a:rPr sz="1350" b="0" i="0">
                 <a:solidFill>
                   <a:srgbClr val="444444"/>
                 </a:solidFill>
                 <a:latin typeface="Iowan Old Style"/>
               </a:rPr>
-              <a:t>·  Una segunda imagen.</a:t>
-            </a:r>
-          </a:p>
-          <a:p>
-            <a:pPr>
-              <a:lnSpc>
-                <a:spcPct val="140000"/>
-              </a:lnSpc>
-              <a:spcBef>
-                <a:spcPts val="0"/>
-              </a:spcBef>
-              <a:spcAft>
-                <a:spcPts val="500"/>
-              </a:spcAft>
-            </a:pPr>
-            <a:r>
-              <a:rPr sz="1450" b="0" i="0">
+              <a:t>☐  strong y em dentro de la bio</a:t>
+            </a:r>
+          </a:p>
+          <a:p>
+            <a:pPr>
+              <a:lnSpc>
+                <a:spcPct val="135000"/>
+              </a:lnSpc>
+              <a:spcBef>
+                <a:spcPts val="0"/>
+              </a:spcBef>
+              <a:spcAft>
+                <a:spcPts val="300"/>
+              </a:spcAft>
+            </a:pPr>
+            <a:r>
+              <a:rPr sz="1350" b="0" i="0">
                 <a:solidFill>
                   <a:srgbClr val="444444"/>
                 </a:solidFill>
                 <a:latin typeface="Iowan Old Style"/>
               </a:rPr>
-              <a:t>·  Cambiar background-color en estilo.css. Solo eso.</a:t>
+              <a:t>☐  Una segunda imagen</a:t>
+            </a:r>
+          </a:p>
+          <a:p>
+            <a:pPr>
+              <a:lnSpc>
+                <a:spcPct val="135000"/>
+              </a:lnSpc>
+              <a:spcBef>
+                <a:spcPts val="0"/>
+              </a:spcBef>
+              <a:spcAft>
+                <a:spcPts val="300"/>
+              </a:spcAft>
+            </a:pPr>
+            <a:r>
+              <a:rPr sz="1350" b="0" i="0">
+                <a:solidFill>
+                  <a:srgbClr val="444444"/>
+                </a:solidFill>
+                <a:latin typeface="Iowan Old Style"/>
+              </a:rPr>
+              <a:t>☐  Una lista con ul y li</a:t>
+            </a:r>
+          </a:p>
+          <a:p>
+            <a:pPr>
+              <a:lnSpc>
+                <a:spcPct val="135000"/>
+              </a:lnSpc>
+              <a:spcBef>
+                <a:spcPts val="0"/>
+              </a:spcBef>
+              <a:spcAft>
+                <a:spcPts val="300"/>
+              </a:spcAft>
+            </a:pPr>
+            <a:r>
+              <a:rPr sz="1350" b="0" i="0">
+                <a:solidFill>
+                  <a:srgbClr val="444444"/>
+                </a:solidFill>
+                <a:latin typeface="Iowan Old Style"/>
+              </a:rPr>
+              <a:t>☐  Cambiar background-color en el CSS</a:t>
+            </a:r>
+          </a:p>
+          <a:p>
+            <a:pPr>
+              <a:lnSpc>
+                <a:spcPct val="125000"/>
+              </a:lnSpc>
+              <a:spcBef>
+                <a:spcPts val="1000"/>
+              </a:spcBef>
+              <a:spcAft>
+                <a:spcPts val="400"/>
+              </a:spcAft>
+            </a:pPr>
+            <a:r>
+              <a:rPr sz="1000" b="0" i="0" spc="500">
+                <a:solidFill>
+                  <a:srgbClr val="8A7C14"/>
+                </a:solidFill>
+                <a:latin typeface="Menlo"/>
+              </a:rPr>
+              <a:t>PODRÍAS</a:t>
+            </a:r>
+          </a:p>
+          <a:p>
+            <a:pPr>
+              <a:lnSpc>
+                <a:spcPct val="135000"/>
+              </a:lnSpc>
+              <a:spcBef>
+                <a:spcPts val="0"/>
+              </a:spcBef>
+              <a:spcAft>
+                <a:spcPts val="300"/>
+              </a:spcAft>
+            </a:pPr>
+            <a:r>
+              <a:rPr sz="1350" b="0" i="0">
+                <a:solidFill>
+                  <a:srgbClr val="444444"/>
+                </a:solidFill>
+                <a:latin typeface="Iowan Old Style"/>
+              </a:rPr>
+              <a:t>☐  figure con figcaption de pie de foto</a:t>
+            </a:r>
+          </a:p>
+          <a:p>
+            <a:pPr>
+              <a:lnSpc>
+                <a:spcPct val="135000"/>
+              </a:lnSpc>
+              <a:spcBef>
+                <a:spcPts val="0"/>
+              </a:spcBef>
+              <a:spcAft>
+                <a:spcPts val="300"/>
+              </a:spcAft>
+            </a:pPr>
+            <a:r>
+              <a:rPr sz="1350" b="0" i="0">
+                <a:solidFill>
+                  <a:srgbClr val="444444"/>
+                </a:solidFill>
+                <a:latin typeface="Iowan Old Style"/>
+              </a:rPr>
+              <a:t>☐  Un favicon y una meta description</a:t>
+            </a:r>
+          </a:p>
+          <a:p>
+            <a:pPr>
+              <a:lnSpc>
+                <a:spcPct val="135000"/>
+              </a:lnSpc>
+              <a:spcBef>
+                <a:spcPts val="0"/>
+              </a:spcBef>
+              <a:spcAft>
+                <a:spcPts val="300"/>
+              </a:spcAft>
+            </a:pPr>
+            <a:r>
+              <a:rPr sz="1350" b="0" i="0">
+                <a:solidFill>
+                  <a:srgbClr val="444444"/>
+                </a:solidFill>
+                <a:latin typeface="Iowan Old Style"/>
+              </a:rPr>
+              <a:t>☐  Un iframe de Vimeo o Bandcamp</a:t>
+            </a:r>
+          </a:p>
+          <a:p>
+            <a:pPr>
+              <a:lnSpc>
+                <a:spcPct val="135000"/>
+              </a:lnSpc>
+              <a:spcBef>
+                <a:spcPts val="0"/>
+              </a:spcBef>
+              <a:spcAft>
+                <a:spcPts val="300"/>
+              </a:spcAft>
+            </a:pPr>
+            <a:r>
+              <a:rPr sz="1350" b="0" i="0">
+                <a:solidFill>
+                  <a:srgbClr val="444444"/>
+                </a:solidFill>
+                <a:latin typeface="Iowan Old Style"/>
+              </a:rPr>
+              <a:t>☐  loading="lazy" en las imágenes</a:t>
             </a:r>
           </a:p>
           <a:p>
@@ -10728,7 +10927,7 @@
             <a:avLst/>
           </a:prstGeom>
           <a:solidFill>
-            <a:srgbClr val="0A0A0A"/>
+            <a:srgbClr val="FDFBE9"/>
           </a:solidFill>
           <a:ln>
             <a:noFill/>
@@ -10759,14 +10958,58 @@
       </p:sp>
       <p:sp>
         <p:nvSpPr>
-          <p:cNvPr id="3" name="TextBox 2"/>
+          <p:cNvPr id="3" name="Rectangle 2"/>
+          <p:cNvSpPr/>
+          <p:nvPr/>
+        </p:nvSpPr>
+        <p:spPr>
+          <a:xfrm>
+            <a:off x="0" y="0"/>
+            <a:ext cx="54864" cy="6858000"/>
+          </a:xfrm>
+          <a:prstGeom prst="rect">
+            <a:avLst/>
+          </a:prstGeom>
+          <a:solidFill>
+            <a:srgbClr val="E8DD58"/>
+          </a:solidFill>
+          <a:ln>
+            <a:noFill/>
+          </a:ln>
+          <a:effectLst/>
+        </p:spPr>
+        <p:style>
+          <a:lnRef idx="1">
+            <a:schemeClr val="accent1"/>
+          </a:lnRef>
+          <a:fillRef idx="3">
+            <a:schemeClr val="accent1"/>
+          </a:fillRef>
+          <a:effectRef idx="2">
+            <a:schemeClr val="accent1"/>
+          </a:effectRef>
+          <a:fontRef idx="minor">
+            <a:schemeClr val="lt1"/>
+          </a:fontRef>
+        </p:style>
+        <p:txBody>
+          <a:bodyPr rtlCol="0" anchor="ctr"/>
+          <a:lstStyle/>
+          <a:p>
+            <a:pPr algn="ctr"/>
+          </a:p>
+        </p:txBody>
+      </p:sp>
+      <p:sp>
+        <p:nvSpPr>
+          <p:cNvPr id="4" name="TextBox 3"/>
           <p:cNvSpPr txBox="1"/>
           <p:nvPr/>
         </p:nvSpPr>
         <p:spPr>
           <a:xfrm>
-            <a:off x="777240" y="1920240"/>
-            <a:ext cx="10637215" cy="3108960"/>
+            <a:off x="777240" y="310896"/>
+            <a:ext cx="10637215" cy="219456"/>
           </a:xfrm>
           <a:prstGeom prst="rect">
             <a:avLst/>
@@ -10787,61 +11030,306 @@
                 <a:spcPts val="0"/>
               </a:spcBef>
               <a:spcAft>
-                <a:spcPts val="2000"/>
-              </a:spcAft>
-            </a:pPr>
-            <a:r>
-              <a:rPr sz="1100" b="0" i="0" spc="300">
+                <a:spcPts val="600"/>
+              </a:spcAft>
+            </a:pPr>
+            <a:r>
+              <a:rPr sz="950" b="0" i="0" spc="800">
+                <a:solidFill>
+                  <a:srgbClr val="8A7C14"/>
+                </a:solidFill>
+                <a:latin typeface="Menlo"/>
+              </a:rPr>
+              <a:t>PRÁCTICA</a:t>
+            </a:r>
+          </a:p>
+        </p:txBody>
+      </p:sp>
+      <p:sp>
+        <p:nvSpPr>
+          <p:cNvPr id="5" name="TextBox 4"/>
+          <p:cNvSpPr txBox="1"/>
+          <p:nvPr/>
+        </p:nvSpPr>
+        <p:spPr>
+          <a:xfrm>
+            <a:off x="777240" y="777240"/>
+            <a:ext cx="10637215" cy="274320"/>
+          </a:xfrm>
+          <a:prstGeom prst="rect">
+            <a:avLst/>
+          </a:prstGeom>
+          <a:noFill/>
+        </p:spPr>
+        <p:txBody>
+          <a:bodyPr wrap="square" lIns="0" rIns="0" tIns="0" bIns="0">
+            <a:spAutoFit/>
+          </a:bodyPr>
+          <a:lstStyle/>
+          <a:p>
+            <a:pPr>
+              <a:lnSpc>
+                <a:spcPct val="125000"/>
+              </a:lnSpc>
+              <a:spcBef>
+                <a:spcPts val="0"/>
+              </a:spcBef>
+              <a:spcAft>
+                <a:spcPts val="600"/>
+              </a:spcAft>
+            </a:pPr>
+            <a:r>
+              <a:rPr sz="1000" b="0" i="0" spc="300">
                 <a:solidFill>
                   <a:srgbClr val="8A8A8A"/>
                 </a:solidFill>
                 <a:latin typeface="Menlo"/>
               </a:rPr>
-              <a:t>01:45 · 15 MINUTOS</a:t>
-            </a:r>
-          </a:p>
-          <a:p>
-            <a:pPr>
-              <a:lnSpc>
-                <a:spcPct val="110000"/>
-              </a:lnSpc>
-              <a:spcBef>
-                <a:spcPts val="0"/>
-              </a:spcBef>
-              <a:spcAft>
-                <a:spcPts val="1800"/>
-              </a:spcAft>
-            </a:pPr>
-            <a:r>
-              <a:rPr sz="4000" b="0" i="0">
-                <a:solidFill>
-                  <a:srgbClr val="FFFFFF"/>
+              <a:t>EJERCICIOS 1 Y 2   ·   LO QUE PUEDES USAR HOY</a:t>
+            </a:r>
+          </a:p>
+        </p:txBody>
+      </p:sp>
+      <p:sp>
+        <p:nvSpPr>
+          <p:cNvPr id="6" name="Rectangle 5"/>
+          <p:cNvSpPr/>
+          <p:nvPr/>
+        </p:nvSpPr>
+        <p:spPr>
+          <a:xfrm>
+            <a:off x="777240" y="1161288"/>
+            <a:ext cx="10637215" cy="9525"/>
+          </a:xfrm>
+          <a:prstGeom prst="rect">
+            <a:avLst/>
+          </a:prstGeom>
+          <a:solidFill>
+            <a:srgbClr val="D8D8D8"/>
+          </a:solidFill>
+          <a:ln>
+            <a:noFill/>
+          </a:ln>
+          <a:effectLst/>
+        </p:spPr>
+        <p:style>
+          <a:lnRef idx="1">
+            <a:schemeClr val="accent1"/>
+          </a:lnRef>
+          <a:fillRef idx="3">
+            <a:schemeClr val="accent1"/>
+          </a:fillRef>
+          <a:effectRef idx="2">
+            <a:schemeClr val="accent1"/>
+          </a:effectRef>
+          <a:fontRef idx="minor">
+            <a:schemeClr val="lt1"/>
+          </a:fontRef>
+        </p:style>
+        <p:txBody>
+          <a:bodyPr rtlCol="0" anchor="ctr"/>
+          <a:lstStyle/>
+          <a:p>
+            <a:pPr algn="ctr"/>
+          </a:p>
+        </p:txBody>
+      </p:sp>
+      <p:sp>
+        <p:nvSpPr>
+          <p:cNvPr id="7" name="TextBox 6"/>
+          <p:cNvSpPr txBox="1"/>
+          <p:nvPr/>
+        </p:nvSpPr>
+        <p:spPr>
+          <a:xfrm>
+            <a:off x="777240" y="1417320"/>
+            <a:ext cx="10637215" cy="822960"/>
+          </a:xfrm>
+          <a:prstGeom prst="rect">
+            <a:avLst/>
+          </a:prstGeom>
+          <a:noFill/>
+        </p:spPr>
+        <p:txBody>
+          <a:bodyPr wrap="square" lIns="0" rIns="0" tIns="0" bIns="0">
+            <a:spAutoFit/>
+          </a:bodyPr>
+          <a:lstStyle/>
+          <a:p>
+            <a:pPr>
+              <a:lnSpc>
+                <a:spcPct val="112000"/>
+              </a:lnSpc>
+              <a:spcBef>
+                <a:spcPts val="0"/>
+              </a:spcBef>
+              <a:spcAft>
+                <a:spcPts val="600"/>
+              </a:spcAft>
+            </a:pPr>
+            <a:r>
+              <a:rPr sz="2700" b="0" i="0">
+                <a:solidFill>
+                  <a:srgbClr val="0A0A0A"/>
                 </a:solidFill>
                 <a:latin typeface="Inknut Antiqua"/>
               </a:rPr>
-              <a:t>pausa</a:t>
-            </a:r>
-          </a:p>
-          <a:p>
-            <a:pPr>
-              <a:lnSpc>
-                <a:spcPct val="140000"/>
-              </a:lnSpc>
-              <a:spcBef>
-                <a:spcPts val="0"/>
-              </a:spcBef>
-              <a:spcAft>
-                <a:spcPts val="600"/>
-              </a:spcAft>
-            </a:pPr>
-            <a:r>
-              <a:rPr sz="1700" b="0" i="0">
-                <a:solidFill>
-                  <a:srgbClr val="BBBBBB"/>
+              <a:t>caja de herramientas · html</a:t>
+            </a:r>
+          </a:p>
+        </p:txBody>
+      </p:sp>
+      <p:sp>
+        <p:nvSpPr>
+          <p:cNvPr id="8" name="TextBox 7"/>
+          <p:cNvSpPr txBox="1"/>
+          <p:nvPr/>
+        </p:nvSpPr>
+        <p:spPr>
+          <a:xfrm>
+            <a:off x="777240" y="2057400"/>
+            <a:ext cx="10637215" cy="4251960"/>
+          </a:xfrm>
+          <a:prstGeom prst="rect">
+            <a:avLst/>
+          </a:prstGeom>
+          <a:noFill/>
+        </p:spPr>
+        <p:txBody>
+          <a:bodyPr wrap="square" lIns="0" rIns="0" tIns="0" bIns="0">
+            <a:spAutoFit/>
+          </a:bodyPr>
+          <a:lstStyle/>
+          <a:p>
+            <a:pPr>
+              <a:lnSpc>
+                <a:spcPct val="133480"/>
+              </a:lnSpc>
+              <a:spcBef>
+                <a:spcPts val="0"/>
+              </a:spcBef>
+              <a:spcAft>
+                <a:spcPts val="749"/>
+              </a:spcAft>
+            </a:pPr>
+            <a:r>
+              <a:rPr sz="1248" b="0" i="0">
+                <a:solidFill>
+                  <a:srgbClr val="444444"/>
                 </a:solidFill>
                 <a:latin typeface="Iowan Old Style"/>
               </a:rPr>
-              <a:t>Estirar las piernas. Quien no tenga cuenta de GitHub, este es el momento.</a:t>
+              <a:t>Todo lo que sabes escribir a estas alturas del día. Lo de la derecha no hace falta hoy, pero está ahí para cuando quieras.</a:t>
+            </a:r>
+          </a:p>
+          <a:p>
+            <a:pPr>
+              <a:lnSpc>
+                <a:spcPct val="133480"/>
+              </a:lnSpc>
+              <a:spcBef>
+                <a:spcPts val="0"/>
+              </a:spcBef>
+              <a:spcAft>
+                <a:spcPts val="749"/>
+              </a:spcAft>
+            </a:pPr>
+            <a:r>
+              <a:rPr sz="1248" b="0" i="0">
+                <a:solidFill>
+                  <a:srgbClr val="444444"/>
+                </a:solidFill>
+                <a:latin typeface="Iowan Old Style"/>
+              </a:rPr>
+              <a:t>cada una explicada, con todas sus opciones, en el chuletón</a:t>
+            </a:r>
+          </a:p>
+          <a:p>
+            <a:pPr>
+              <a:lnSpc>
+                <a:spcPct val="117500"/>
+              </a:lnSpc>
+              <a:spcBef>
+                <a:spcPts val="1000"/>
+              </a:spcBef>
+              <a:spcAft>
+                <a:spcPts val="332"/>
+              </a:spcAft>
+            </a:pPr>
+            <a:r>
+              <a:rPr sz="950" b="0" i="0" spc="500">
+                <a:solidFill>
+                  <a:srgbClr val="8A8A8A"/>
+                </a:solidFill>
+                <a:latin typeface="Menlo"/>
+              </a:rPr>
+              <a:t>ESENCIALES</a:t>
+            </a:r>
+          </a:p>
+          <a:p>
+            <a:pPr>
+              <a:lnSpc>
+                <a:spcPct val="145700"/>
+              </a:lnSpc>
+              <a:spcBef>
+                <a:spcPts val="0"/>
+              </a:spcBef>
+              <a:spcAft>
+                <a:spcPts val="499"/>
+              </a:spcAft>
+            </a:pPr>
+            <a:r>
+              <a:rPr sz="998" b="0" i="0">
+                <a:solidFill>
+                  <a:srgbClr val="0A0A0A"/>
+                </a:solidFill>
+                <a:latin typeface="Menlo"/>
+              </a:rPr>
+              <a:t>&lt;h1&gt; … &lt;h6&gt;   ·   &lt;p&gt;   ·   &lt;br&gt;   ·   &lt;hr&gt;   ·   &lt;strong&gt;   ·   &lt;em&gt;   ·   &lt;small&gt;   ·   &lt;ul&gt; &lt;li&gt;   ·   &lt;ol&gt;   ·   &lt;a href="pagina.html"&gt;   ·   &lt;a href="https://…"&gt;   ·   &lt;a href="mailto:…"&gt;   ·   &lt;img src alt&gt;   ·   &lt;header&gt;   ·   &lt;nav&gt;   ·   &lt;main&gt;   ·   &lt;footer&gt;   ·   &lt;article&gt;   ·   &lt;title&gt;   ·   &lt;!-- comentario --&gt;   ·   class="…"</a:t>
+            </a:r>
+          </a:p>
+          <a:p>
+            <a:pPr>
+              <a:lnSpc>
+                <a:spcPct val="117500"/>
+              </a:lnSpc>
+              <a:spcBef>
+                <a:spcPts val="1000"/>
+              </a:spcBef>
+              <a:spcAft>
+                <a:spcPts val="332"/>
+              </a:spcAft>
+            </a:pPr>
+            <a:r>
+              <a:rPr sz="950" b="0" i="0" spc="500">
+                <a:solidFill>
+                  <a:srgbClr val="8A8A8A"/>
+                </a:solidFill>
+                <a:latin typeface="Menlo"/>
+              </a:rPr>
+              <a:t>AVANZADAS</a:t>
+            </a:r>
+          </a:p>
+          <a:p>
+            <a:pPr>
+              <a:lnSpc>
+                <a:spcPct val="145700"/>
+              </a:lnSpc>
+              <a:spcBef>
+                <a:spcPts val="0"/>
+              </a:spcBef>
+              <a:spcAft>
+                <a:spcPts val="499"/>
+              </a:spcAft>
+            </a:pPr>
+            <a:r>
+              <a:rPr sz="998" b="0" i="0">
+                <a:solidFill>
+                  <a:srgbClr val="0A0A0A"/>
+                </a:solidFill>
+                <a:latin typeface="Menlo"/>
+              </a:rPr>
+              <a:t>&lt;figure&gt; &lt;figcaption&gt;   ·   &lt;details&gt; &lt;summary&gt;   ·   &lt;iframe&gt;   ·   &lt;video&gt;   ·   &lt;audio&gt;   ·   &lt;a download&gt;   ·   &lt;a href="#ancla"&gt;   ·   id="…"   ·   loading="lazy"   ·   width · height   ·   &lt;mark&gt;   ·   &lt;blockquote&gt;   ·   favicon   ·   meta description   ·   target="_blank"</a:t>
             </a:r>
           </a:p>
         </p:txBody>
@@ -11111,39 +11599,17 @@
                 <a:spcPts val="0"/>
               </a:spcBef>
               <a:spcAft>
-                <a:spcPts val="1400"/>
-              </a:spcAft>
-            </a:pPr>
-            <a:r>
-              <a:rPr sz="1200" b="0" i="0" spc="600">
+                <a:spcPts val="2000"/>
+              </a:spcAft>
+            </a:pPr>
+            <a:r>
+              <a:rPr sz="1100" b="0" i="0" spc="300">
                 <a:solidFill>
                   <a:srgbClr val="8A8A8A"/>
                 </a:solidFill>
                 <a:latin typeface="Menlo"/>
               </a:rPr>
-              <a:t>TEORÍA · LO EXPLICO YO</a:t>
-            </a:r>
-          </a:p>
-          <a:p>
-            <a:pPr>
-              <a:lnSpc>
-                <a:spcPct val="125000"/>
-              </a:lnSpc>
-              <a:spcBef>
-                <a:spcPts val="0"/>
-              </a:spcBef>
-              <a:spcAft>
-                <a:spcPts val="2000"/>
-              </a:spcAft>
-            </a:pPr>
-            <a:r>
-              <a:rPr sz="1100" b="0" i="0" spc="300">
-                <a:solidFill>
-                  <a:srgbClr val="8A8A8A"/>
-                </a:solidFill>
-                <a:latin typeface="Menlo"/>
-              </a:rPr>
-              <a:t>02:00 · 10 MINUTOS</a:t>
+              <a:t>01:45 · 15 MINUTOS</a:t>
             </a:r>
           </a:p>
           <a:p>
@@ -11165,7 +11631,7 @@
                 </a:solidFill>
                 <a:latin typeface="Inknut Antiqua"/>
               </a:rPr>
-              <a:t>la segunda página</a:t>
+              <a:t>pausa</a:t>
             </a:r>
           </a:p>
           <a:p>
@@ -11187,7 +11653,7 @@
                 </a:solidFill>
                 <a:latin typeface="Iowan Old Style"/>
               </a:rPr>
-              <a:t>Diez minutos de explicación y os suelto media hora.</a:t>
+              <a:t>Estirar las piernas. Quien no tenga cuenta de GitHub, este es el momento.</a:t>
             </a:r>
           </a:p>
         </p:txBody>
@@ -11225,7 +11691,7 @@
             <a:avLst/>
           </a:prstGeom>
           <a:solidFill>
-            <a:srgbClr val="FFFFFF"/>
+            <a:srgbClr val="0A0A0A"/>
           </a:solidFill>
           <a:ln>
             <a:noFill/>
@@ -11262,8 +11728,8 @@
         </p:nvSpPr>
         <p:spPr>
           <a:xfrm>
-            <a:off x="777240" y="310896"/>
-            <a:ext cx="10637215" cy="219456"/>
+            <a:off x="777240" y="1920240"/>
+            <a:ext cx="10637215" cy="3108960"/>
           </a:xfrm>
           <a:prstGeom prst="rect">
             <a:avLst/>
@@ -11284,240 +11750,83 @@
                 <a:spcPts val="0"/>
               </a:spcBef>
               <a:spcAft>
+                <a:spcPts val="1400"/>
+              </a:spcAft>
+            </a:pPr>
+            <a:r>
+              <a:rPr sz="1200" b="0" i="0" spc="600">
+                <a:solidFill>
+                  <a:srgbClr val="8A8A8A"/>
+                </a:solidFill>
+                <a:latin typeface="Menlo"/>
+              </a:rPr>
+              <a:t>TEORÍA · LO EXPLICO YO</a:t>
+            </a:r>
+          </a:p>
+          <a:p>
+            <a:pPr>
+              <a:lnSpc>
+                <a:spcPct val="125000"/>
+              </a:lnSpc>
+              <a:spcBef>
+                <a:spcPts val="0"/>
+              </a:spcBef>
+              <a:spcAft>
+                <a:spcPts val="2000"/>
+              </a:spcAft>
+            </a:pPr>
+            <a:r>
+              <a:rPr sz="1100" b="0" i="0" spc="300">
+                <a:solidFill>
+                  <a:srgbClr val="8A8A8A"/>
+                </a:solidFill>
+                <a:latin typeface="Menlo"/>
+              </a:rPr>
+              <a:t>02:00 · 10 MINUTOS</a:t>
+            </a:r>
+          </a:p>
+          <a:p>
+            <a:pPr>
+              <a:lnSpc>
+                <a:spcPct val="110000"/>
+              </a:lnSpc>
+              <a:spcBef>
+                <a:spcPts val="0"/>
+              </a:spcBef>
+              <a:spcAft>
+                <a:spcPts val="1800"/>
+              </a:spcAft>
+            </a:pPr>
+            <a:r>
+              <a:rPr sz="4000" b="0" i="0">
+                <a:solidFill>
+                  <a:srgbClr val="FFFFFF"/>
+                </a:solidFill>
+                <a:latin typeface="Inknut Antiqua"/>
+              </a:rPr>
+              <a:t>la segunda página</a:t>
+            </a:r>
+          </a:p>
+          <a:p>
+            <a:pPr>
+              <a:lnSpc>
+                <a:spcPct val="140000"/>
+              </a:lnSpc>
+              <a:spcBef>
+                <a:spcPts val="0"/>
+              </a:spcBef>
+              <a:spcAft>
                 <a:spcPts val="600"/>
               </a:spcAft>
             </a:pPr>
             <a:r>
-              <a:rPr sz="950" b="0" i="0" spc="800">
-                <a:solidFill>
-                  <a:srgbClr val="8A8A8A"/>
-                </a:solidFill>
-                <a:latin typeface="Menlo"/>
-              </a:rPr>
-              <a:t>TEORÍA</a:t>
-            </a:r>
-          </a:p>
-        </p:txBody>
-      </p:sp>
-      <p:sp>
-        <p:nvSpPr>
-          <p:cNvPr id="4" name="TextBox 3"/>
-          <p:cNvSpPr txBox="1"/>
-          <p:nvPr/>
-        </p:nvSpPr>
-        <p:spPr>
-          <a:xfrm>
-            <a:off x="777240" y="777240"/>
-            <a:ext cx="10637215" cy="274320"/>
-          </a:xfrm>
-          <a:prstGeom prst="rect">
-            <a:avLst/>
-          </a:prstGeom>
-          <a:noFill/>
-        </p:spPr>
-        <p:txBody>
-          <a:bodyPr wrap="square" lIns="0" rIns="0" tIns="0" bIns="0">
-            <a:spAutoFit/>
-          </a:bodyPr>
-          <a:lstStyle/>
-          <a:p>
-            <a:pPr>
-              <a:lnSpc>
-                <a:spcPct val="125000"/>
-              </a:lnSpc>
-              <a:spcBef>
-                <a:spcPts val="0"/>
-              </a:spcBef>
-              <a:spcAft>
-                <a:spcPts val="600"/>
-              </a:spcAft>
-            </a:pPr>
-            <a:r>
-              <a:rPr sz="1000" b="0" i="0" spc="300">
-                <a:solidFill>
-                  <a:srgbClr val="8A8A8A"/>
-                </a:solidFill>
-                <a:latin typeface="Menlo"/>
-              </a:rPr>
-              <a:t>02:00</a:t>
-            </a:r>
-          </a:p>
-        </p:txBody>
-      </p:sp>
-      <p:sp>
-        <p:nvSpPr>
-          <p:cNvPr id="5" name="Rectangle 4"/>
-          <p:cNvSpPr/>
-          <p:nvPr/>
-        </p:nvSpPr>
-        <p:spPr>
-          <a:xfrm>
-            <a:off x="777240" y="1161288"/>
-            <a:ext cx="10637215" cy="9525"/>
-          </a:xfrm>
-          <a:prstGeom prst="rect">
-            <a:avLst/>
-          </a:prstGeom>
-          <a:solidFill>
-            <a:srgbClr val="D8D8D8"/>
-          </a:solidFill>
-          <a:ln>
-            <a:noFill/>
-          </a:ln>
-          <a:effectLst/>
-        </p:spPr>
-        <p:style>
-          <a:lnRef idx="1">
-            <a:schemeClr val="accent1"/>
-          </a:lnRef>
-          <a:fillRef idx="3">
-            <a:schemeClr val="accent1"/>
-          </a:fillRef>
-          <a:effectRef idx="2">
-            <a:schemeClr val="accent1"/>
-          </a:effectRef>
-          <a:fontRef idx="minor">
-            <a:schemeClr val="lt1"/>
-          </a:fontRef>
-        </p:style>
-        <p:txBody>
-          <a:bodyPr rtlCol="0" anchor="ctr"/>
-          <a:lstStyle/>
-          <a:p>
-            <a:pPr algn="ctr"/>
-          </a:p>
-        </p:txBody>
-      </p:sp>
-      <p:sp>
-        <p:nvSpPr>
-          <p:cNvPr id="6" name="TextBox 5"/>
-          <p:cNvSpPr txBox="1"/>
-          <p:nvPr/>
-        </p:nvSpPr>
-        <p:spPr>
-          <a:xfrm>
-            <a:off x="777240" y="1417320"/>
-            <a:ext cx="10637215" cy="822960"/>
-          </a:xfrm>
-          <a:prstGeom prst="rect">
-            <a:avLst/>
-          </a:prstGeom>
-          <a:noFill/>
-        </p:spPr>
-        <p:txBody>
-          <a:bodyPr wrap="square" lIns="0" rIns="0" tIns="0" bIns="0">
-            <a:spAutoFit/>
-          </a:bodyPr>
-          <a:lstStyle/>
-          <a:p>
-            <a:pPr>
-              <a:lnSpc>
-                <a:spcPct val="112000"/>
-              </a:lnSpc>
-              <a:spcBef>
-                <a:spcPts val="0"/>
-              </a:spcBef>
-              <a:spcAft>
-                <a:spcPts val="600"/>
-              </a:spcAft>
-            </a:pPr>
-            <a:r>
-              <a:rPr sz="2700" b="0" i="0">
-                <a:solidFill>
-                  <a:srgbClr val="0A0A0A"/>
-                </a:solidFill>
-                <a:latin typeface="Inknut Antiqua"/>
-              </a:rPr>
-              <a:t>duplicar, enlazar, repetir</a:t>
-            </a:r>
-          </a:p>
-        </p:txBody>
-      </p:sp>
-      <p:sp>
-        <p:nvSpPr>
-          <p:cNvPr id="7" name="TextBox 6"/>
-          <p:cNvSpPr txBox="1"/>
-          <p:nvPr/>
-        </p:nvSpPr>
-        <p:spPr>
-          <a:xfrm>
-            <a:off x="777240" y="2057400"/>
-            <a:ext cx="10637215" cy="4251960"/>
-          </a:xfrm>
-          <a:prstGeom prst="rect">
-            <a:avLst/>
-          </a:prstGeom>
-          <a:noFill/>
-        </p:spPr>
-        <p:txBody>
-          <a:bodyPr wrap="square" lIns="0" rIns="0" tIns="0" bIns="0">
-            <a:spAutoFit/>
-          </a:bodyPr>
-          <a:lstStyle/>
-          <a:p>
-            <a:pPr>
-              <a:lnSpc>
-                <a:spcPct val="142000"/>
-              </a:lnSpc>
-              <a:spcBef>
-                <a:spcPts val="0"/>
-              </a:spcBef>
-              <a:spcAft>
-                <a:spcPts val="900"/>
-              </a:spcAft>
-            </a:pPr>
-            <a:r>
-              <a:rPr sz="1500" b="0" i="0">
-                <a:solidFill>
-                  <a:srgbClr val="444444"/>
+              <a:rPr sz="1700" b="0" i="0">
+                <a:solidFill>
+                  <a:srgbClr val="BBBBBB"/>
                 </a:solidFill>
                 <a:latin typeface="Iowan Old Style"/>
               </a:rPr>
-              <a:t>Para el siguiente proyecto: copias el bloque entero, lo pegas debajo y cambias el texto. Así de aburrido. Así de fiable.</a:t>
-            </a:r>
-          </a:p>
-          <a:p>
-            <a:pPr>
-              <a:lnSpc>
-                <a:spcPct val="125000"/>
-              </a:lnSpc>
-              <a:spcBef>
-                <a:spcPts val="1000"/>
-              </a:spcBef>
-              <a:spcAft>
-                <a:spcPts val="300"/>
-              </a:spcAft>
-            </a:pPr>
-            <a:r>
-              <a:rPr sz="1000" b="0" i="0" spc="300">
-                <a:solidFill>
-                  <a:srgbClr val="8A8A8A"/>
-                </a:solidFill>
-                <a:latin typeface="Menlo"/>
-              </a:rPr>
-              <a:t>EL FALLO TÍPICO</a:t>
-            </a:r>
-          </a:p>
-          <a:p>
-            <a:pPr>
-              <a:lnSpc>
-                <a:spcPct val="140000"/>
-              </a:lnSpc>
-              <a:spcBef>
-                <a:spcPts val="0"/>
-              </a:spcBef>
-              <a:spcAft>
-                <a:spcPts val="800"/>
-              </a:spcAft>
-            </a:pPr>
-            <a:r>
-              <a:rPr sz="1400" b="0" i="0">
-                <a:solidFill>
-                  <a:srgbClr val="444444"/>
-                </a:solidFill>
-                <a:latin typeface="Iowan Old Style"/>
-              </a:rPr>
-              <a:t>Añadir el enlace nuevo solo en una de las dos páginas. Desde la otra no se llega, y parece que el enlace está mal cuando lo que falta es repetirlo.</a:t>
+              <a:t>Diez minutos de explicación y os suelto media hora.</a:t>
             </a:r>
           </a:p>
         </p:txBody>
@@ -11592,8 +11901,8 @@
         </p:nvSpPr>
         <p:spPr>
           <a:xfrm>
-            <a:off x="777240" y="777240"/>
-            <a:ext cx="10637215" cy="274320"/>
+            <a:off x="777240" y="310896"/>
+            <a:ext cx="10637215" cy="219456"/>
           </a:xfrm>
           <a:prstGeom prst="rect">
             <a:avLst/>
@@ -11618,13 +11927,13 @@
               </a:spcAft>
             </a:pPr>
             <a:r>
-              <a:rPr sz="1000" b="0" i="0" spc="300">
+              <a:rPr sz="950" b="0" i="0" spc="800">
                 <a:solidFill>
                   <a:srgbClr val="8A8A8A"/>
                 </a:solidFill>
                 <a:latin typeface="Menlo"/>
               </a:rPr>
-              <a:t>02:00</a:t>
+              <a:t>TEORÍA</a:t>
             </a:r>
           </a:p>
         </p:txBody>
@@ -11637,8 +11946,8 @@
         </p:nvSpPr>
         <p:spPr>
           <a:xfrm>
-            <a:off x="777240" y="1188720"/>
-            <a:ext cx="10637215" cy="548640"/>
+            <a:off x="777240" y="777240"/>
+            <a:ext cx="10637215" cy="274320"/>
           </a:xfrm>
           <a:prstGeom prst="rect">
             <a:avLst/>
@@ -11663,13 +11972,13 @@
               </a:spcAft>
             </a:pPr>
             <a:r>
-              <a:rPr sz="2400" b="0" i="0">
-                <a:solidFill>
-                  <a:srgbClr val="0A0A0A"/>
-                </a:solidFill>
-                <a:latin typeface="Inknut Antiqua"/>
-              </a:rPr>
-              <a:t>duplicar, enlazar, repetir</a:t>
+              <a:rPr sz="1000" b="0" i="0" spc="300">
+                <a:solidFill>
+                  <a:srgbClr val="8A8A8A"/>
+                </a:solidFill>
+                <a:latin typeface="Menlo"/>
+              </a:rPr>
+              <a:t>02:00</a:t>
             </a:r>
           </a:p>
         </p:txBody>
@@ -11682,19 +11991,17 @@
         </p:nvSpPr>
         <p:spPr>
           <a:xfrm>
-            <a:off x="777240" y="1874520"/>
-            <a:ext cx="10637215" cy="1600200"/>
+            <a:off x="777240" y="1161288"/>
+            <a:ext cx="10637215" cy="9525"/>
           </a:xfrm>
           <a:prstGeom prst="rect">
             <a:avLst/>
           </a:prstGeom>
           <a:solidFill>
-            <a:srgbClr val="F6F6F3"/>
+            <a:srgbClr val="D8D8D8"/>
           </a:solidFill>
-          <a:ln w="9525">
-            <a:solidFill>
-              <a:srgbClr val="D8D8D8"/>
-            </a:solidFill>
+          <a:ln>
+            <a:noFill/>
           </a:ln>
           <a:effectLst/>
         </p:spPr>
@@ -11728,8 +12035,8 @@
         </p:nvSpPr>
         <p:spPr>
           <a:xfrm>
-            <a:off x="1033272" y="2075688"/>
-            <a:ext cx="10125151" cy="1197864"/>
+            <a:off x="777240" y="1417320"/>
+            <a:ext cx="10637215" cy="822960"/>
           </a:xfrm>
           <a:prstGeom prst="rect">
             <a:avLst/>
@@ -11744,89 +12051,112 @@
           <a:p>
             <a:pPr>
               <a:lnSpc>
-                <a:spcPct val="132000"/>
-              </a:lnSpc>
-              <a:spcBef>
-                <a:spcPts val="0"/>
-              </a:spcBef>
-              <a:spcAft>
-                <a:spcPts val="0"/>
-              </a:spcAft>
-            </a:pPr>
-            <a:r>
-              <a:rPr sz="1600" b="0" i="0">
+                <a:spcPct val="112000"/>
+              </a:lnSpc>
+              <a:spcBef>
+                <a:spcPts val="0"/>
+              </a:spcBef>
+              <a:spcAft>
+                <a:spcPts val="600"/>
+              </a:spcAft>
+            </a:pPr>
+            <a:r>
+              <a:rPr sz="2700" b="0" i="0">
                 <a:solidFill>
                   <a:srgbClr val="0A0A0A"/>
                 </a:solidFill>
+                <a:latin typeface="Inknut Antiqua"/>
+              </a:rPr>
+              <a:t>duplicar, enlazar, repetir</a:t>
+            </a:r>
+          </a:p>
+        </p:txBody>
+      </p:sp>
+      <p:sp>
+        <p:nvSpPr>
+          <p:cNvPr id="7" name="TextBox 6"/>
+          <p:cNvSpPr txBox="1"/>
+          <p:nvPr/>
+        </p:nvSpPr>
+        <p:spPr>
+          <a:xfrm>
+            <a:off x="777240" y="2057400"/>
+            <a:ext cx="10637215" cy="4251960"/>
+          </a:xfrm>
+          <a:prstGeom prst="rect">
+            <a:avLst/>
+          </a:prstGeom>
+          <a:noFill/>
+        </p:spPr>
+        <p:txBody>
+          <a:bodyPr wrap="square" lIns="0" rIns="0" tIns="0" bIns="0">
+            <a:spAutoFit/>
+          </a:bodyPr>
+          <a:lstStyle/>
+          <a:p>
+            <a:pPr>
+              <a:lnSpc>
+                <a:spcPct val="142000"/>
+              </a:lnSpc>
+              <a:spcBef>
+                <a:spcPts val="0"/>
+              </a:spcBef>
+              <a:spcAft>
+                <a:spcPts val="900"/>
+              </a:spcAft>
+            </a:pPr>
+            <a:r>
+              <a:rPr sz="1500" b="0" i="0">
+                <a:solidFill>
+                  <a:srgbClr val="444444"/>
+                </a:solidFill>
+                <a:latin typeface="Iowan Old Style"/>
+              </a:rPr>
+              <a:t>Para el siguiente proyecto: copias el bloque entero, lo pegas debajo y cambias el texto. Así de aburrido. Así de fiable.</a:t>
+            </a:r>
+          </a:p>
+          <a:p>
+            <a:pPr>
+              <a:lnSpc>
+                <a:spcPct val="125000"/>
+              </a:lnSpc>
+              <a:spcBef>
+                <a:spcPts val="1000"/>
+              </a:spcBef>
+              <a:spcAft>
+                <a:spcPts val="300"/>
+              </a:spcAft>
+            </a:pPr>
+            <a:r>
+              <a:rPr sz="1000" b="0" i="0" spc="300">
+                <a:solidFill>
+                  <a:srgbClr val="8A8A8A"/>
+                </a:solidFill>
                 <a:latin typeface="Menlo"/>
               </a:rPr>
-              <a:t>&lt;nav&gt;</a:t>
-            </a:r>
-          </a:p>
-          <a:p>
-            <a:pPr>
-              <a:lnSpc>
-                <a:spcPct val="132000"/>
-              </a:lnSpc>
-              <a:spcBef>
-                <a:spcPts val="0"/>
-              </a:spcBef>
-              <a:spcAft>
-                <a:spcPts val="0"/>
-              </a:spcAft>
-            </a:pPr>
-            <a:r>
-              <a:rPr sz="1600" b="0" i="0">
-                <a:solidFill>
-                  <a:srgbClr val="0A0A0A"/>
-                </a:solidFill>
-                <a:latin typeface="Menlo"/>
-              </a:rPr>
-              <a:t>  &lt;a href="index.html"&gt;Inicio&lt;/a&gt;</a:t>
-            </a:r>
-          </a:p>
-          <a:p>
-            <a:pPr>
-              <a:lnSpc>
-                <a:spcPct val="132000"/>
-              </a:lnSpc>
-              <a:spcBef>
-                <a:spcPts val="0"/>
-              </a:spcBef>
-              <a:spcAft>
-                <a:spcPts val="0"/>
-              </a:spcAft>
-            </a:pPr>
-            <a:r>
-              <a:rPr sz="1600" b="0" i="0">
-                <a:solidFill>
-                  <a:srgbClr val="0A0A0A"/>
-                </a:solidFill>
-                <a:latin typeface="Menlo"/>
-              </a:rPr>
-              <a:t>  &lt;a href="proyectos.html"&gt;Proyectos&lt;/a&gt;</a:t>
-            </a:r>
-          </a:p>
-          <a:p>
-            <a:pPr>
-              <a:lnSpc>
-                <a:spcPct val="132000"/>
-              </a:lnSpc>
-              <a:spcBef>
-                <a:spcPts val="0"/>
-              </a:spcBef>
-              <a:spcAft>
-                <a:spcPts val="0"/>
-              </a:spcAft>
-            </a:pPr>
-            <a:r>
-              <a:rPr sz="1600" b="0" i="0">
-                <a:solidFill>
-                  <a:srgbClr val="0A0A0A"/>
-                </a:solidFill>
-                <a:latin typeface="Menlo"/>
-              </a:rPr>
-              <a:t>&lt;/nav&gt;</a:t>
+              <a:t>EL FALLO TÍPICO</a:t>
+            </a:r>
+          </a:p>
+          <a:p>
+            <a:pPr>
+              <a:lnSpc>
+                <a:spcPct val="140000"/>
+              </a:lnSpc>
+              <a:spcBef>
+                <a:spcPts val="0"/>
+              </a:spcBef>
+              <a:spcAft>
+                <a:spcPts val="800"/>
+              </a:spcAft>
+            </a:pPr>
+            <a:r>
+              <a:rPr sz="1400" b="0" i="0">
+                <a:solidFill>
+                  <a:srgbClr val="444444"/>
+                </a:solidFill>
+                <a:latin typeface="Iowan Old Style"/>
+              </a:rPr>
+              <a:t>Añadir el enlace nuevo solo en una de las dos páginas. Desde la otra no se llega, y parece que el enlace está mal cuando lo que falta es repetirlo.</a:t>
             </a:r>
           </a:p>
         </p:txBody>
@@ -11992,7 +12322,7 @@
         <p:spPr>
           <a:xfrm>
             <a:off x="777240" y="1874520"/>
-            <a:ext cx="10637215" cy="2148839"/>
+            <a:ext cx="10637215" cy="1600200"/>
           </a:xfrm>
           <a:prstGeom prst="rect">
             <a:avLst/>
@@ -12038,7 +12368,7 @@
         <p:spPr>
           <a:xfrm>
             <a:off x="1033272" y="2075688"/>
-            <a:ext cx="10125151" cy="1746503"/>
+            <a:ext cx="10125151" cy="1197864"/>
           </a:xfrm>
           <a:prstGeom prst="rect">
             <a:avLst/>
@@ -12069,7 +12399,7 @@
                 </a:solidFill>
                 <a:latin typeface="Menlo"/>
               </a:rPr>
-              <a:t>&lt;article&gt;</a:t>
+              <a:t>&lt;nav&gt;</a:t>
             </a:r>
           </a:p>
           <a:p>
@@ -12091,7 +12421,7 @@
                 </a:solidFill>
                 <a:latin typeface="Menlo"/>
               </a:rPr>
-              <a:t>  &lt;h3&gt;Cámaras sordas&lt;/h3&gt;</a:t>
+              <a:t>  &lt;a href="index.html"&gt;Inicio&lt;/a&gt;</a:t>
             </a:r>
           </a:p>
           <a:p>
@@ -12113,7 +12443,7 @@
                 </a:solidFill>
                 <a:latin typeface="Menlo"/>
               </a:rPr>
-              <a:t>  &lt;p&gt;2026 · Gres · Barcelona&lt;/p&gt;</a:t>
+              <a:t>  &lt;a href="proyectos.html"&gt;Proyectos&lt;/a&gt;</a:t>
             </a:r>
           </a:p>
           <a:p>
@@ -12135,51 +12465,7 @@
                 </a:solidFill>
                 <a:latin typeface="Menlo"/>
               </a:rPr>
-              <a:t>  &lt;img src="img/obra-1.jpg" alt="…"&gt;</a:t>
-            </a:r>
-          </a:p>
-          <a:p>
-            <a:pPr>
-              <a:lnSpc>
-                <a:spcPct val="132000"/>
-              </a:lnSpc>
-              <a:spcBef>
-                <a:spcPts val="0"/>
-              </a:spcBef>
-              <a:spcAft>
-                <a:spcPts val="0"/>
-              </a:spcAft>
-            </a:pPr>
-            <a:r>
-              <a:rPr sz="1600" b="0" i="0">
-                <a:solidFill>
-                  <a:srgbClr val="0A0A0A"/>
-                </a:solidFill>
-                <a:latin typeface="Menlo"/>
-              </a:rPr>
-              <a:t>  &lt;p&gt;Dos líneas sobre el proyecto.&lt;/p&gt;</a:t>
-            </a:r>
-          </a:p>
-          <a:p>
-            <a:pPr>
-              <a:lnSpc>
-                <a:spcPct val="132000"/>
-              </a:lnSpc>
-              <a:spcBef>
-                <a:spcPts val="0"/>
-              </a:spcBef>
-              <a:spcAft>
-                <a:spcPts val="0"/>
-              </a:spcAft>
-            </a:pPr>
-            <a:r>
-              <a:rPr sz="1600" b="0" i="0">
-                <a:solidFill>
-                  <a:srgbClr val="0A0A0A"/>
-                </a:solidFill>
-                <a:latin typeface="Menlo"/>
-              </a:rPr>
-              <a:t>&lt;/article&gt;</a:t>
+              <a:t>&lt;/nav&gt;</a:t>
             </a:r>
           </a:p>
         </p:txBody>
@@ -12217,7 +12503,7 @@
             <a:avLst/>
           </a:prstGeom>
           <a:solidFill>
-            <a:srgbClr val="F2E94E"/>
+            <a:srgbClr val="FFFFFF"/>
           </a:solidFill>
           <a:ln>
             <a:noFill/>
@@ -12254,8 +12540,8 @@
         </p:nvSpPr>
         <p:spPr>
           <a:xfrm>
-            <a:off x="777240" y="1920240"/>
-            <a:ext cx="10637215" cy="3108960"/>
+            <a:off x="777240" y="777240"/>
+            <a:ext cx="10637215" cy="274320"/>
           </a:xfrm>
           <a:prstGeom prst="rect">
             <a:avLst/>
@@ -12276,19 +12562,42 @@
                 <a:spcPts val="0"/>
               </a:spcBef>
               <a:spcAft>
-                <a:spcPts val="1400"/>
-              </a:spcAft>
-            </a:pPr>
-            <a:r>
-              <a:rPr sz="1200" b="0" i="0" spc="600">
-                <a:solidFill>
-                  <a:srgbClr val="6A6418"/>
+                <a:spcPts val="600"/>
+              </a:spcAft>
+            </a:pPr>
+            <a:r>
+              <a:rPr sz="1000" b="0" i="0" spc="300">
+                <a:solidFill>
+                  <a:srgbClr val="8A8A8A"/>
                 </a:solidFill>
                 <a:latin typeface="Menlo"/>
               </a:rPr>
-              <a:t>PRÁCTICA · LO HACÉIS VOSOTRAS</a:t>
-            </a:r>
-          </a:p>
+              <a:t>02:00</a:t>
+            </a:r>
+          </a:p>
+        </p:txBody>
+      </p:sp>
+      <p:sp>
+        <p:nvSpPr>
+          <p:cNvPr id="4" name="TextBox 3"/>
+          <p:cNvSpPr txBox="1"/>
+          <p:nvPr/>
+        </p:nvSpPr>
+        <p:spPr>
+          <a:xfrm>
+            <a:off x="777240" y="1188720"/>
+            <a:ext cx="10637215" cy="548640"/>
+          </a:xfrm>
+          <a:prstGeom prst="rect">
+            <a:avLst/>
+          </a:prstGeom>
+          <a:noFill/>
+        </p:spPr>
+        <p:txBody>
+          <a:bodyPr wrap="square" lIns="0" rIns="0" tIns="0" bIns="0">
+            <a:spAutoFit/>
+          </a:bodyPr>
+          <a:lstStyle/>
           <a:p>
             <a:pPr>
               <a:lnSpc>
@@ -12298,61 +12607,218 @@
                 <a:spcPts val="0"/>
               </a:spcBef>
               <a:spcAft>
-                <a:spcPts val="2000"/>
-              </a:spcAft>
-            </a:pPr>
-            <a:r>
-              <a:rPr sz="1100" b="0" i="0" spc="300">
-                <a:solidFill>
-                  <a:srgbClr val="6A6418"/>
+                <a:spcPts val="600"/>
+              </a:spcAft>
+            </a:pPr>
+            <a:r>
+              <a:rPr sz="2400" b="0" i="0">
+                <a:solidFill>
+                  <a:srgbClr val="0A0A0A"/>
+                </a:solidFill>
+                <a:latin typeface="Inknut Antiqua"/>
+              </a:rPr>
+              <a:t>duplicar, enlazar, repetir</a:t>
+            </a:r>
+          </a:p>
+        </p:txBody>
+      </p:sp>
+      <p:sp>
+        <p:nvSpPr>
+          <p:cNvPr id="5" name="Rectangle 4"/>
+          <p:cNvSpPr/>
+          <p:nvPr/>
+        </p:nvSpPr>
+        <p:spPr>
+          <a:xfrm>
+            <a:off x="777240" y="1874520"/>
+            <a:ext cx="10637215" cy="2148839"/>
+          </a:xfrm>
+          <a:prstGeom prst="rect">
+            <a:avLst/>
+          </a:prstGeom>
+          <a:solidFill>
+            <a:srgbClr val="F6F6F3"/>
+          </a:solidFill>
+          <a:ln w="9525">
+            <a:solidFill>
+              <a:srgbClr val="D8D8D8"/>
+            </a:solidFill>
+          </a:ln>
+          <a:effectLst/>
+        </p:spPr>
+        <p:style>
+          <a:lnRef idx="1">
+            <a:schemeClr val="accent1"/>
+          </a:lnRef>
+          <a:fillRef idx="3">
+            <a:schemeClr val="accent1"/>
+          </a:fillRef>
+          <a:effectRef idx="2">
+            <a:schemeClr val="accent1"/>
+          </a:effectRef>
+          <a:fontRef idx="minor">
+            <a:schemeClr val="lt1"/>
+          </a:fontRef>
+        </p:style>
+        <p:txBody>
+          <a:bodyPr rtlCol="0" anchor="ctr"/>
+          <a:lstStyle/>
+          <a:p>
+            <a:pPr algn="ctr"/>
+          </a:p>
+        </p:txBody>
+      </p:sp>
+      <p:sp>
+        <p:nvSpPr>
+          <p:cNvPr id="6" name="TextBox 5"/>
+          <p:cNvSpPr txBox="1"/>
+          <p:nvPr/>
+        </p:nvSpPr>
+        <p:spPr>
+          <a:xfrm>
+            <a:off x="1033272" y="2075688"/>
+            <a:ext cx="10125151" cy="1746503"/>
+          </a:xfrm>
+          <a:prstGeom prst="rect">
+            <a:avLst/>
+          </a:prstGeom>
+          <a:noFill/>
+        </p:spPr>
+        <p:txBody>
+          <a:bodyPr wrap="square" lIns="0" rIns="0" tIns="0" bIns="0">
+            <a:spAutoFit/>
+          </a:bodyPr>
+          <a:lstStyle/>
+          <a:p>
+            <a:pPr>
+              <a:lnSpc>
+                <a:spcPct val="132000"/>
+              </a:lnSpc>
+              <a:spcBef>
+                <a:spcPts val="0"/>
+              </a:spcBef>
+              <a:spcAft>
+                <a:spcPts val="0"/>
+              </a:spcAft>
+            </a:pPr>
+            <a:r>
+              <a:rPr sz="1600" b="0" i="0">
+                <a:solidFill>
+                  <a:srgbClr val="0A0A0A"/>
                 </a:solidFill>
                 <a:latin typeface="Menlo"/>
               </a:rPr>
-              <a:t>02:10 · 30 MINUTOS</a:t>
-            </a:r>
-          </a:p>
-          <a:p>
-            <a:pPr>
-              <a:lnSpc>
-                <a:spcPct val="110000"/>
-              </a:lnSpc>
-              <a:spcBef>
-                <a:spcPts val="0"/>
-              </a:spcBef>
-              <a:spcAft>
-                <a:spcPts val="1800"/>
-              </a:spcAft>
-            </a:pPr>
-            <a:r>
-              <a:rPr sz="4000" b="0" i="0">
+              <a:t>&lt;article&gt;</a:t>
+            </a:r>
+          </a:p>
+          <a:p>
+            <a:pPr>
+              <a:lnSpc>
+                <a:spcPct val="132000"/>
+              </a:lnSpc>
+              <a:spcBef>
+                <a:spcPts val="0"/>
+              </a:spcBef>
+              <a:spcAft>
+                <a:spcPts val="0"/>
+              </a:spcAft>
+            </a:pPr>
+            <a:r>
+              <a:rPr sz="1600" b="0" i="0">
                 <a:solidFill>
                   <a:srgbClr val="0A0A0A"/>
                 </a:solidFill>
-                <a:latin typeface="Inknut Antiqua"/>
-              </a:rPr>
-              <a:t>ejercicio 2 · dos páginas</a:t>
-            </a:r>
-          </a:p>
-          <a:p>
-            <a:pPr>
-              <a:lnSpc>
-                <a:spcPct val="140000"/>
-              </a:lnSpc>
-              <a:spcBef>
-                <a:spcPts val="0"/>
-              </a:spcBef>
-              <a:spcAft>
-                <a:spcPts val="600"/>
-              </a:spcAft>
-            </a:pPr>
-            <a:r>
-              <a:rPr sz="1700" b="0" i="0">
-                <a:solidFill>
-                  <a:srgbClr val="33300A"/>
-                </a:solidFill>
-                <a:latin typeface="Iowan Old Style"/>
-              </a:rPr>
-              <a:t>Duplicar, conectar y montar la página de proyectos con vuestro material.</a:t>
+                <a:latin typeface="Menlo"/>
+              </a:rPr>
+              <a:t>  &lt;h3&gt;Cámaras sordas&lt;/h3&gt;</a:t>
+            </a:r>
+          </a:p>
+          <a:p>
+            <a:pPr>
+              <a:lnSpc>
+                <a:spcPct val="132000"/>
+              </a:lnSpc>
+              <a:spcBef>
+                <a:spcPts val="0"/>
+              </a:spcBef>
+              <a:spcAft>
+                <a:spcPts val="0"/>
+              </a:spcAft>
+            </a:pPr>
+            <a:r>
+              <a:rPr sz="1600" b="0" i="0">
+                <a:solidFill>
+                  <a:srgbClr val="0A0A0A"/>
+                </a:solidFill>
+                <a:latin typeface="Menlo"/>
+              </a:rPr>
+              <a:t>  &lt;p&gt;2026 · Gres · Barcelona&lt;/p&gt;</a:t>
+            </a:r>
+          </a:p>
+          <a:p>
+            <a:pPr>
+              <a:lnSpc>
+                <a:spcPct val="132000"/>
+              </a:lnSpc>
+              <a:spcBef>
+                <a:spcPts val="0"/>
+              </a:spcBef>
+              <a:spcAft>
+                <a:spcPts val="0"/>
+              </a:spcAft>
+            </a:pPr>
+            <a:r>
+              <a:rPr sz="1600" b="0" i="0">
+                <a:solidFill>
+                  <a:srgbClr val="0A0A0A"/>
+                </a:solidFill>
+                <a:latin typeface="Menlo"/>
+              </a:rPr>
+              <a:t>  &lt;img src="img/obra-1.jpg" alt="…"&gt;</a:t>
+            </a:r>
+          </a:p>
+          <a:p>
+            <a:pPr>
+              <a:lnSpc>
+                <a:spcPct val="132000"/>
+              </a:lnSpc>
+              <a:spcBef>
+                <a:spcPts val="0"/>
+              </a:spcBef>
+              <a:spcAft>
+                <a:spcPts val="0"/>
+              </a:spcAft>
+            </a:pPr>
+            <a:r>
+              <a:rPr sz="1600" b="0" i="0">
+                <a:solidFill>
+                  <a:srgbClr val="0A0A0A"/>
+                </a:solidFill>
+                <a:latin typeface="Menlo"/>
+              </a:rPr>
+              <a:t>  &lt;p&gt;Dos líneas sobre el proyecto.&lt;/p&gt;</a:t>
+            </a:r>
+          </a:p>
+          <a:p>
+            <a:pPr>
+              <a:lnSpc>
+                <a:spcPct val="132000"/>
+              </a:lnSpc>
+              <a:spcBef>
+                <a:spcPts val="0"/>
+              </a:spcBef>
+              <a:spcAft>
+                <a:spcPts val="0"/>
+              </a:spcAft>
+            </a:pPr>
+            <a:r>
+              <a:rPr sz="1600" b="0" i="0">
+                <a:solidFill>
+                  <a:srgbClr val="0A0A0A"/>
+                </a:solidFill>
+                <a:latin typeface="Menlo"/>
+              </a:rPr>
+              <a:t>&lt;/article&gt;</a:t>
             </a:r>
           </a:p>
         </p:txBody>
@@ -12390,7 +12856,7 @@
             <a:avLst/>
           </a:prstGeom>
           <a:solidFill>
-            <a:srgbClr val="FDFBE9"/>
+            <a:srgbClr val="F2E94E"/>
           </a:solidFill>
           <a:ln>
             <a:noFill/>
@@ -12421,58 +12887,14 @@
       </p:sp>
       <p:sp>
         <p:nvSpPr>
-          <p:cNvPr id="3" name="Rectangle 2"/>
-          <p:cNvSpPr/>
-          <p:nvPr/>
-        </p:nvSpPr>
-        <p:spPr>
-          <a:xfrm>
-            <a:off x="0" y="0"/>
-            <a:ext cx="54864" cy="6858000"/>
-          </a:xfrm>
-          <a:prstGeom prst="rect">
-            <a:avLst/>
-          </a:prstGeom>
-          <a:solidFill>
-            <a:srgbClr val="E8DD58"/>
-          </a:solidFill>
-          <a:ln>
-            <a:noFill/>
-          </a:ln>
-          <a:effectLst/>
-        </p:spPr>
-        <p:style>
-          <a:lnRef idx="1">
-            <a:schemeClr val="accent1"/>
-          </a:lnRef>
-          <a:fillRef idx="3">
-            <a:schemeClr val="accent1"/>
-          </a:fillRef>
-          <a:effectRef idx="2">
-            <a:schemeClr val="accent1"/>
-          </a:effectRef>
-          <a:fontRef idx="minor">
-            <a:schemeClr val="lt1"/>
-          </a:fontRef>
-        </p:style>
-        <p:txBody>
-          <a:bodyPr rtlCol="0" anchor="ctr"/>
-          <a:lstStyle/>
-          <a:p>
-            <a:pPr algn="ctr"/>
-          </a:p>
-        </p:txBody>
-      </p:sp>
-      <p:sp>
-        <p:nvSpPr>
-          <p:cNvPr id="4" name="TextBox 3"/>
+          <p:cNvPr id="3" name="TextBox 2"/>
           <p:cNvSpPr txBox="1"/>
           <p:nvPr/>
         </p:nvSpPr>
         <p:spPr>
           <a:xfrm>
-            <a:off x="777240" y="310896"/>
-            <a:ext cx="10637215" cy="219456"/>
+            <a:off x="777240" y="1920240"/>
+            <a:ext cx="10637215" cy="3108960"/>
           </a:xfrm>
           <a:prstGeom prst="rect">
             <a:avLst/>
@@ -12493,350 +12915,83 @@
                 <a:spcPts val="0"/>
               </a:spcBef>
               <a:spcAft>
+                <a:spcPts val="1400"/>
+              </a:spcAft>
+            </a:pPr>
+            <a:r>
+              <a:rPr sz="1200" b="0" i="0" spc="600">
+                <a:solidFill>
+                  <a:srgbClr val="6A6418"/>
+                </a:solidFill>
+                <a:latin typeface="Menlo"/>
+              </a:rPr>
+              <a:t>PRÁCTICA · LO HACÉIS VOSOTRAS</a:t>
+            </a:r>
+          </a:p>
+          <a:p>
+            <a:pPr>
+              <a:lnSpc>
+                <a:spcPct val="125000"/>
+              </a:lnSpc>
+              <a:spcBef>
+                <a:spcPts val="0"/>
+              </a:spcBef>
+              <a:spcAft>
+                <a:spcPts val="2000"/>
+              </a:spcAft>
+            </a:pPr>
+            <a:r>
+              <a:rPr sz="1100" b="0" i="0" spc="300">
+                <a:solidFill>
+                  <a:srgbClr val="6A6418"/>
+                </a:solidFill>
+                <a:latin typeface="Menlo"/>
+              </a:rPr>
+              <a:t>02:10 · 30 MINUTOS</a:t>
+            </a:r>
+          </a:p>
+          <a:p>
+            <a:pPr>
+              <a:lnSpc>
+                <a:spcPct val="110000"/>
+              </a:lnSpc>
+              <a:spcBef>
+                <a:spcPts val="0"/>
+              </a:spcBef>
+              <a:spcAft>
+                <a:spcPts val="1800"/>
+              </a:spcAft>
+            </a:pPr>
+            <a:r>
+              <a:rPr sz="4000" b="0" i="0">
+                <a:solidFill>
+                  <a:srgbClr val="0A0A0A"/>
+                </a:solidFill>
+                <a:latin typeface="Inknut Antiqua"/>
+              </a:rPr>
+              <a:t>ejercicio 2 · dos páginas</a:t>
+            </a:r>
+          </a:p>
+          <a:p>
+            <a:pPr>
+              <a:lnSpc>
+                <a:spcPct val="140000"/>
+              </a:lnSpc>
+              <a:spcBef>
+                <a:spcPts val="0"/>
+              </a:spcBef>
+              <a:spcAft>
                 <a:spcPts val="600"/>
               </a:spcAft>
             </a:pPr>
             <a:r>
-              <a:rPr sz="950" b="0" i="0" spc="800">
-                <a:solidFill>
-                  <a:srgbClr val="8A7C14"/>
-                </a:solidFill>
-                <a:latin typeface="Menlo"/>
-              </a:rPr>
-              <a:t>PRÁCTICA</a:t>
-            </a:r>
-          </a:p>
-        </p:txBody>
-      </p:sp>
-      <p:sp>
-        <p:nvSpPr>
-          <p:cNvPr id="5" name="TextBox 4"/>
-          <p:cNvSpPr txBox="1"/>
-          <p:nvPr/>
-        </p:nvSpPr>
-        <p:spPr>
-          <a:xfrm>
-            <a:off x="777240" y="777240"/>
-            <a:ext cx="10637215" cy="274320"/>
-          </a:xfrm>
-          <a:prstGeom prst="rect">
-            <a:avLst/>
-          </a:prstGeom>
-          <a:noFill/>
-        </p:spPr>
-        <p:txBody>
-          <a:bodyPr wrap="square" lIns="0" rIns="0" tIns="0" bIns="0">
-            <a:spAutoFit/>
-          </a:bodyPr>
-          <a:lstStyle/>
-          <a:p>
-            <a:pPr>
-              <a:lnSpc>
-                <a:spcPct val="125000"/>
-              </a:lnSpc>
-              <a:spcBef>
-                <a:spcPts val="0"/>
-              </a:spcBef>
-              <a:spcAft>
-                <a:spcPts val="600"/>
-              </a:spcAft>
-            </a:pPr>
-            <a:r>
-              <a:rPr sz="1000" b="0" i="0" spc="300">
-                <a:solidFill>
-                  <a:srgbClr val="8A8A8A"/>
-                </a:solidFill>
-                <a:latin typeface="Menlo"/>
-              </a:rPr>
-              <a:t>EJERCICIO 2   ·   30 MIN</a:t>
-            </a:r>
-          </a:p>
-        </p:txBody>
-      </p:sp>
-      <p:sp>
-        <p:nvSpPr>
-          <p:cNvPr id="6" name="Rectangle 5"/>
-          <p:cNvSpPr/>
-          <p:nvPr/>
-        </p:nvSpPr>
-        <p:spPr>
-          <a:xfrm>
-            <a:off x="777240" y="1161288"/>
-            <a:ext cx="10637215" cy="9525"/>
-          </a:xfrm>
-          <a:prstGeom prst="rect">
-            <a:avLst/>
-          </a:prstGeom>
-          <a:solidFill>
-            <a:srgbClr val="D8D8D8"/>
-          </a:solidFill>
-          <a:ln>
-            <a:noFill/>
-          </a:ln>
-          <a:effectLst/>
-        </p:spPr>
-        <p:style>
-          <a:lnRef idx="1">
-            <a:schemeClr val="accent1"/>
-          </a:lnRef>
-          <a:fillRef idx="3">
-            <a:schemeClr val="accent1"/>
-          </a:fillRef>
-          <a:effectRef idx="2">
-            <a:schemeClr val="accent1"/>
-          </a:effectRef>
-          <a:fontRef idx="minor">
-            <a:schemeClr val="lt1"/>
-          </a:fontRef>
-        </p:style>
-        <p:txBody>
-          <a:bodyPr rtlCol="0" anchor="ctr"/>
-          <a:lstStyle/>
-          <a:p>
-            <a:pPr algn="ctr"/>
-          </a:p>
-        </p:txBody>
-      </p:sp>
-      <p:sp>
-        <p:nvSpPr>
-          <p:cNvPr id="7" name="TextBox 6"/>
-          <p:cNvSpPr txBox="1"/>
-          <p:nvPr/>
-        </p:nvSpPr>
-        <p:spPr>
-          <a:xfrm>
-            <a:off x="777240" y="1417320"/>
-            <a:ext cx="10637215" cy="822960"/>
-          </a:xfrm>
-          <a:prstGeom prst="rect">
-            <a:avLst/>
-          </a:prstGeom>
-          <a:noFill/>
-        </p:spPr>
-        <p:txBody>
-          <a:bodyPr wrap="square" lIns="0" rIns="0" tIns="0" bIns="0">
-            <a:spAutoFit/>
-          </a:bodyPr>
-          <a:lstStyle/>
-          <a:p>
-            <a:pPr>
-              <a:lnSpc>
-                <a:spcPct val="112000"/>
-              </a:lnSpc>
-              <a:spcBef>
-                <a:spcPts val="0"/>
-              </a:spcBef>
-              <a:spcAft>
-                <a:spcPts val="600"/>
-              </a:spcAft>
-            </a:pPr>
-            <a:r>
-              <a:rPr sz="2700" b="0" i="0">
-                <a:solidFill>
-                  <a:srgbClr val="0A0A0A"/>
-                </a:solidFill>
-                <a:latin typeface="Inknut Antiqua"/>
-              </a:rPr>
-              <a:t>dos páginas conectadas</a:t>
-            </a:r>
-          </a:p>
-        </p:txBody>
-      </p:sp>
-      <p:sp>
-        <p:nvSpPr>
-          <p:cNvPr id="8" name="TextBox 7"/>
-          <p:cNvSpPr txBox="1"/>
-          <p:nvPr/>
-        </p:nvSpPr>
-        <p:spPr>
-          <a:xfrm>
-            <a:off x="777240" y="2057400"/>
-            <a:ext cx="10637215" cy="4251960"/>
-          </a:xfrm>
-          <a:prstGeom prst="rect">
-            <a:avLst/>
-          </a:prstGeom>
-          <a:noFill/>
-        </p:spPr>
-        <p:txBody>
-          <a:bodyPr wrap="square" lIns="0" rIns="0" tIns="0" bIns="0">
-            <a:spAutoFit/>
-          </a:bodyPr>
-          <a:lstStyle/>
-          <a:p>
-            <a:pPr>
-              <a:lnSpc>
-                <a:spcPct val="140000"/>
-              </a:lnSpc>
-              <a:spcBef>
-                <a:spcPts val="0"/>
-              </a:spcBef>
-              <a:spcAft>
-                <a:spcPts val="500"/>
-              </a:spcAft>
-            </a:pPr>
-            <a:r>
-              <a:rPr sz="1450" b="0" i="0">
-                <a:solidFill>
-                  <a:srgbClr val="444444"/>
+              <a:rPr sz="1700" b="0" i="0">
+                <a:solidFill>
+                  <a:srgbClr val="33300A"/>
                 </a:solidFill>
                 <a:latin typeface="Iowan Old Style"/>
               </a:rPr>
-              <a:t>·  Duplica index.html y llama a la copia proyectos.html.</a:t>
-            </a:r>
-          </a:p>
-          <a:p>
-            <a:pPr>
-              <a:lnSpc>
-                <a:spcPct val="140000"/>
-              </a:lnSpc>
-              <a:spcBef>
-                <a:spcPts val="0"/>
-              </a:spcBef>
-              <a:spcAft>
-                <a:spcPts val="500"/>
-              </a:spcAft>
-            </a:pPr>
-            <a:r>
-              <a:rPr sz="1450" b="0" i="0">
-                <a:solidFill>
-                  <a:srgbClr val="444444"/>
-                </a:solidFill>
-                <a:latin typeface="Iowan Old Style"/>
-              </a:rPr>
-              <a:t>·  Cambia el &lt;title&gt; y vacía el &lt;main&gt;.</a:t>
-            </a:r>
-          </a:p>
-          <a:p>
-            <a:pPr>
-              <a:lnSpc>
-                <a:spcPct val="140000"/>
-              </a:lnSpc>
-              <a:spcBef>
-                <a:spcPts val="0"/>
-              </a:spcBef>
-              <a:spcAft>
-                <a:spcPts val="500"/>
-              </a:spcAft>
-            </a:pPr>
-            <a:r>
-              <a:rPr sz="1450" b="0" i="0">
-                <a:solidFill>
-                  <a:srgbClr val="444444"/>
-                </a:solidFill>
-                <a:latin typeface="Iowan Old Style"/>
-              </a:rPr>
-              <a:t>·  Pon &lt;h2&gt;Proyectos&lt;/h2&gt; y debajo un &lt;article&gt; por proyecto.</a:t>
-            </a:r>
-          </a:p>
-          <a:p>
-            <a:pPr>
-              <a:lnSpc>
-                <a:spcPct val="140000"/>
-              </a:lnSpc>
-              <a:spcBef>
-                <a:spcPts val="0"/>
-              </a:spcBef>
-              <a:spcAft>
-                <a:spcPts val="500"/>
-              </a:spcAft>
-            </a:pPr>
-            <a:r>
-              <a:rPr sz="1450" b="0" i="0">
-                <a:solidFill>
-                  <a:srgbClr val="444444"/>
-                </a:solidFill>
-                <a:latin typeface="Iowan Old Style"/>
-              </a:rPr>
-              <a:t>·  Añade el enlace al menú de las dos páginas.</a:t>
-            </a:r>
-          </a:p>
-          <a:p>
-            <a:pPr>
-              <a:lnSpc>
-                <a:spcPct val="140000"/>
-              </a:lnSpc>
-              <a:spcBef>
-                <a:spcPts val="0"/>
-              </a:spcBef>
-              <a:spcAft>
-                <a:spcPts val="500"/>
-              </a:spcAft>
-            </a:pPr>
-            <a:r>
-              <a:rPr sz="1450" b="0" i="0">
-                <a:solidFill>
-                  <a:srgbClr val="444444"/>
-                </a:solidFill>
-                <a:latin typeface="Iowan Old Style"/>
-              </a:rPr>
-              <a:t>☐  Dos páginas que se enlazan en los dos sentidos.</a:t>
-            </a:r>
-          </a:p>
-          <a:p>
-            <a:pPr>
-              <a:lnSpc>
-                <a:spcPct val="140000"/>
-              </a:lnSpc>
-              <a:spcBef>
-                <a:spcPts val="0"/>
-              </a:spcBef>
-              <a:spcAft>
-                <a:spcPts val="500"/>
-              </a:spcAft>
-            </a:pPr>
-            <a:r>
-              <a:rPr sz="1450" b="0" i="0">
-                <a:solidFill>
-                  <a:srgbClr val="444444"/>
-                </a:solidFill>
-                <a:latin typeface="Iowan Old Style"/>
-              </a:rPr>
-              <a:t>☐  Al menos dos proyectos con imagen y texto.</a:t>
-            </a:r>
-          </a:p>
-          <a:p>
-            <a:pPr>
-              <a:lnSpc>
-                <a:spcPct val="140000"/>
-              </a:lnSpc>
-              <a:spcBef>
-                <a:spcPts val="0"/>
-              </a:spcBef>
-              <a:spcAft>
-                <a:spcPts val="500"/>
-              </a:spcAft>
-            </a:pPr>
-            <a:r>
-              <a:rPr sz="1450" b="0" i="0">
-                <a:solidFill>
-                  <a:srgbClr val="444444"/>
-                </a:solidFill>
-                <a:latin typeface="Iowan Old Style"/>
-              </a:rPr>
-              <a:t>☐  Ningún enlace roto: puedes ir y volver clicando.</a:t>
-            </a:r>
-          </a:p>
-          <a:p>
-            <a:pPr>
-              <a:lnSpc>
-                <a:spcPct val="140000"/>
-              </a:lnSpc>
-              <a:spcBef>
-                <a:spcPts val="0"/>
-              </a:spcBef>
-              <a:spcAft>
-                <a:spcPts val="500"/>
-              </a:spcAft>
-            </a:pPr>
-            <a:r>
-              <a:rPr sz="1450" b="0" i="0">
-                <a:solidFill>
-                  <a:srgbClr val="444444"/>
-                </a:solidFill>
-                <a:latin typeface="Iowan Old Style"/>
-              </a:rPr>
-              <a:t>☐  Cada página con su &lt;title&gt; propio.</a:t>
+              <a:t>Duplicar, conectar y montar la página de proyectos con vuestro material.</a:t>
             </a:r>
           </a:p>
         </p:txBody>
@@ -12874,7 +13029,7 @@
             <a:avLst/>
           </a:prstGeom>
           <a:solidFill>
-            <a:srgbClr val="F2E94E"/>
+            <a:srgbClr val="FDFBE9"/>
           </a:solidFill>
           <a:ln>
             <a:noFill/>
@@ -12905,14 +13060,58 @@
       </p:sp>
       <p:sp>
         <p:nvSpPr>
-          <p:cNvPr id="3" name="TextBox 2"/>
+          <p:cNvPr id="3" name="Rectangle 2"/>
+          <p:cNvSpPr/>
+          <p:nvPr/>
+        </p:nvSpPr>
+        <p:spPr>
+          <a:xfrm>
+            <a:off x="0" y="0"/>
+            <a:ext cx="54864" cy="6858000"/>
+          </a:xfrm>
+          <a:prstGeom prst="rect">
+            <a:avLst/>
+          </a:prstGeom>
+          <a:solidFill>
+            <a:srgbClr val="E8DD58"/>
+          </a:solidFill>
+          <a:ln>
+            <a:noFill/>
+          </a:ln>
+          <a:effectLst/>
+        </p:spPr>
+        <p:style>
+          <a:lnRef idx="1">
+            <a:schemeClr val="accent1"/>
+          </a:lnRef>
+          <a:fillRef idx="3">
+            <a:schemeClr val="accent1"/>
+          </a:fillRef>
+          <a:effectRef idx="2">
+            <a:schemeClr val="accent1"/>
+          </a:effectRef>
+          <a:fontRef idx="minor">
+            <a:schemeClr val="lt1"/>
+          </a:fontRef>
+        </p:style>
+        <p:txBody>
+          <a:bodyPr rtlCol="0" anchor="ctr"/>
+          <a:lstStyle/>
+          <a:p>
+            <a:pPr algn="ctr"/>
+          </a:p>
+        </p:txBody>
+      </p:sp>
+      <p:sp>
+        <p:nvSpPr>
+          <p:cNvPr id="4" name="TextBox 3"/>
           <p:cNvSpPr txBox="1"/>
           <p:nvPr/>
         </p:nvSpPr>
         <p:spPr>
           <a:xfrm>
-            <a:off x="777240" y="1920240"/>
-            <a:ext cx="10637215" cy="3108960"/>
+            <a:off x="777240" y="310896"/>
+            <a:ext cx="10637215" cy="219456"/>
           </a:xfrm>
           <a:prstGeom prst="rect">
             <a:avLst/>
@@ -12933,19 +13132,42 @@
                 <a:spcPts val="0"/>
               </a:spcBef>
               <a:spcAft>
-                <a:spcPts val="1400"/>
-              </a:spcAft>
-            </a:pPr>
-            <a:r>
-              <a:rPr sz="1200" b="0" i="0" spc="600">
-                <a:solidFill>
-                  <a:srgbClr val="6A6418"/>
+                <a:spcPts val="600"/>
+              </a:spcAft>
+            </a:pPr>
+            <a:r>
+              <a:rPr sz="950" b="0" i="0" spc="800">
+                <a:solidFill>
+                  <a:srgbClr val="8A7C14"/>
                 </a:solidFill>
                 <a:latin typeface="Menlo"/>
               </a:rPr>
-              <a:t>PRÁCTICA · LO HACÉIS VOSOTRAS</a:t>
-            </a:r>
-          </a:p>
+              <a:t>PRÁCTICA</a:t>
+            </a:r>
+          </a:p>
+        </p:txBody>
+      </p:sp>
+      <p:sp>
+        <p:nvSpPr>
+          <p:cNvPr id="5" name="TextBox 4"/>
+          <p:cNvSpPr txBox="1"/>
+          <p:nvPr/>
+        </p:nvSpPr>
+        <p:spPr>
+          <a:xfrm>
+            <a:off x="777240" y="777240"/>
+            <a:ext cx="10637215" cy="274320"/>
+          </a:xfrm>
+          <a:prstGeom prst="rect">
+            <a:avLst/>
+          </a:prstGeom>
+          <a:noFill/>
+        </p:spPr>
+        <p:txBody>
+          <a:bodyPr wrap="square" lIns="0" rIns="0" tIns="0" bIns="0">
+            <a:spAutoFit/>
+          </a:bodyPr>
+          <a:lstStyle/>
           <a:p>
             <a:pPr>
               <a:lnSpc>
@@ -12955,61 +13177,481 @@
                 <a:spcPts val="0"/>
               </a:spcBef>
               <a:spcAft>
-                <a:spcPts val="2000"/>
-              </a:spcAft>
-            </a:pPr>
-            <a:r>
-              <a:rPr sz="1100" b="0" i="0" spc="300">
-                <a:solidFill>
-                  <a:srgbClr val="6A6418"/>
+                <a:spcPts val="600"/>
+              </a:spcAft>
+            </a:pPr>
+            <a:r>
+              <a:rPr sz="1000" b="0" i="0" spc="300">
+                <a:solidFill>
+                  <a:srgbClr val="8A8A8A"/>
                 </a:solidFill>
                 <a:latin typeface="Menlo"/>
               </a:rPr>
-              <a:t>02:40 · 10 MINUTOS</a:t>
-            </a:r>
-          </a:p>
-          <a:p>
-            <a:pPr>
-              <a:lnSpc>
-                <a:spcPct val="110000"/>
-              </a:lnSpc>
-              <a:spcBef>
-                <a:spcPts val="0"/>
-              </a:spcBef>
-              <a:spcAft>
-                <a:spcPts val="1800"/>
-              </a:spcAft>
-            </a:pPr>
-            <a:r>
-              <a:rPr sz="4000" b="0" i="0">
+              <a:t>EJERCICIO 2   ·   30 MIN</a:t>
+            </a:r>
+          </a:p>
+        </p:txBody>
+      </p:sp>
+      <p:sp>
+        <p:nvSpPr>
+          <p:cNvPr id="6" name="Rectangle 5"/>
+          <p:cNvSpPr/>
+          <p:nvPr/>
+        </p:nvSpPr>
+        <p:spPr>
+          <a:xfrm>
+            <a:off x="777240" y="1161288"/>
+            <a:ext cx="10637215" cy="9525"/>
+          </a:xfrm>
+          <a:prstGeom prst="rect">
+            <a:avLst/>
+          </a:prstGeom>
+          <a:solidFill>
+            <a:srgbClr val="D8D8D8"/>
+          </a:solidFill>
+          <a:ln>
+            <a:noFill/>
+          </a:ln>
+          <a:effectLst/>
+        </p:spPr>
+        <p:style>
+          <a:lnRef idx="1">
+            <a:schemeClr val="accent1"/>
+          </a:lnRef>
+          <a:fillRef idx="3">
+            <a:schemeClr val="accent1"/>
+          </a:fillRef>
+          <a:effectRef idx="2">
+            <a:schemeClr val="accent1"/>
+          </a:effectRef>
+          <a:fontRef idx="minor">
+            <a:schemeClr val="lt1"/>
+          </a:fontRef>
+        </p:style>
+        <p:txBody>
+          <a:bodyPr rtlCol="0" anchor="ctr"/>
+          <a:lstStyle/>
+          <a:p>
+            <a:pPr algn="ctr"/>
+          </a:p>
+        </p:txBody>
+      </p:sp>
+      <p:sp>
+        <p:nvSpPr>
+          <p:cNvPr id="7" name="TextBox 6"/>
+          <p:cNvSpPr txBox="1"/>
+          <p:nvPr/>
+        </p:nvSpPr>
+        <p:spPr>
+          <a:xfrm>
+            <a:off x="777240" y="1417320"/>
+            <a:ext cx="10637215" cy="822960"/>
+          </a:xfrm>
+          <a:prstGeom prst="rect">
+            <a:avLst/>
+          </a:prstGeom>
+          <a:noFill/>
+        </p:spPr>
+        <p:txBody>
+          <a:bodyPr wrap="square" lIns="0" rIns="0" tIns="0" bIns="0">
+            <a:spAutoFit/>
+          </a:bodyPr>
+          <a:lstStyle/>
+          <a:p>
+            <a:pPr>
+              <a:lnSpc>
+                <a:spcPct val="112000"/>
+              </a:lnSpc>
+              <a:spcBef>
+                <a:spcPts val="0"/>
+              </a:spcBef>
+              <a:spcAft>
+                <a:spcPts val="600"/>
+              </a:spcAft>
+            </a:pPr>
+            <a:r>
+              <a:rPr sz="2700" b="0" i="0">
                 <a:solidFill>
                   <a:srgbClr val="0A0A0A"/>
                 </a:solidFill>
                 <a:latin typeface="Inknut Antiqua"/>
               </a:rPr>
-              <a:t>publicarla ya</a:t>
-            </a:r>
-          </a:p>
-          <a:p>
-            <a:pPr>
-              <a:lnSpc>
-                <a:spcPct val="140000"/>
-              </a:lnSpc>
-              <a:spcBef>
-                <a:spcPts val="0"/>
-              </a:spcBef>
-              <a:spcAft>
-                <a:spcPts val="600"/>
-              </a:spcAft>
-            </a:pPr>
-            <a:r>
-              <a:rPr sz="1700" b="0" i="0">
-                <a:solidFill>
-                  <a:srgbClr val="33300A"/>
+              <a:t>dos páginas conectadas</a:t>
+            </a:r>
+          </a:p>
+        </p:txBody>
+      </p:sp>
+      <p:sp>
+        <p:nvSpPr>
+          <p:cNvPr id="8" name="TextBox 7"/>
+          <p:cNvSpPr txBox="1"/>
+          <p:nvPr/>
+        </p:nvSpPr>
+        <p:spPr>
+          <a:xfrm>
+            <a:off x="777240" y="2057400"/>
+            <a:ext cx="10637215" cy="4251960"/>
+          </a:xfrm>
+          <a:prstGeom prst="rect">
+            <a:avLst/>
+          </a:prstGeom>
+          <a:noFill/>
+        </p:spPr>
+        <p:txBody>
+          <a:bodyPr wrap="square" lIns="0" rIns="0" tIns="0" bIns="0">
+            <a:spAutoFit/>
+          </a:bodyPr>
+          <a:lstStyle/>
+          <a:p>
+            <a:pPr>
+              <a:lnSpc>
+                <a:spcPct val="125000"/>
+              </a:lnSpc>
+              <a:spcBef>
+                <a:spcPts val="1000"/>
+              </a:spcBef>
+              <a:spcAft>
+                <a:spcPts val="400"/>
+              </a:spcAft>
+            </a:pPr>
+            <a:r>
+              <a:rPr sz="1000" b="0" i="0" spc="500">
+                <a:solidFill>
+                  <a:srgbClr val="8A7C14"/>
+                </a:solidFill>
+                <a:latin typeface="Menlo"/>
+              </a:rPr>
+              <a:t>HAY QUE</a:t>
+            </a:r>
+          </a:p>
+          <a:p>
+            <a:pPr>
+              <a:lnSpc>
+                <a:spcPct val="135000"/>
+              </a:lnSpc>
+              <a:spcBef>
+                <a:spcPts val="0"/>
+              </a:spcBef>
+              <a:spcAft>
+                <a:spcPts val="300"/>
+              </a:spcAft>
+            </a:pPr>
+            <a:r>
+              <a:rPr sz="1350" b="0" i="0">
+                <a:solidFill>
+                  <a:srgbClr val="444444"/>
                 </a:solidFill>
                 <a:latin typeface="Iowan Old Style"/>
               </a:rPr>
-              <a:t>Sí, hoy. Sin entender nada todavía. Para que salgáis por la puerta con una dirección de internet.</a:t>
+              <a:t>☐  Duplicar index.html y renombrarla</a:t>
+            </a:r>
+          </a:p>
+          <a:p>
+            <a:pPr>
+              <a:lnSpc>
+                <a:spcPct val="135000"/>
+              </a:lnSpc>
+              <a:spcBef>
+                <a:spcPts val="0"/>
+              </a:spcBef>
+              <a:spcAft>
+                <a:spcPts val="300"/>
+              </a:spcAft>
+            </a:pPr>
+            <a:r>
+              <a:rPr sz="1350" b="0" i="0">
+                <a:solidFill>
+                  <a:srgbClr val="444444"/>
+                </a:solidFill>
+                <a:latin typeface="Iowan Old Style"/>
+              </a:rPr>
+              <a:t>☐  Cambiar el title y vaciar el main</a:t>
+            </a:r>
+          </a:p>
+          <a:p>
+            <a:pPr>
+              <a:lnSpc>
+                <a:spcPct val="135000"/>
+              </a:lnSpc>
+              <a:spcBef>
+                <a:spcPts val="0"/>
+              </a:spcBef>
+              <a:spcAft>
+                <a:spcPts val="300"/>
+              </a:spcAft>
+            </a:pPr>
+            <a:r>
+              <a:rPr sz="1350" b="0" i="0">
+                <a:solidFill>
+                  <a:srgbClr val="444444"/>
+                </a:solidFill>
+                <a:latin typeface="Iowan Old Style"/>
+              </a:rPr>
+              <a:t>☐  Un article por proyecto, con h3, img y p</a:t>
+            </a:r>
+          </a:p>
+          <a:p>
+            <a:pPr>
+              <a:lnSpc>
+                <a:spcPct val="135000"/>
+              </a:lnSpc>
+              <a:spcBef>
+                <a:spcPts val="0"/>
+              </a:spcBef>
+              <a:spcAft>
+                <a:spcPts val="300"/>
+              </a:spcAft>
+            </a:pPr>
+            <a:r>
+              <a:rPr sz="1350" b="0" i="0">
+                <a:solidFill>
+                  <a:srgbClr val="444444"/>
+                </a:solidFill>
+                <a:latin typeface="Iowan Old Style"/>
+              </a:rPr>
+              <a:t>☐  El enlace nuevo en el menú de las dos</a:t>
+            </a:r>
+          </a:p>
+          <a:p>
+            <a:pPr>
+              <a:lnSpc>
+                <a:spcPct val="135000"/>
+              </a:lnSpc>
+              <a:spcBef>
+                <a:spcPts val="0"/>
+              </a:spcBef>
+              <a:spcAft>
+                <a:spcPts val="300"/>
+              </a:spcAft>
+            </a:pPr>
+            <a:r>
+              <a:rPr sz="1350" b="0" i="0">
+                <a:solidFill>
+                  <a:srgbClr val="444444"/>
+                </a:solidFill>
+                <a:latin typeface="Iowan Old Style"/>
+              </a:rPr>
+              <a:t>☐  Ir y volver clicando, sin tocar la barra</a:t>
+            </a:r>
+          </a:p>
+          <a:p>
+            <a:pPr>
+              <a:lnSpc>
+                <a:spcPct val="125000"/>
+              </a:lnSpc>
+              <a:spcBef>
+                <a:spcPts val="1000"/>
+              </a:spcBef>
+              <a:spcAft>
+                <a:spcPts val="400"/>
+              </a:spcAft>
+            </a:pPr>
+            <a:r>
+              <a:rPr sz="1000" b="0" i="0" spc="500">
+                <a:solidFill>
+                  <a:srgbClr val="8A7C14"/>
+                </a:solidFill>
+                <a:latin typeface="Menlo"/>
+              </a:rPr>
+              <a:t>PUEDES</a:t>
+            </a:r>
+          </a:p>
+          <a:p>
+            <a:pPr>
+              <a:lnSpc>
+                <a:spcPct val="135000"/>
+              </a:lnSpc>
+              <a:spcBef>
+                <a:spcPts val="0"/>
+              </a:spcBef>
+              <a:spcAft>
+                <a:spcPts val="300"/>
+              </a:spcAft>
+            </a:pPr>
+            <a:r>
+              <a:rPr sz="1350" b="0" i="0">
+                <a:solidFill>
+                  <a:srgbClr val="444444"/>
+                </a:solidFill>
+                <a:latin typeface="Iowan Old Style"/>
+              </a:rPr>
+              <a:t>☐  Una tercera página (cv.html) con ul y li</a:t>
+            </a:r>
+          </a:p>
+          <a:p>
+            <a:pPr>
+              <a:lnSpc>
+                <a:spcPct val="135000"/>
+              </a:lnSpc>
+              <a:spcBef>
+                <a:spcPts val="0"/>
+              </a:spcBef>
+              <a:spcAft>
+                <a:spcPts val="300"/>
+              </a:spcAft>
+            </a:pPr>
+            <a:r>
+              <a:rPr sz="1350" b="0" i="0">
+                <a:solidFill>
+                  <a:srgbClr val="444444"/>
+                </a:solidFill>
+                <a:latin typeface="Iowan Old Style"/>
+              </a:rPr>
+              <a:t>☐  La ficha técnica en su propio p class="ficha"</a:t>
+            </a:r>
+          </a:p>
+          <a:p>
+            <a:pPr>
+              <a:lnSpc>
+                <a:spcPct val="135000"/>
+              </a:lnSpc>
+              <a:spcBef>
+                <a:spcPts val="0"/>
+              </a:spcBef>
+              <a:spcAft>
+                <a:spcPts val="300"/>
+              </a:spcAft>
+            </a:pPr>
+            <a:r>
+              <a:rPr sz="1350" b="0" i="0">
+                <a:solidFill>
+                  <a:srgbClr val="444444"/>
+                </a:solidFill>
+                <a:latin typeface="Iowan Old Style"/>
+              </a:rPr>
+              <a:t>☐  Un hr entre proyectos</a:t>
+            </a:r>
+          </a:p>
+          <a:p>
+            <a:pPr>
+              <a:lnSpc>
+                <a:spcPct val="135000"/>
+              </a:lnSpc>
+              <a:spcBef>
+                <a:spcPts val="0"/>
+              </a:spcBef>
+              <a:spcAft>
+                <a:spcPts val="300"/>
+              </a:spcAft>
+            </a:pPr>
+            <a:r>
+              <a:rPr sz="1350" b="0" i="0">
+                <a:solidFill>
+                  <a:srgbClr val="444444"/>
+                </a:solidFill>
+                <a:latin typeface="Iowan Old Style"/>
+              </a:rPr>
+              <a:t>☐  Más de dos proyectos</a:t>
+            </a:r>
+          </a:p>
+          <a:p>
+            <a:pPr>
+              <a:lnSpc>
+                <a:spcPct val="125000"/>
+              </a:lnSpc>
+              <a:spcBef>
+                <a:spcPts val="1000"/>
+              </a:spcBef>
+              <a:spcAft>
+                <a:spcPts val="400"/>
+              </a:spcAft>
+            </a:pPr>
+            <a:r>
+              <a:rPr sz="1000" b="0" i="0" spc="500">
+                <a:solidFill>
+                  <a:srgbClr val="8A7C14"/>
+                </a:solidFill>
+                <a:latin typeface="Menlo"/>
+              </a:rPr>
+              <a:t>PODRÍAS</a:t>
+            </a:r>
+          </a:p>
+          <a:p>
+            <a:pPr>
+              <a:lnSpc>
+                <a:spcPct val="135000"/>
+              </a:lnSpc>
+              <a:spcBef>
+                <a:spcPts val="0"/>
+              </a:spcBef>
+              <a:spcAft>
+                <a:spcPts val="300"/>
+              </a:spcAft>
+            </a:pPr>
+            <a:r>
+              <a:rPr sz="1350" b="0" i="0">
+                <a:solidFill>
+                  <a:srgbClr val="444444"/>
+                </a:solidFill>
+                <a:latin typeface="Iowan Old Style"/>
+              </a:rPr>
+              <a:t>☐  figure y figcaption en cada obra</a:t>
+            </a:r>
+          </a:p>
+          <a:p>
+            <a:pPr>
+              <a:lnSpc>
+                <a:spcPct val="135000"/>
+              </a:lnSpc>
+              <a:spcBef>
+                <a:spcPts val="0"/>
+              </a:spcBef>
+              <a:spcAft>
+                <a:spcPts val="300"/>
+              </a:spcAft>
+            </a:pPr>
+            <a:r>
+              <a:rPr sz="1350" b="0" i="0">
+                <a:solidFill>
+                  <a:srgbClr val="444444"/>
+                </a:solidFill>
+                <a:latin typeface="Iowan Old Style"/>
+              </a:rPr>
+              <a:t>☐  Un id y enlaces #ancla para saltar dentro</a:t>
+            </a:r>
+          </a:p>
+          <a:p>
+            <a:pPr>
+              <a:lnSpc>
+                <a:spcPct val="135000"/>
+              </a:lnSpc>
+              <a:spcBef>
+                <a:spcPts val="0"/>
+              </a:spcBef>
+              <a:spcAft>
+                <a:spcPts val="300"/>
+              </a:spcAft>
+            </a:pPr>
+            <a:r>
+              <a:rPr sz="1350" b="0" i="0">
+                <a:solidFill>
+                  <a:srgbClr val="444444"/>
+                </a:solidFill>
+                <a:latin typeface="Iowan Old Style"/>
+              </a:rPr>
+              <a:t>☐  details para los textos largos</a:t>
+            </a:r>
+          </a:p>
+          <a:p>
+            <a:pPr>
+              <a:lnSpc>
+                <a:spcPct val="135000"/>
+              </a:lnSpc>
+              <a:spcBef>
+                <a:spcPts val="0"/>
+              </a:spcBef>
+              <a:spcAft>
+                <a:spcPts val="300"/>
+              </a:spcAft>
+            </a:pPr>
+            <a:r>
+              <a:rPr sz="1350" b="0" i="0">
+                <a:solidFill>
+                  <a:srgbClr val="444444"/>
+                </a:solidFill>
+                <a:latin typeface="Iowan Old Style"/>
+              </a:rPr>
+              <a:t>☐  Un iframe con documentación en vídeo</a:t>
             </a:r>
           </a:p>
         </p:txBody>
@@ -13047,7 +13689,7 @@
             <a:avLst/>
           </a:prstGeom>
           <a:solidFill>
-            <a:srgbClr val="FDFBE9"/>
+            <a:srgbClr val="F2E94E"/>
           </a:solidFill>
           <a:ln>
             <a:noFill/>
@@ -13078,58 +13720,14 @@
       </p:sp>
       <p:sp>
         <p:nvSpPr>
-          <p:cNvPr id="3" name="Rectangle 2"/>
-          <p:cNvSpPr/>
-          <p:nvPr/>
-        </p:nvSpPr>
-        <p:spPr>
-          <a:xfrm>
-            <a:off x="0" y="0"/>
-            <a:ext cx="54864" cy="6858000"/>
-          </a:xfrm>
-          <a:prstGeom prst="rect">
-            <a:avLst/>
-          </a:prstGeom>
-          <a:solidFill>
-            <a:srgbClr val="E8DD58"/>
-          </a:solidFill>
-          <a:ln>
-            <a:noFill/>
-          </a:ln>
-          <a:effectLst/>
-        </p:spPr>
-        <p:style>
-          <a:lnRef idx="1">
-            <a:schemeClr val="accent1"/>
-          </a:lnRef>
-          <a:fillRef idx="3">
-            <a:schemeClr val="accent1"/>
-          </a:fillRef>
-          <a:effectRef idx="2">
-            <a:schemeClr val="accent1"/>
-          </a:effectRef>
-          <a:fontRef idx="minor">
-            <a:schemeClr val="lt1"/>
-          </a:fontRef>
-        </p:style>
-        <p:txBody>
-          <a:bodyPr rtlCol="0" anchor="ctr"/>
-          <a:lstStyle/>
-          <a:p>
-            <a:pPr algn="ctr"/>
-          </a:p>
-        </p:txBody>
-      </p:sp>
-      <p:sp>
-        <p:nvSpPr>
-          <p:cNvPr id="4" name="TextBox 3"/>
+          <p:cNvPr id="3" name="TextBox 2"/>
           <p:cNvSpPr txBox="1"/>
           <p:nvPr/>
         </p:nvSpPr>
         <p:spPr>
           <a:xfrm>
-            <a:off x="777240" y="310896"/>
-            <a:ext cx="10637215" cy="219456"/>
+            <a:off x="777240" y="1920240"/>
+            <a:ext cx="10637215" cy="3108960"/>
           </a:xfrm>
           <a:prstGeom prst="rect">
             <a:avLst/>
@@ -13150,394 +13748,83 @@
                 <a:spcPts val="0"/>
               </a:spcBef>
               <a:spcAft>
+                <a:spcPts val="1400"/>
+              </a:spcAft>
+            </a:pPr>
+            <a:r>
+              <a:rPr sz="1200" b="0" i="0" spc="600">
+                <a:solidFill>
+                  <a:srgbClr val="6A6418"/>
+                </a:solidFill>
+                <a:latin typeface="Menlo"/>
+              </a:rPr>
+              <a:t>PRÁCTICA · LO HACÉIS VOSOTRAS</a:t>
+            </a:r>
+          </a:p>
+          <a:p>
+            <a:pPr>
+              <a:lnSpc>
+                <a:spcPct val="125000"/>
+              </a:lnSpc>
+              <a:spcBef>
+                <a:spcPts val="0"/>
+              </a:spcBef>
+              <a:spcAft>
+                <a:spcPts val="2000"/>
+              </a:spcAft>
+            </a:pPr>
+            <a:r>
+              <a:rPr sz="1100" b="0" i="0" spc="300">
+                <a:solidFill>
+                  <a:srgbClr val="6A6418"/>
+                </a:solidFill>
+                <a:latin typeface="Menlo"/>
+              </a:rPr>
+              <a:t>02:40 · 10 MINUTOS</a:t>
+            </a:r>
+          </a:p>
+          <a:p>
+            <a:pPr>
+              <a:lnSpc>
+                <a:spcPct val="110000"/>
+              </a:lnSpc>
+              <a:spcBef>
+                <a:spcPts val="0"/>
+              </a:spcBef>
+              <a:spcAft>
+                <a:spcPts val="1800"/>
+              </a:spcAft>
+            </a:pPr>
+            <a:r>
+              <a:rPr sz="4000" b="0" i="0">
+                <a:solidFill>
+                  <a:srgbClr val="0A0A0A"/>
+                </a:solidFill>
+                <a:latin typeface="Inknut Antiqua"/>
+              </a:rPr>
+              <a:t>publicarla ya</a:t>
+            </a:r>
+          </a:p>
+          <a:p>
+            <a:pPr>
+              <a:lnSpc>
+                <a:spcPct val="140000"/>
+              </a:lnSpc>
+              <a:spcBef>
+                <a:spcPts val="0"/>
+              </a:spcBef>
+              <a:spcAft>
                 <a:spcPts val="600"/>
               </a:spcAft>
             </a:pPr>
             <a:r>
-              <a:rPr sz="950" b="0" i="0" spc="800">
-                <a:solidFill>
-                  <a:srgbClr val="8A7C14"/>
-                </a:solidFill>
-                <a:latin typeface="Menlo"/>
-              </a:rPr>
-              <a:t>PRÁCTICA</a:t>
-            </a:r>
-          </a:p>
-        </p:txBody>
-      </p:sp>
-      <p:sp>
-        <p:nvSpPr>
-          <p:cNvPr id="5" name="TextBox 4"/>
-          <p:cNvSpPr txBox="1"/>
-          <p:nvPr/>
-        </p:nvSpPr>
-        <p:spPr>
-          <a:xfrm>
-            <a:off x="777240" y="777240"/>
-            <a:ext cx="10637215" cy="274320"/>
-          </a:xfrm>
-          <a:prstGeom prst="rect">
-            <a:avLst/>
-          </a:prstGeom>
-          <a:noFill/>
-        </p:spPr>
-        <p:txBody>
-          <a:bodyPr wrap="square" lIns="0" rIns="0" tIns="0" bIns="0">
-            <a:spAutoFit/>
-          </a:bodyPr>
-          <a:lstStyle/>
-          <a:p>
-            <a:pPr>
-              <a:lnSpc>
-                <a:spcPct val="125000"/>
-              </a:lnSpc>
-              <a:spcBef>
-                <a:spcPts val="0"/>
-              </a:spcBef>
-              <a:spcAft>
-                <a:spcPts val="600"/>
-              </a:spcAft>
-            </a:pPr>
-            <a:r>
-              <a:rPr sz="1000" b="0" i="0" spc="300">
-                <a:solidFill>
-                  <a:srgbClr val="8A8A8A"/>
-                </a:solidFill>
-                <a:latin typeface="Menlo"/>
-              </a:rPr>
-              <a:t>02:40   ·   A CIEGAS, YA LO ENTENDEREMOS</a:t>
-            </a:r>
-          </a:p>
-        </p:txBody>
-      </p:sp>
-      <p:sp>
-        <p:nvSpPr>
-          <p:cNvPr id="6" name="Rectangle 5"/>
-          <p:cNvSpPr/>
-          <p:nvPr/>
-        </p:nvSpPr>
-        <p:spPr>
-          <a:xfrm>
-            <a:off x="777240" y="1161288"/>
-            <a:ext cx="10637215" cy="9525"/>
-          </a:xfrm>
-          <a:prstGeom prst="rect">
-            <a:avLst/>
-          </a:prstGeom>
-          <a:solidFill>
-            <a:srgbClr val="D8D8D8"/>
-          </a:solidFill>
-          <a:ln>
-            <a:noFill/>
-          </a:ln>
-          <a:effectLst/>
-        </p:spPr>
-        <p:style>
-          <a:lnRef idx="1">
-            <a:schemeClr val="accent1"/>
-          </a:lnRef>
-          <a:fillRef idx="3">
-            <a:schemeClr val="accent1"/>
-          </a:fillRef>
-          <a:effectRef idx="2">
-            <a:schemeClr val="accent1"/>
-          </a:effectRef>
-          <a:fontRef idx="minor">
-            <a:schemeClr val="lt1"/>
-          </a:fontRef>
-        </p:style>
-        <p:txBody>
-          <a:bodyPr rtlCol="0" anchor="ctr"/>
-          <a:lstStyle/>
-          <a:p>
-            <a:pPr algn="ctr"/>
-          </a:p>
-        </p:txBody>
-      </p:sp>
-      <p:sp>
-        <p:nvSpPr>
-          <p:cNvPr id="7" name="TextBox 6"/>
-          <p:cNvSpPr txBox="1"/>
-          <p:nvPr/>
-        </p:nvSpPr>
-        <p:spPr>
-          <a:xfrm>
-            <a:off x="777240" y="1417320"/>
-            <a:ext cx="10637215" cy="822960"/>
-          </a:xfrm>
-          <a:prstGeom prst="rect">
-            <a:avLst/>
-          </a:prstGeom>
-          <a:noFill/>
-        </p:spPr>
-        <p:txBody>
-          <a:bodyPr wrap="square" lIns="0" rIns="0" tIns="0" bIns="0">
-            <a:spAutoFit/>
-          </a:bodyPr>
-          <a:lstStyle/>
-          <a:p>
-            <a:pPr>
-              <a:lnSpc>
-                <a:spcPct val="112000"/>
-              </a:lnSpc>
-              <a:spcBef>
-                <a:spcPts val="0"/>
-              </a:spcBef>
-              <a:spcAft>
-                <a:spcPts val="600"/>
-              </a:spcAft>
-            </a:pPr>
-            <a:r>
-              <a:rPr sz="2700" b="0" i="0">
-                <a:solidFill>
-                  <a:srgbClr val="0A0A0A"/>
-                </a:solidFill>
-                <a:latin typeface="Inknut Antiqua"/>
-              </a:rPr>
-              <a:t>seis clics</a:t>
-            </a:r>
-          </a:p>
-        </p:txBody>
-      </p:sp>
-      <p:sp>
-        <p:nvSpPr>
-          <p:cNvPr id="8" name="TextBox 7"/>
-          <p:cNvSpPr txBox="1"/>
-          <p:nvPr/>
-        </p:nvSpPr>
-        <p:spPr>
-          <a:xfrm>
-            <a:off x="777240" y="2057400"/>
-            <a:ext cx="10637215" cy="4251960"/>
-          </a:xfrm>
-          <a:prstGeom prst="rect">
-            <a:avLst/>
-          </a:prstGeom>
-          <a:noFill/>
-        </p:spPr>
-        <p:txBody>
-          <a:bodyPr wrap="square" lIns="0" rIns="0" tIns="0" bIns="0">
-            <a:spAutoFit/>
-          </a:bodyPr>
-          <a:lstStyle/>
-          <a:p>
-            <a:pPr>
-              <a:lnSpc>
-                <a:spcPct val="140000"/>
-              </a:lnSpc>
-              <a:spcBef>
-                <a:spcPts val="0"/>
-              </a:spcBef>
-              <a:spcAft>
-                <a:spcPts val="500"/>
-              </a:spcAft>
-            </a:pPr>
-            <a:r>
-              <a:rPr sz="1450" b="0" i="0">
-                <a:solidFill>
-                  <a:srgbClr val="444444"/>
+              <a:rPr sz="1700" b="0" i="0">
+                <a:solidFill>
+                  <a:srgbClr val="33300A"/>
                 </a:solidFill>
                 <a:latin typeface="Iowan Old Style"/>
               </a:rPr>
-              <a:t>·  En github.com, botón New repository.</a:t>
-            </a:r>
-          </a:p>
-          <a:p>
-            <a:pPr>
-              <a:lnSpc>
-                <a:spcPct val="140000"/>
-              </a:lnSpc>
-              <a:spcBef>
-                <a:spcPts val="0"/>
-              </a:spcBef>
-              <a:spcAft>
-                <a:spcPts val="500"/>
-              </a:spcAft>
-            </a:pPr>
-            <a:r>
-              <a:rPr sz="1450" b="0" i="0">
-                <a:solidFill>
-                  <a:srgbClr val="444444"/>
-                </a:solidFill>
-                <a:latin typeface="Iowan Old Style"/>
-              </a:rPr>
-              <a:t>·  Nombre mi-web, marca Public, Create.</a:t>
-            </a:r>
-          </a:p>
-          <a:p>
-            <a:pPr>
-              <a:lnSpc>
-                <a:spcPct val="140000"/>
-              </a:lnSpc>
-              <a:spcBef>
-                <a:spcPts val="0"/>
-              </a:spcBef>
-              <a:spcAft>
-                <a:spcPts val="500"/>
-              </a:spcAft>
-            </a:pPr>
-            <a:r>
-              <a:rPr sz="1450" b="0" i="0">
-                <a:solidFill>
-                  <a:srgbClr val="444444"/>
-                </a:solidFill>
-                <a:latin typeface="Iowan Old Style"/>
-              </a:rPr>
-              <a:t>·  uploading an existing file.</a:t>
-            </a:r>
-          </a:p>
-          <a:p>
-            <a:pPr>
-              <a:lnSpc>
-                <a:spcPct val="140000"/>
-              </a:lnSpc>
-              <a:spcBef>
-                <a:spcPts val="0"/>
-              </a:spcBef>
-              <a:spcAft>
-                <a:spcPts val="500"/>
-              </a:spcAft>
-            </a:pPr>
-            <a:r>
-              <a:rPr sz="1450" b="0" i="0">
-                <a:solidFill>
-                  <a:srgbClr val="444444"/>
-                </a:solidFill>
-                <a:latin typeface="Iowan Old Style"/>
-              </a:rPr>
-              <a:t>·  Arrastra el contenido de tu carpeta, no la carpeta.</a:t>
-            </a:r>
-          </a:p>
-          <a:p>
-            <a:pPr>
-              <a:lnSpc>
-                <a:spcPct val="140000"/>
-              </a:lnSpc>
-              <a:spcBef>
-                <a:spcPts val="0"/>
-              </a:spcBef>
-              <a:spcAft>
-                <a:spcPts val="500"/>
-              </a:spcAft>
-            </a:pPr>
-            <a:r>
-              <a:rPr sz="1450" b="0" i="0">
-                <a:solidFill>
-                  <a:srgbClr val="444444"/>
-                </a:solidFill>
-                <a:latin typeface="Iowan Old Style"/>
-              </a:rPr>
-              <a:t>·  Commit changes.</a:t>
-            </a:r>
-          </a:p>
-          <a:p>
-            <a:pPr>
-              <a:lnSpc>
-                <a:spcPct val="140000"/>
-              </a:lnSpc>
-              <a:spcBef>
-                <a:spcPts val="0"/>
-              </a:spcBef>
-              <a:spcAft>
-                <a:spcPts val="500"/>
-              </a:spcAft>
-            </a:pPr>
-            <a:r>
-              <a:rPr sz="1450" b="0" i="0">
-                <a:solidFill>
-                  <a:srgbClr val="444444"/>
-                </a:solidFill>
-                <a:latin typeface="Iowan Old Style"/>
-              </a:rPr>
-              <a:t>·  Settings → Pages → Branch: main → Save.</a:t>
-            </a:r>
-          </a:p>
-          <a:p>
-            <a:pPr>
-              <a:lnSpc>
-                <a:spcPct val="125000"/>
-              </a:lnSpc>
-              <a:spcBef>
-                <a:spcPts val="1000"/>
-              </a:spcBef>
-              <a:spcAft>
-                <a:spcPts val="300"/>
-              </a:spcAft>
-            </a:pPr>
-            <a:r>
-              <a:rPr sz="1000" b="0" i="0" spc="300">
-                <a:solidFill>
-                  <a:srgbClr val="887000"/>
-                </a:solidFill>
-                <a:latin typeface="Menlo"/>
-              </a:rPr>
-              <a:t>POR QUÉ HOY Y NO EN LA SESIÓN 3</a:t>
-            </a:r>
-          </a:p>
-          <a:p>
-            <a:pPr>
-              <a:lnSpc>
-                <a:spcPct val="140000"/>
-              </a:lnSpc>
-              <a:spcBef>
-                <a:spcPts val="0"/>
-              </a:spcBef>
-              <a:spcAft>
-                <a:spcPts val="800"/>
-              </a:spcAft>
-            </a:pPr>
-            <a:r>
-              <a:rPr sz="1400" b="1" i="0">
-                <a:solidFill>
-                  <a:srgbClr val="0A0A0A"/>
-                </a:solidFill>
-                <a:latin typeface="Iowan Old Style"/>
-              </a:rPr>
-              <a:t>Porque si faltas a la última sesión, no te quedas sin web. Y tener algo público que enseñar hace que los deberes se hagan.</a:t>
-            </a:r>
-          </a:p>
-          <a:p>
-            <a:pPr>
-              <a:lnSpc>
-                <a:spcPct val="125000"/>
-              </a:lnSpc>
-              <a:spcBef>
-                <a:spcPts val="1000"/>
-              </a:spcBef>
-              <a:spcAft>
-                <a:spcPts val="300"/>
-              </a:spcAft>
-            </a:pPr>
-            <a:r>
-              <a:rPr sz="1000" b="0" i="0" spc="300">
-                <a:solidFill>
-                  <a:srgbClr val="8A8A8A"/>
-                </a:solidFill>
-                <a:latin typeface="Menlo"/>
-              </a:rPr>
-              <a:t>EL ERROR CLÁSICO</a:t>
-            </a:r>
-          </a:p>
-          <a:p>
-            <a:pPr>
-              <a:lnSpc>
-                <a:spcPct val="140000"/>
-              </a:lnSpc>
-              <a:spcBef>
-                <a:spcPts val="0"/>
-              </a:spcBef>
-              <a:spcAft>
-                <a:spcPts val="800"/>
-              </a:spcAft>
-            </a:pPr>
-            <a:r>
-              <a:rPr sz="1400" b="0" i="0">
-                <a:solidFill>
-                  <a:srgbClr val="444444"/>
-                </a:solidFill>
-                <a:latin typeface="Iowan Old Style"/>
-              </a:rPr>
-              <a:t>Si arrastras la carpeta entera queda mi-web/index.html y da 404. Al abrir el repositorio tienes que ver index.html en la primera pantalla.</a:t>
+              <a:t>Sí, hoy. Sin entender nada todavía. Para que salgáis por la puerta con una dirección de internet.</a:t>
             </a:r>
           </a:p>
         </p:txBody>
@@ -13575,7 +13862,7 @@
             <a:avLst/>
           </a:prstGeom>
           <a:solidFill>
-            <a:srgbClr val="0A0A0A"/>
+            <a:srgbClr val="FDFBE9"/>
           </a:solidFill>
           <a:ln>
             <a:noFill/>
@@ -13606,14 +13893,58 @@
       </p:sp>
       <p:sp>
         <p:nvSpPr>
-          <p:cNvPr id="3" name="TextBox 2"/>
+          <p:cNvPr id="3" name="Rectangle 2"/>
+          <p:cNvSpPr/>
+          <p:nvPr/>
+        </p:nvSpPr>
+        <p:spPr>
+          <a:xfrm>
+            <a:off x="0" y="0"/>
+            <a:ext cx="54864" cy="6858000"/>
+          </a:xfrm>
+          <a:prstGeom prst="rect">
+            <a:avLst/>
+          </a:prstGeom>
+          <a:solidFill>
+            <a:srgbClr val="E8DD58"/>
+          </a:solidFill>
+          <a:ln>
+            <a:noFill/>
+          </a:ln>
+          <a:effectLst/>
+        </p:spPr>
+        <p:style>
+          <a:lnRef idx="1">
+            <a:schemeClr val="accent1"/>
+          </a:lnRef>
+          <a:fillRef idx="3">
+            <a:schemeClr val="accent1"/>
+          </a:fillRef>
+          <a:effectRef idx="2">
+            <a:schemeClr val="accent1"/>
+          </a:effectRef>
+          <a:fontRef idx="minor">
+            <a:schemeClr val="lt1"/>
+          </a:fontRef>
+        </p:style>
+        <p:txBody>
+          <a:bodyPr rtlCol="0" anchor="ctr"/>
+          <a:lstStyle/>
+          <a:p>
+            <a:pPr algn="ctr"/>
+          </a:p>
+        </p:txBody>
+      </p:sp>
+      <p:sp>
+        <p:nvSpPr>
+          <p:cNvPr id="4" name="TextBox 3"/>
           <p:cNvSpPr txBox="1"/>
           <p:nvPr/>
         </p:nvSpPr>
         <p:spPr>
           <a:xfrm>
-            <a:off x="777240" y="1920240"/>
-            <a:ext cx="10637215" cy="3108960"/>
+            <a:off x="777240" y="310896"/>
+            <a:ext cx="10637215" cy="219456"/>
           </a:xfrm>
           <a:prstGeom prst="rect">
             <a:avLst/>
@@ -13634,41 +13965,176 @@
                 <a:spcPts val="0"/>
               </a:spcBef>
               <a:spcAft>
-                <a:spcPts val="2000"/>
-              </a:spcAft>
-            </a:pPr>
-            <a:r>
-              <a:rPr sz="1100" b="0" i="0" spc="300">
+                <a:spcPts val="600"/>
+              </a:spcAft>
+            </a:pPr>
+            <a:r>
+              <a:rPr sz="950" b="0" i="0" spc="800">
+                <a:solidFill>
+                  <a:srgbClr val="8A7C14"/>
+                </a:solidFill>
+                <a:latin typeface="Menlo"/>
+              </a:rPr>
+              <a:t>PRÁCTICA</a:t>
+            </a:r>
+          </a:p>
+        </p:txBody>
+      </p:sp>
+      <p:sp>
+        <p:nvSpPr>
+          <p:cNvPr id="5" name="TextBox 4"/>
+          <p:cNvSpPr txBox="1"/>
+          <p:nvPr/>
+        </p:nvSpPr>
+        <p:spPr>
+          <a:xfrm>
+            <a:off x="777240" y="777240"/>
+            <a:ext cx="10637215" cy="274320"/>
+          </a:xfrm>
+          <a:prstGeom prst="rect">
+            <a:avLst/>
+          </a:prstGeom>
+          <a:noFill/>
+        </p:spPr>
+        <p:txBody>
+          <a:bodyPr wrap="square" lIns="0" rIns="0" tIns="0" bIns="0">
+            <a:spAutoFit/>
+          </a:bodyPr>
+          <a:lstStyle/>
+          <a:p>
+            <a:pPr>
+              <a:lnSpc>
+                <a:spcPct val="125000"/>
+              </a:lnSpc>
+              <a:spcBef>
+                <a:spcPts val="0"/>
+              </a:spcBef>
+              <a:spcAft>
+                <a:spcPts val="600"/>
+              </a:spcAft>
+            </a:pPr>
+            <a:r>
+              <a:rPr sz="1000" b="0" i="0" spc="300">
                 <a:solidFill>
                   <a:srgbClr val="8A8A8A"/>
                 </a:solidFill>
                 <a:latin typeface="Menlo"/>
               </a:rPr>
-              <a:t>02:50 · 10 MINUTOS</a:t>
-            </a:r>
-          </a:p>
-          <a:p>
-            <a:pPr>
-              <a:lnSpc>
-                <a:spcPct val="110000"/>
-              </a:lnSpc>
-              <a:spcBef>
-                <a:spcPts val="0"/>
-              </a:spcBef>
-              <a:spcAft>
-                <a:spcPts val="1800"/>
-              </a:spcAft>
-            </a:pPr>
-            <a:r>
-              <a:rPr sz="4000" b="0" i="0">
-                <a:solidFill>
-                  <a:srgbClr val="FFFFFF"/>
+              <a:t>02:40   ·   A CIEGAS, YA LO ENTENDEREMOS</a:t>
+            </a:r>
+          </a:p>
+        </p:txBody>
+      </p:sp>
+      <p:sp>
+        <p:nvSpPr>
+          <p:cNvPr id="6" name="Rectangle 5"/>
+          <p:cNvSpPr/>
+          <p:nvPr/>
+        </p:nvSpPr>
+        <p:spPr>
+          <a:xfrm>
+            <a:off x="777240" y="1161288"/>
+            <a:ext cx="10637215" cy="9525"/>
+          </a:xfrm>
+          <a:prstGeom prst="rect">
+            <a:avLst/>
+          </a:prstGeom>
+          <a:solidFill>
+            <a:srgbClr val="D8D8D8"/>
+          </a:solidFill>
+          <a:ln>
+            <a:noFill/>
+          </a:ln>
+          <a:effectLst/>
+        </p:spPr>
+        <p:style>
+          <a:lnRef idx="1">
+            <a:schemeClr val="accent1"/>
+          </a:lnRef>
+          <a:fillRef idx="3">
+            <a:schemeClr val="accent1"/>
+          </a:fillRef>
+          <a:effectRef idx="2">
+            <a:schemeClr val="accent1"/>
+          </a:effectRef>
+          <a:fontRef idx="minor">
+            <a:schemeClr val="lt1"/>
+          </a:fontRef>
+        </p:style>
+        <p:txBody>
+          <a:bodyPr rtlCol="0" anchor="ctr"/>
+          <a:lstStyle/>
+          <a:p>
+            <a:pPr algn="ctr"/>
+          </a:p>
+        </p:txBody>
+      </p:sp>
+      <p:sp>
+        <p:nvSpPr>
+          <p:cNvPr id="7" name="TextBox 6"/>
+          <p:cNvSpPr txBox="1"/>
+          <p:nvPr/>
+        </p:nvSpPr>
+        <p:spPr>
+          <a:xfrm>
+            <a:off x="777240" y="1417320"/>
+            <a:ext cx="10637215" cy="822960"/>
+          </a:xfrm>
+          <a:prstGeom prst="rect">
+            <a:avLst/>
+          </a:prstGeom>
+          <a:noFill/>
+        </p:spPr>
+        <p:txBody>
+          <a:bodyPr wrap="square" lIns="0" rIns="0" tIns="0" bIns="0">
+            <a:spAutoFit/>
+          </a:bodyPr>
+          <a:lstStyle/>
+          <a:p>
+            <a:pPr>
+              <a:lnSpc>
+                <a:spcPct val="112000"/>
+              </a:lnSpc>
+              <a:spcBef>
+                <a:spcPts val="0"/>
+              </a:spcBef>
+              <a:spcAft>
+                <a:spcPts val="600"/>
+              </a:spcAft>
+            </a:pPr>
+            <a:r>
+              <a:rPr sz="2700" b="0" i="0">
+                <a:solidFill>
+                  <a:srgbClr val="0A0A0A"/>
                 </a:solidFill>
                 <a:latin typeface="Inknut Antiqua"/>
               </a:rPr>
-              <a:t>cierre y encargo</a:t>
-            </a:r>
-          </a:p>
+              <a:t>seis clics</a:t>
+            </a:r>
+          </a:p>
+        </p:txBody>
+      </p:sp>
+      <p:sp>
+        <p:nvSpPr>
+          <p:cNvPr id="8" name="TextBox 7"/>
+          <p:cNvSpPr txBox="1"/>
+          <p:nvPr/>
+        </p:nvSpPr>
+        <p:spPr>
+          <a:xfrm>
+            <a:off x="777240" y="2057400"/>
+            <a:ext cx="10637215" cy="4251960"/>
+          </a:xfrm>
+          <a:prstGeom prst="rect">
+            <a:avLst/>
+          </a:prstGeom>
+          <a:noFill/>
+        </p:spPr>
+        <p:txBody>
+          <a:bodyPr wrap="square" lIns="0" rIns="0" tIns="0" bIns="0">
+            <a:spAutoFit/>
+          </a:bodyPr>
+          <a:lstStyle/>
           <a:p>
             <a:pPr>
               <a:lnSpc>
@@ -13678,17 +14144,215 @@
                 <a:spcPts val="0"/>
               </a:spcBef>
               <a:spcAft>
-                <a:spcPts val="600"/>
-              </a:spcAft>
-            </a:pPr>
-            <a:r>
-              <a:rPr sz="1700" b="0" i="0">
-                <a:solidFill>
-                  <a:srgbClr val="BBBBBB"/>
+                <a:spcPts val="500"/>
+              </a:spcAft>
+            </a:pPr>
+            <a:r>
+              <a:rPr sz="1450" b="0" i="0">
+                <a:solidFill>
+                  <a:srgbClr val="444444"/>
                 </a:solidFill>
                 <a:latin typeface="Iowan Old Style"/>
               </a:rPr>
-              <a:t>Cada una enseña su pantalla treinta segundos. Y os llevo deberes.</a:t>
+              <a:t>·  En github.com, botón New repository.</a:t>
+            </a:r>
+          </a:p>
+          <a:p>
+            <a:pPr>
+              <a:lnSpc>
+                <a:spcPct val="140000"/>
+              </a:lnSpc>
+              <a:spcBef>
+                <a:spcPts val="0"/>
+              </a:spcBef>
+              <a:spcAft>
+                <a:spcPts val="500"/>
+              </a:spcAft>
+            </a:pPr>
+            <a:r>
+              <a:rPr sz="1450" b="0" i="0">
+                <a:solidFill>
+                  <a:srgbClr val="444444"/>
+                </a:solidFill>
+                <a:latin typeface="Iowan Old Style"/>
+              </a:rPr>
+              <a:t>·  Nombre mi-web, marca Public, Create.</a:t>
+            </a:r>
+          </a:p>
+          <a:p>
+            <a:pPr>
+              <a:lnSpc>
+                <a:spcPct val="140000"/>
+              </a:lnSpc>
+              <a:spcBef>
+                <a:spcPts val="0"/>
+              </a:spcBef>
+              <a:spcAft>
+                <a:spcPts val="500"/>
+              </a:spcAft>
+            </a:pPr>
+            <a:r>
+              <a:rPr sz="1450" b="0" i="0">
+                <a:solidFill>
+                  <a:srgbClr val="444444"/>
+                </a:solidFill>
+                <a:latin typeface="Iowan Old Style"/>
+              </a:rPr>
+              <a:t>·  uploading an existing file.</a:t>
+            </a:r>
+          </a:p>
+          <a:p>
+            <a:pPr>
+              <a:lnSpc>
+                <a:spcPct val="140000"/>
+              </a:lnSpc>
+              <a:spcBef>
+                <a:spcPts val="0"/>
+              </a:spcBef>
+              <a:spcAft>
+                <a:spcPts val="500"/>
+              </a:spcAft>
+            </a:pPr>
+            <a:r>
+              <a:rPr sz="1450" b="0" i="0">
+                <a:solidFill>
+                  <a:srgbClr val="444444"/>
+                </a:solidFill>
+                <a:latin typeface="Iowan Old Style"/>
+              </a:rPr>
+              <a:t>·  Arrastra el contenido de tu carpeta, no la carpeta.</a:t>
+            </a:r>
+          </a:p>
+          <a:p>
+            <a:pPr>
+              <a:lnSpc>
+                <a:spcPct val="140000"/>
+              </a:lnSpc>
+              <a:spcBef>
+                <a:spcPts val="0"/>
+              </a:spcBef>
+              <a:spcAft>
+                <a:spcPts val="500"/>
+              </a:spcAft>
+            </a:pPr>
+            <a:r>
+              <a:rPr sz="1450" b="0" i="0">
+                <a:solidFill>
+                  <a:srgbClr val="444444"/>
+                </a:solidFill>
+                <a:latin typeface="Iowan Old Style"/>
+              </a:rPr>
+              <a:t>·  Commit changes.</a:t>
+            </a:r>
+          </a:p>
+          <a:p>
+            <a:pPr>
+              <a:lnSpc>
+                <a:spcPct val="140000"/>
+              </a:lnSpc>
+              <a:spcBef>
+                <a:spcPts val="0"/>
+              </a:spcBef>
+              <a:spcAft>
+                <a:spcPts val="500"/>
+              </a:spcAft>
+            </a:pPr>
+            <a:r>
+              <a:rPr sz="1450" b="0" i="0">
+                <a:solidFill>
+                  <a:srgbClr val="444444"/>
+                </a:solidFill>
+                <a:latin typeface="Iowan Old Style"/>
+              </a:rPr>
+              <a:t>·  Settings → Pages → Branch: main → Save.</a:t>
+            </a:r>
+          </a:p>
+          <a:p>
+            <a:pPr>
+              <a:lnSpc>
+                <a:spcPct val="125000"/>
+              </a:lnSpc>
+              <a:spcBef>
+                <a:spcPts val="1000"/>
+              </a:spcBef>
+              <a:spcAft>
+                <a:spcPts val="300"/>
+              </a:spcAft>
+            </a:pPr>
+            <a:r>
+              <a:rPr sz="1000" b="0" i="0" spc="300">
+                <a:solidFill>
+                  <a:srgbClr val="887000"/>
+                </a:solidFill>
+                <a:latin typeface="Menlo"/>
+              </a:rPr>
+              <a:t>POR QUÉ HOY Y NO EN LA SESIÓN 3</a:t>
+            </a:r>
+          </a:p>
+          <a:p>
+            <a:pPr>
+              <a:lnSpc>
+                <a:spcPct val="140000"/>
+              </a:lnSpc>
+              <a:spcBef>
+                <a:spcPts val="0"/>
+              </a:spcBef>
+              <a:spcAft>
+                <a:spcPts val="800"/>
+              </a:spcAft>
+            </a:pPr>
+            <a:r>
+              <a:rPr sz="1400" b="1" i="0">
+                <a:solidFill>
+                  <a:srgbClr val="0A0A0A"/>
+                </a:solidFill>
+                <a:latin typeface="Iowan Old Style"/>
+              </a:rPr>
+              <a:t>Porque si faltas a la última sesión, no te quedas sin web. Y tener algo público que enseñar hace que los deberes se hagan.</a:t>
+            </a:r>
+          </a:p>
+          <a:p>
+            <a:pPr>
+              <a:lnSpc>
+                <a:spcPct val="125000"/>
+              </a:lnSpc>
+              <a:spcBef>
+                <a:spcPts val="1000"/>
+              </a:spcBef>
+              <a:spcAft>
+                <a:spcPts val="300"/>
+              </a:spcAft>
+            </a:pPr>
+            <a:r>
+              <a:rPr sz="1000" b="0" i="0" spc="300">
+                <a:solidFill>
+                  <a:srgbClr val="8A8A8A"/>
+                </a:solidFill>
+                <a:latin typeface="Menlo"/>
+              </a:rPr>
+              <a:t>EL ERROR CLÁSICO</a:t>
+            </a:r>
+          </a:p>
+          <a:p>
+            <a:pPr>
+              <a:lnSpc>
+                <a:spcPct val="140000"/>
+              </a:lnSpc>
+              <a:spcBef>
+                <a:spcPts val="0"/>
+              </a:spcBef>
+              <a:spcAft>
+                <a:spcPts val="800"/>
+              </a:spcAft>
+            </a:pPr>
+            <a:r>
+              <a:rPr sz="1400" b="0" i="0">
+                <a:solidFill>
+                  <a:srgbClr val="444444"/>
+                </a:solidFill>
+                <a:latin typeface="Iowan Old Style"/>
+              </a:rPr>
+              <a:t>Si arrastras la carpeta entera queda mi-web/index.html y da 404. Al abrir el repositorio tienes que ver index.html en la primera pantalla.</a:t>
             </a:r>
           </a:p>
         </p:txBody>
@@ -13726,7 +14390,7 @@
             <a:avLst/>
           </a:prstGeom>
           <a:solidFill>
-            <a:srgbClr val="FFFFFF"/>
+            <a:srgbClr val="0A0A0A"/>
           </a:solidFill>
           <a:ln>
             <a:noFill/>
@@ -13763,8 +14427,8 @@
         </p:nvSpPr>
         <p:spPr>
           <a:xfrm>
-            <a:off x="777240" y="310896"/>
-            <a:ext cx="10637215" cy="219456"/>
+            <a:off x="777240" y="1920240"/>
+            <a:ext cx="10637215" cy="3108960"/>
           </a:xfrm>
           <a:prstGeom prst="rect">
             <a:avLst/>
@@ -13785,336 +14449,61 @@
                 <a:spcPts val="0"/>
               </a:spcBef>
               <a:spcAft>
+                <a:spcPts val="2000"/>
+              </a:spcAft>
+            </a:pPr>
+            <a:r>
+              <a:rPr sz="1100" b="0" i="0" spc="300">
+                <a:solidFill>
+                  <a:srgbClr val="8A8A8A"/>
+                </a:solidFill>
+                <a:latin typeface="Menlo"/>
+              </a:rPr>
+              <a:t>02:50 · 10 MINUTOS</a:t>
+            </a:r>
+          </a:p>
+          <a:p>
+            <a:pPr>
+              <a:lnSpc>
+                <a:spcPct val="110000"/>
+              </a:lnSpc>
+              <a:spcBef>
+                <a:spcPts val="0"/>
+              </a:spcBef>
+              <a:spcAft>
+                <a:spcPts val="1800"/>
+              </a:spcAft>
+            </a:pPr>
+            <a:r>
+              <a:rPr sz="4000" b="0" i="0">
+                <a:solidFill>
+                  <a:srgbClr val="FFFFFF"/>
+                </a:solidFill>
+                <a:latin typeface="Inknut Antiqua"/>
+              </a:rPr>
+              <a:t>cierre y encargo</a:t>
+            </a:r>
+          </a:p>
+          <a:p>
+            <a:pPr>
+              <a:lnSpc>
+                <a:spcPct val="140000"/>
+              </a:lnSpc>
+              <a:spcBef>
+                <a:spcPts val="0"/>
+              </a:spcBef>
+              <a:spcAft>
                 <a:spcPts val="600"/>
               </a:spcAft>
             </a:pPr>
             <a:r>
-              <a:rPr sz="950" b="0" i="0" spc="800">
-                <a:solidFill>
-                  <a:srgbClr val="8A8A8A"/>
-                </a:solidFill>
-                <a:latin typeface="Menlo"/>
-              </a:rPr>
-              <a:t>TEORÍA</a:t>
-            </a:r>
-          </a:p>
-        </p:txBody>
-      </p:sp>
-      <p:sp>
-        <p:nvSpPr>
-          <p:cNvPr id="4" name="TextBox 3"/>
-          <p:cNvSpPr txBox="1"/>
-          <p:nvPr/>
-        </p:nvSpPr>
-        <p:spPr>
-          <a:xfrm>
-            <a:off x="777240" y="777240"/>
-            <a:ext cx="10637215" cy="274320"/>
-          </a:xfrm>
-          <a:prstGeom prst="rect">
-            <a:avLst/>
-          </a:prstGeom>
-          <a:noFill/>
-        </p:spPr>
-        <p:txBody>
-          <a:bodyPr wrap="square" lIns="0" rIns="0" tIns="0" bIns="0">
-            <a:spAutoFit/>
-          </a:bodyPr>
-          <a:lstStyle/>
-          <a:p>
-            <a:pPr>
-              <a:lnSpc>
-                <a:spcPct val="125000"/>
-              </a:lnSpc>
-              <a:spcBef>
-                <a:spcPts val="0"/>
-              </a:spcBef>
-              <a:spcAft>
-                <a:spcPts val="600"/>
-              </a:spcAft>
-            </a:pPr>
-            <a:r>
-              <a:rPr sz="1000" b="0" i="0" spc="300">
-                <a:solidFill>
-                  <a:srgbClr val="8A8A8A"/>
-                </a:solidFill>
-                <a:latin typeface="Menlo"/>
-              </a:rPr>
-              <a:t>02:50   ·   LO QUE NO VAMOS A HACER</a:t>
-            </a:r>
-          </a:p>
-        </p:txBody>
-      </p:sp>
-      <p:sp>
-        <p:nvSpPr>
-          <p:cNvPr id="5" name="Rectangle 4"/>
-          <p:cNvSpPr/>
-          <p:nvPr/>
-        </p:nvSpPr>
-        <p:spPr>
-          <a:xfrm>
-            <a:off x="777240" y="1161288"/>
-            <a:ext cx="10637215" cy="9525"/>
-          </a:xfrm>
-          <a:prstGeom prst="rect">
-            <a:avLst/>
-          </a:prstGeom>
-          <a:solidFill>
-            <a:srgbClr val="D8D8D8"/>
-          </a:solidFill>
-          <a:ln>
-            <a:noFill/>
-          </a:ln>
-          <a:effectLst/>
-        </p:spPr>
-        <p:style>
-          <a:lnRef idx="1">
-            <a:schemeClr val="accent1"/>
-          </a:lnRef>
-          <a:fillRef idx="3">
-            <a:schemeClr val="accent1"/>
-          </a:fillRef>
-          <a:effectRef idx="2">
-            <a:schemeClr val="accent1"/>
-          </a:effectRef>
-          <a:fontRef idx="minor">
-            <a:schemeClr val="lt1"/>
-          </a:fontRef>
-        </p:style>
-        <p:txBody>
-          <a:bodyPr rtlCol="0" anchor="ctr"/>
-          <a:lstStyle/>
-          <a:p>
-            <a:pPr algn="ctr"/>
-          </a:p>
-        </p:txBody>
-      </p:sp>
-      <p:sp>
-        <p:nvSpPr>
-          <p:cNvPr id="6" name="TextBox 5"/>
-          <p:cNvSpPr txBox="1"/>
-          <p:nvPr/>
-        </p:nvSpPr>
-        <p:spPr>
-          <a:xfrm>
-            <a:off x="777240" y="1417320"/>
-            <a:ext cx="10637215" cy="822960"/>
-          </a:xfrm>
-          <a:prstGeom prst="rect">
-            <a:avLst/>
-          </a:prstGeom>
-          <a:noFill/>
-        </p:spPr>
-        <p:txBody>
-          <a:bodyPr wrap="square" lIns="0" rIns="0" tIns="0" bIns="0">
-            <a:spAutoFit/>
-          </a:bodyPr>
-          <a:lstStyle/>
-          <a:p>
-            <a:pPr>
-              <a:lnSpc>
-                <a:spcPct val="112000"/>
-              </a:lnSpc>
-              <a:spcBef>
-                <a:spcPts val="0"/>
-              </a:spcBef>
-              <a:spcAft>
-                <a:spcPts val="600"/>
-              </a:spcAft>
-            </a:pPr>
-            <a:r>
-              <a:rPr sz="2700" b="0" i="0">
-                <a:solidFill>
-                  <a:srgbClr val="0A0A0A"/>
-                </a:solidFill>
-                <a:latin typeface="Inknut Antiqua"/>
-              </a:rPr>
-              <a:t>lo que esto no hace</a:t>
-            </a:r>
-          </a:p>
-        </p:txBody>
-      </p:sp>
-      <p:sp>
-        <p:nvSpPr>
-          <p:cNvPr id="7" name="TextBox 6"/>
-          <p:cNvSpPr txBox="1"/>
-          <p:nvPr/>
-        </p:nvSpPr>
-        <p:spPr>
-          <a:xfrm>
-            <a:off x="777240" y="2057400"/>
-            <a:ext cx="10637215" cy="4251960"/>
-          </a:xfrm>
-          <a:prstGeom prst="rect">
-            <a:avLst/>
-          </a:prstGeom>
-          <a:noFill/>
-        </p:spPr>
-        <p:txBody>
-          <a:bodyPr wrap="square" lIns="0" rIns="0" tIns="0" bIns="0">
-            <a:spAutoFit/>
-          </a:bodyPr>
-          <a:lstStyle/>
-          <a:p>
-            <a:pPr>
-              <a:lnSpc>
-                <a:spcPct val="142000"/>
-              </a:lnSpc>
-              <a:spcBef>
-                <a:spcPts val="0"/>
-              </a:spcBef>
-              <a:spcAft>
-                <a:spcPts val="900"/>
-              </a:spcAft>
-            </a:pPr>
-            <a:r>
-              <a:rPr sz="1500" b="0" i="0">
-                <a:solidFill>
-                  <a:srgbClr val="444444"/>
+              <a:rPr sz="1700" b="0" i="0">
+                <a:solidFill>
+                  <a:srgbClr val="BBBBBB"/>
                 </a:solidFill>
                 <a:latin typeface="Iowan Old Style"/>
               </a:rPr>
-              <a:t>Lo que sí hace: existir para siempre, cargar rápido, no costar nada al mes y no depender de ninguna empresa.</a:t>
-            </a:r>
-          </a:p>
-          <a:p>
-            <a:pPr>
-              <a:lnSpc>
-                <a:spcPct val="135000"/>
-              </a:lnSpc>
-              <a:spcAft>
-                <a:spcPts val="500"/>
-              </a:spcAft>
-            </a:pPr>
-            <a:r>
-              <a:rPr sz="1250">
-                <a:solidFill>
-                  <a:srgbClr val="0A0A0A"/>
-                </a:solidFill>
-                <a:latin typeface="Menlo"/>
-              </a:rPr>
-              <a:t>formulario de contacto    </a:t>
-            </a:r>
-            <a:r>
-              <a:rPr sz="1350">
-                <a:solidFill>
-                  <a:srgbClr val="444444"/>
-                </a:solidFill>
-                <a:latin typeface="Iowan Old Style"/>
-              </a:rPr>
-              <a:t>Necesita un servidor. Pon tu correo con mailto: — es lo que hace casi todo el mundo y no se rompe nunca.</a:t>
-            </a:r>
-          </a:p>
-          <a:p>
-            <a:pPr>
-              <a:lnSpc>
-                <a:spcPct val="135000"/>
-              </a:lnSpc>
-              <a:spcAft>
-                <a:spcPts val="500"/>
-              </a:spcAft>
-            </a:pPr>
-            <a:r>
-              <a:rPr sz="1250">
-                <a:solidFill>
-                  <a:srgbClr val="0A0A0A"/>
-                </a:solidFill>
-                <a:latin typeface="Menlo"/>
-              </a:rPr>
-              <a:t>tienda    </a:t>
-            </a:r>
-            <a:r>
-              <a:rPr sz="1350">
-                <a:solidFill>
-                  <a:srgbClr val="444444"/>
-                </a:solidFill>
-                <a:latin typeface="Iowan Old Style"/>
-              </a:rPr>
-              <a:t>Pagos, stock y seguridad son otro proyecto. Enlaza a Bandcamp o Big Cartel.</a:t>
-            </a:r>
-          </a:p>
-          <a:p>
-            <a:pPr>
-              <a:lnSpc>
-                <a:spcPct val="135000"/>
-              </a:lnSpc>
-              <a:spcAft>
-                <a:spcPts val="500"/>
-              </a:spcAft>
-            </a:pPr>
-            <a:r>
-              <a:rPr sz="1250">
-                <a:solidFill>
-                  <a:srgbClr val="0A0A0A"/>
-                </a:solidFill>
-                <a:latin typeface="Menlo"/>
-              </a:rPr>
-              <a:t>blog automático    </a:t>
-            </a:r>
-            <a:r>
-              <a:rPr sz="1350">
-                <a:solidFill>
-                  <a:srgbClr val="444444"/>
-                </a:solidFill>
-                <a:latin typeface="Iowan Old Style"/>
-              </a:rPr>
-              <a:t>Cada entrada es un archivo que creas a mano. Para tres o cuatro al año, perfecto.</a:t>
-            </a:r>
-          </a:p>
-          <a:p>
-            <a:pPr>
-              <a:lnSpc>
-                <a:spcPct val="135000"/>
-              </a:lnSpc>
-              <a:spcAft>
-                <a:spcPts val="500"/>
-              </a:spcAft>
-            </a:pPr>
-            <a:r>
-              <a:rPr sz="1250">
-                <a:solidFill>
-                  <a:srgbClr val="0A0A0A"/>
-                </a:solidFill>
-                <a:latin typeface="Menlo"/>
-              </a:rPr>
-              <a:t>comentarios    </a:t>
-            </a:r>
-            <a:r>
-              <a:rPr sz="1350">
-                <a:solidFill>
-                  <a:srgbClr val="444444"/>
-                </a:solidFill>
-                <a:latin typeface="Iowan Old Style"/>
-              </a:rPr>
-              <a:t>Necesitan base de datos y moderación. No.</a:t>
-            </a:r>
-          </a:p>
-          <a:p>
-            <a:pPr>
-              <a:lnSpc>
-                <a:spcPct val="135000"/>
-              </a:lnSpc>
-              <a:spcAft>
-                <a:spcPts val="500"/>
-              </a:spcAft>
-            </a:pPr>
-            <a:r>
-              <a:rPr sz="1250">
-                <a:solidFill>
-                  <a:srgbClr val="0A0A0A"/>
-                </a:solidFill>
-                <a:latin typeface="Menlo"/>
-              </a:rPr>
-              <a:t>reservas    </a:t>
-            </a:r>
-            <a:r>
-              <a:rPr sz="1350">
-                <a:solidFill>
-                  <a:srgbClr val="444444"/>
-                </a:solidFill>
-                <a:latin typeface="Iowan Old Style"/>
-              </a:rPr>
-              <a:t>Enlaza a una herramienta externa.</a:t>
+              <a:t>Cada una enseña su pantalla treinta segundos. Y os llevo deberes.</a:t>
             </a:r>
           </a:p>
         </p:txBody>
@@ -14614,7 +15003,7 @@
             <a:avLst/>
           </a:prstGeom>
           <a:solidFill>
-            <a:srgbClr val="FDFBE9"/>
+            <a:srgbClr val="FFFFFF"/>
           </a:solidFill>
           <a:ln>
             <a:noFill/>
@@ -14645,51 +15034,7 @@
       </p:sp>
       <p:sp>
         <p:nvSpPr>
-          <p:cNvPr id="3" name="Rectangle 2"/>
-          <p:cNvSpPr/>
-          <p:nvPr/>
-        </p:nvSpPr>
-        <p:spPr>
-          <a:xfrm>
-            <a:off x="0" y="0"/>
-            <a:ext cx="54864" cy="6858000"/>
-          </a:xfrm>
-          <a:prstGeom prst="rect">
-            <a:avLst/>
-          </a:prstGeom>
-          <a:solidFill>
-            <a:srgbClr val="E8DD58"/>
-          </a:solidFill>
-          <a:ln>
-            <a:noFill/>
-          </a:ln>
-          <a:effectLst/>
-        </p:spPr>
-        <p:style>
-          <a:lnRef idx="1">
-            <a:schemeClr val="accent1"/>
-          </a:lnRef>
-          <a:fillRef idx="3">
-            <a:schemeClr val="accent1"/>
-          </a:fillRef>
-          <a:effectRef idx="2">
-            <a:schemeClr val="accent1"/>
-          </a:effectRef>
-          <a:fontRef idx="minor">
-            <a:schemeClr val="lt1"/>
-          </a:fontRef>
-        </p:style>
-        <p:txBody>
-          <a:bodyPr rtlCol="0" anchor="ctr"/>
-          <a:lstStyle/>
-          <a:p>
-            <a:pPr algn="ctr"/>
-          </a:p>
-        </p:txBody>
-      </p:sp>
-      <p:sp>
-        <p:nvSpPr>
-          <p:cNvPr id="4" name="TextBox 3"/>
+          <p:cNvPr id="3" name="TextBox 2"/>
           <p:cNvSpPr txBox="1"/>
           <p:nvPr/>
         </p:nvSpPr>
@@ -14723,18 +15068,18 @@
             <a:r>
               <a:rPr sz="950" b="0" i="0" spc="800">
                 <a:solidFill>
-                  <a:srgbClr val="8A7C14"/>
+                  <a:srgbClr val="8A8A8A"/>
                 </a:solidFill>
                 <a:latin typeface="Menlo"/>
               </a:rPr>
-              <a:t>PRÁCTICA</a:t>
-            </a:r>
-          </a:p>
-        </p:txBody>
-      </p:sp>
-      <p:sp>
-        <p:nvSpPr>
-          <p:cNvPr id="5" name="TextBox 4"/>
+              <a:t>TEORÍA</a:t>
+            </a:r>
+          </a:p>
+        </p:txBody>
+      </p:sp>
+      <p:sp>
+        <p:nvSpPr>
+          <p:cNvPr id="4" name="TextBox 3"/>
           <p:cNvSpPr txBox="1"/>
           <p:nvPr/>
         </p:nvSpPr>
@@ -14772,14 +15117,14 @@
                 </a:solidFill>
                 <a:latin typeface="Menlo"/>
               </a:rPr>
-              <a:t>EJERCICIO 3   ·   1 HORA · EN CASA</a:t>
-            </a:r>
-          </a:p>
-        </p:txBody>
-      </p:sp>
-      <p:sp>
-        <p:nvSpPr>
-          <p:cNvPr id="6" name="Rectangle 5"/>
+              <a:t>02:50   ·   LO QUE NO VAMOS A HACER</a:t>
+            </a:r>
+          </a:p>
+        </p:txBody>
+      </p:sp>
+      <p:sp>
+        <p:nvSpPr>
+          <p:cNvPr id="5" name="Rectangle 4"/>
           <p:cNvSpPr/>
           <p:nvPr/>
         </p:nvSpPr>
@@ -14823,7 +15168,7 @@
       </p:sp>
       <p:sp>
         <p:nvSpPr>
-          <p:cNvPr id="7" name="TextBox 6"/>
+          <p:cNvPr id="6" name="TextBox 5"/>
           <p:cNvSpPr txBox="1"/>
           <p:nvPr/>
         </p:nvSpPr>
@@ -14861,14 +15206,14 @@
                 </a:solidFill>
                 <a:latin typeface="Inknut Antiqua"/>
               </a:rPr>
-              <a:t>deberes: reunir el material</a:t>
-            </a:r>
-          </a:p>
-        </p:txBody>
-      </p:sp>
-      <p:sp>
-        <p:nvSpPr>
-          <p:cNvPr id="8" name="TextBox 7"/>
+              <a:t>lo que esto no hace</a:t>
+            </a:r>
+          </a:p>
+        </p:txBody>
+      </p:sp>
+      <p:sp>
+        <p:nvSpPr>
+          <p:cNvPr id="7" name="TextBox 6"/>
           <p:cNvSpPr txBox="1"/>
           <p:nvPr/>
         </p:nvSpPr>
@@ -14906,205 +15251,147 @@
                 </a:solidFill>
                 <a:latin typeface="Iowan Old Style"/>
               </a:rPr>
-              <a:t>No hay que programar nada. Es preparar el contenido, que es lo que más tarda y no se puede improvisar en clase. Sin esto, la sesión 2 no cunde.</a:t>
-            </a:r>
-          </a:p>
-          <a:p>
-            <a:pPr>
-              <a:lnSpc>
-                <a:spcPct val="140000"/>
-              </a:lnSpc>
-              <a:spcBef>
-                <a:spcPts val="0"/>
-              </a:spcBef>
+              <a:t>Lo que sí hace: existir para siempre, cargar rápido, no costar nada al mes y no depender de ninguna empresa.</a:t>
+            </a:r>
+          </a:p>
+          <a:p>
+            <a:pPr>
+              <a:lnSpc>
+                <a:spcPct val="135000"/>
+              </a:lnSpc>
               <a:spcAft>
                 <a:spcPts val="500"/>
               </a:spcAft>
             </a:pPr>
             <a:r>
-              <a:rPr sz="1450" b="0" i="0">
+              <a:rPr sz="1250">
+                <a:solidFill>
+                  <a:srgbClr val="0A0A0A"/>
+                </a:solidFill>
+                <a:latin typeface="Menlo"/>
+              </a:rPr>
+              <a:t>formulario de contacto    </a:t>
+            </a:r>
+            <a:r>
+              <a:rPr sz="1350">
                 <a:solidFill>
                   <a:srgbClr val="444444"/>
                 </a:solidFill>
                 <a:latin typeface="Iowan Old Style"/>
               </a:rPr>
-              <a:t>☐  Tu bio, escrita y revisada.</a:t>
-            </a:r>
-          </a:p>
-          <a:p>
-            <a:pPr>
-              <a:lnSpc>
-                <a:spcPct val="140000"/>
-              </a:lnSpc>
-              <a:spcBef>
-                <a:spcPts val="0"/>
-              </a:spcBef>
+              <a:t>Necesita un servidor. Pon tu correo con mailto: — es lo que hace casi todo el mundo y no se rompe nunca.</a:t>
+            </a:r>
+          </a:p>
+          <a:p>
+            <a:pPr>
+              <a:lnSpc>
+                <a:spcPct val="135000"/>
+              </a:lnSpc>
               <a:spcAft>
                 <a:spcPts val="500"/>
               </a:spcAft>
             </a:pPr>
             <a:r>
-              <a:rPr sz="1450" b="0" i="0">
+              <a:rPr sz="1250">
+                <a:solidFill>
+                  <a:srgbClr val="0A0A0A"/>
+                </a:solidFill>
+                <a:latin typeface="Menlo"/>
+              </a:rPr>
+              <a:t>tienda    </a:t>
+            </a:r>
+            <a:r>
+              <a:rPr sz="1350">
                 <a:solidFill>
                   <a:srgbClr val="444444"/>
                 </a:solidFill>
                 <a:latin typeface="Iowan Old Style"/>
               </a:rPr>
-              <a:t>☐  La ficha de cada proyecto: título, año, técnica, lugar, dos o tres líneas.</a:t>
-            </a:r>
-          </a:p>
-          <a:p>
-            <a:pPr>
-              <a:lnSpc>
-                <a:spcPct val="140000"/>
-              </a:lnSpc>
-              <a:spcBef>
-                <a:spcPts val="0"/>
-              </a:spcBef>
+              <a:t>Pagos, stock y seguridad son otro proyecto. Enlaza a Bandcamp o Big Cartel.</a:t>
+            </a:r>
+          </a:p>
+          <a:p>
+            <a:pPr>
+              <a:lnSpc>
+                <a:spcPct val="135000"/>
+              </a:lnSpc>
               <a:spcAft>
                 <a:spcPts val="500"/>
               </a:spcAft>
             </a:pPr>
             <a:r>
-              <a:rPr sz="1450" b="0" i="0">
+              <a:rPr sz="1250">
+                <a:solidFill>
+                  <a:srgbClr val="0A0A0A"/>
+                </a:solidFill>
+                <a:latin typeface="Menlo"/>
+              </a:rPr>
+              <a:t>blog automático    </a:t>
+            </a:r>
+            <a:r>
+              <a:rPr sz="1350">
                 <a:solidFill>
                   <a:srgbClr val="444444"/>
                 </a:solidFill>
                 <a:latin typeface="Iowan Old Style"/>
               </a:rPr>
-              <a:t>☐  Tu CV: exposiciones, formación, lo que quieras incluir.</a:t>
-            </a:r>
-          </a:p>
-          <a:p>
-            <a:pPr>
-              <a:lnSpc>
-                <a:spcPct val="140000"/>
-              </a:lnSpc>
-              <a:spcBef>
-                <a:spcPts val="0"/>
-              </a:spcBef>
+              <a:t>Cada entrada es un archivo que creas a mano. Para tres o cuatro al año, perfecto.</a:t>
+            </a:r>
+          </a:p>
+          <a:p>
+            <a:pPr>
+              <a:lnSpc>
+                <a:spcPct val="135000"/>
+              </a:lnSpc>
               <a:spcAft>
                 <a:spcPts val="500"/>
               </a:spcAft>
             </a:pPr>
             <a:r>
-              <a:rPr sz="1450" b="0" i="0">
+              <a:rPr sz="1250">
+                <a:solidFill>
+                  <a:srgbClr val="0A0A0A"/>
+                </a:solidFill>
+                <a:latin typeface="Menlo"/>
+              </a:rPr>
+              <a:t>comentarios    </a:t>
+            </a:r>
+            <a:r>
+              <a:rPr sz="1350">
                 <a:solidFill>
                   <a:srgbClr val="444444"/>
                 </a:solidFill>
                 <a:latin typeface="Iowan Old Style"/>
               </a:rPr>
-              <a:t>☐  Dos o tres webs que te gusten. Apunta qué te gusta de cada una.</a:t>
-            </a:r>
-          </a:p>
-          <a:p>
-            <a:pPr>
-              <a:lnSpc>
-                <a:spcPct val="140000"/>
-              </a:lnSpc>
-              <a:spcBef>
-                <a:spcPts val="0"/>
-              </a:spcBef>
+              <a:t>Necesitan base de datos y moderación. No.</a:t>
+            </a:r>
+          </a:p>
+          <a:p>
+            <a:pPr>
+              <a:lnSpc>
+                <a:spcPct val="135000"/>
+              </a:lnSpc>
               <a:spcAft>
                 <a:spcPts val="500"/>
               </a:spcAft>
             </a:pPr>
             <a:r>
-              <a:rPr sz="1450" b="0" i="0">
+              <a:rPr sz="1250">
+                <a:solidFill>
+                  <a:srgbClr val="0A0A0A"/>
+                </a:solidFill>
+                <a:latin typeface="Menlo"/>
+              </a:rPr>
+              <a:t>reservas    </a:t>
+            </a:r>
+            <a:r>
+              <a:rPr sz="1350">
                 <a:solidFill>
                   <a:srgbClr val="444444"/>
                 </a:solidFill>
                 <a:latin typeface="Iowan Old Style"/>
               </a:rPr>
-              <a:t>☐  Entre 5 y 10, en una carpeta.</a:t>
-            </a:r>
-          </a:p>
-          <a:p>
-            <a:pPr>
-              <a:lnSpc>
-                <a:spcPct val="140000"/>
-              </a:lnSpc>
-              <a:spcBef>
-                <a:spcPts val="0"/>
-              </a:spcBef>
-              <a:spcAft>
-                <a:spcPts val="500"/>
-              </a:spcAft>
-            </a:pPr>
-            <a:r>
-              <a:rPr sz="1450" b="0" i="0">
-                <a:solidFill>
-                  <a:srgbClr val="444444"/>
-                </a:solidFill>
-                <a:latin typeface="Iowan Old Style"/>
-              </a:rPr>
-              <a:t>☐  Reducidas a 1600 píxeles de ancho, con Vista Previa, Paint o squoosh.app.</a:t>
-            </a:r>
-          </a:p>
-          <a:p>
-            <a:pPr>
-              <a:lnSpc>
-                <a:spcPct val="140000"/>
-              </a:lnSpc>
-              <a:spcBef>
-                <a:spcPts val="0"/>
-              </a:spcBef>
-              <a:spcAft>
-                <a:spcPts val="500"/>
-              </a:spcAft>
-            </a:pPr>
-            <a:r>
-              <a:rPr sz="1450" b="0" i="0">
-                <a:solidFill>
-                  <a:srgbClr val="444444"/>
-                </a:solidFill>
-                <a:latin typeface="Iowan Old Style"/>
-              </a:rPr>
-              <a:t>☐  Sin espacios, sin acentos, en minúsculas: obra-2024.jpg, no Obra 2024.JPG.</a:t>
-            </a:r>
-          </a:p>
-          <a:p>
-            <a:pPr>
-              <a:lnSpc>
-                <a:spcPct val="125000"/>
-              </a:lnSpc>
-              <a:spcBef>
-                <a:spcPts val="1000"/>
-              </a:spcBef>
-              <a:spcAft>
-                <a:spcPts val="300"/>
-              </a:spcAft>
-            </a:pPr>
-            <a:r>
-              <a:rPr sz="1000" b="0" i="0" spc="300">
-                <a:solidFill>
-                  <a:srgbClr val="8A8A8A"/>
-                </a:solidFill>
-                <a:latin typeface="Menlo"/>
-              </a:rPr>
-              <a:t>OJO CON EL PESO</a:t>
-            </a:r>
-          </a:p>
-          <a:p>
-            <a:pPr>
-              <a:lnSpc>
-                <a:spcPct val="140000"/>
-              </a:lnSpc>
-              <a:spcBef>
-                <a:spcPts val="0"/>
-              </a:spcBef>
-              <a:spcAft>
-                <a:spcPts val="800"/>
-              </a:spcAft>
-            </a:pPr>
-            <a:r>
-              <a:rPr sz="1400" b="0" i="0">
-                <a:solidFill>
-                  <a:srgbClr val="444444"/>
-                </a:solidFill>
-                <a:latin typeface="Iowan Old Style"/>
-              </a:rPr>
-              <a:t>Una foto de cámara pesa 8 MB y tarda una eternidad. Reducida son 300 KB y se ve igual en pantalla.</a:t>
+              <a:t>Enlaza a una herramienta externa.</a:t>
             </a:r>
           </a:p>
         </p:txBody>
@@ -15142,7 +15429,7 @@
             <a:avLst/>
           </a:prstGeom>
           <a:solidFill>
-            <a:srgbClr val="0A0A0A"/>
+            <a:srgbClr val="FDFBE9"/>
           </a:solidFill>
           <a:ln>
             <a:noFill/>
@@ -15173,14 +15460,58 @@
       </p:sp>
       <p:sp>
         <p:nvSpPr>
-          <p:cNvPr id="3" name="TextBox 2"/>
+          <p:cNvPr id="3" name="Rectangle 2"/>
+          <p:cNvSpPr/>
+          <p:nvPr/>
+        </p:nvSpPr>
+        <p:spPr>
+          <a:xfrm>
+            <a:off x="0" y="0"/>
+            <a:ext cx="54864" cy="6858000"/>
+          </a:xfrm>
+          <a:prstGeom prst="rect">
+            <a:avLst/>
+          </a:prstGeom>
+          <a:solidFill>
+            <a:srgbClr val="E8DD58"/>
+          </a:solidFill>
+          <a:ln>
+            <a:noFill/>
+          </a:ln>
+          <a:effectLst/>
+        </p:spPr>
+        <p:style>
+          <a:lnRef idx="1">
+            <a:schemeClr val="accent1"/>
+          </a:lnRef>
+          <a:fillRef idx="3">
+            <a:schemeClr val="accent1"/>
+          </a:fillRef>
+          <a:effectRef idx="2">
+            <a:schemeClr val="accent1"/>
+          </a:effectRef>
+          <a:fontRef idx="minor">
+            <a:schemeClr val="lt1"/>
+          </a:fontRef>
+        </p:style>
+        <p:txBody>
+          <a:bodyPr rtlCol="0" anchor="ctr"/>
+          <a:lstStyle/>
+          <a:p>
+            <a:pPr algn="ctr"/>
+          </a:p>
+        </p:txBody>
+      </p:sp>
+      <p:sp>
+        <p:nvSpPr>
+          <p:cNvPr id="4" name="TextBox 3"/>
           <p:cNvSpPr txBox="1"/>
           <p:nvPr/>
         </p:nvSpPr>
         <p:spPr>
           <a:xfrm>
-            <a:off x="777240" y="1920240"/>
-            <a:ext cx="10637215" cy="3108960"/>
+            <a:off x="777240" y="310896"/>
+            <a:ext cx="10637215" cy="219456"/>
           </a:xfrm>
           <a:prstGeom prst="rect">
             <a:avLst/>
@@ -15201,39 +15532,196 @@
                 <a:spcPts val="0"/>
               </a:spcBef>
               <a:spcAft>
-                <a:spcPts val="1400"/>
-              </a:spcAft>
-            </a:pPr>
-            <a:r>
-              <a:rPr sz="1200" b="0" i="0" spc="600">
+                <a:spcPts val="600"/>
+              </a:spcAft>
+            </a:pPr>
+            <a:r>
+              <a:rPr sz="950" b="0" i="0" spc="800">
+                <a:solidFill>
+                  <a:srgbClr val="8A7C14"/>
+                </a:solidFill>
+                <a:latin typeface="Menlo"/>
+              </a:rPr>
+              <a:t>PRÁCTICA</a:t>
+            </a:r>
+          </a:p>
+        </p:txBody>
+      </p:sp>
+      <p:sp>
+        <p:nvSpPr>
+          <p:cNvPr id="5" name="TextBox 4"/>
+          <p:cNvSpPr txBox="1"/>
+          <p:nvPr/>
+        </p:nvSpPr>
+        <p:spPr>
+          <a:xfrm>
+            <a:off x="777240" y="777240"/>
+            <a:ext cx="10637215" cy="274320"/>
+          </a:xfrm>
+          <a:prstGeom prst="rect">
+            <a:avLst/>
+          </a:prstGeom>
+          <a:noFill/>
+        </p:spPr>
+        <p:txBody>
+          <a:bodyPr wrap="square" lIns="0" rIns="0" tIns="0" bIns="0">
+            <a:spAutoFit/>
+          </a:bodyPr>
+          <a:lstStyle/>
+          <a:p>
+            <a:pPr>
+              <a:lnSpc>
+                <a:spcPct val="125000"/>
+              </a:lnSpc>
+              <a:spcBef>
+                <a:spcPts val="0"/>
+              </a:spcBef>
+              <a:spcAft>
+                <a:spcPts val="600"/>
+              </a:spcAft>
+            </a:pPr>
+            <a:r>
+              <a:rPr sz="1000" b="0" i="0" spc="300">
                 <a:solidFill>
                   <a:srgbClr val="8A8A8A"/>
                 </a:solidFill>
                 <a:latin typeface="Menlo"/>
               </a:rPr>
-              <a:t>PARA LLEVARSE</a:t>
-            </a:r>
-          </a:p>
-          <a:p>
-            <a:pPr>
-              <a:lnSpc>
-                <a:spcPct val="110000"/>
-              </a:lnSpc>
-              <a:spcBef>
-                <a:spcPts val="0"/>
-              </a:spcBef>
-              <a:spcAft>
-                <a:spcPts val="1800"/>
-              </a:spcAft>
-            </a:pPr>
-            <a:r>
-              <a:rPr sz="4000" b="0" i="0">
-                <a:solidFill>
-                  <a:srgbClr val="FFFFFF"/>
+              <a:t>EJERCICIO 3   ·   1 HORA · EN CASA</a:t>
+            </a:r>
+          </a:p>
+        </p:txBody>
+      </p:sp>
+      <p:sp>
+        <p:nvSpPr>
+          <p:cNvPr id="6" name="Rectangle 5"/>
+          <p:cNvSpPr/>
+          <p:nvPr/>
+        </p:nvSpPr>
+        <p:spPr>
+          <a:xfrm>
+            <a:off x="777240" y="1161288"/>
+            <a:ext cx="10637215" cy="9525"/>
+          </a:xfrm>
+          <a:prstGeom prst="rect">
+            <a:avLst/>
+          </a:prstGeom>
+          <a:solidFill>
+            <a:srgbClr val="D8D8D8"/>
+          </a:solidFill>
+          <a:ln>
+            <a:noFill/>
+          </a:ln>
+          <a:effectLst/>
+        </p:spPr>
+        <p:style>
+          <a:lnRef idx="1">
+            <a:schemeClr val="accent1"/>
+          </a:lnRef>
+          <a:fillRef idx="3">
+            <a:schemeClr val="accent1"/>
+          </a:fillRef>
+          <a:effectRef idx="2">
+            <a:schemeClr val="accent1"/>
+          </a:effectRef>
+          <a:fontRef idx="minor">
+            <a:schemeClr val="lt1"/>
+          </a:fontRef>
+        </p:style>
+        <p:txBody>
+          <a:bodyPr rtlCol="0" anchor="ctr"/>
+          <a:lstStyle/>
+          <a:p>
+            <a:pPr algn="ctr"/>
+          </a:p>
+        </p:txBody>
+      </p:sp>
+      <p:sp>
+        <p:nvSpPr>
+          <p:cNvPr id="7" name="TextBox 6"/>
+          <p:cNvSpPr txBox="1"/>
+          <p:nvPr/>
+        </p:nvSpPr>
+        <p:spPr>
+          <a:xfrm>
+            <a:off x="777240" y="1417320"/>
+            <a:ext cx="10637215" cy="822960"/>
+          </a:xfrm>
+          <a:prstGeom prst="rect">
+            <a:avLst/>
+          </a:prstGeom>
+          <a:noFill/>
+        </p:spPr>
+        <p:txBody>
+          <a:bodyPr wrap="square" lIns="0" rIns="0" tIns="0" bIns="0">
+            <a:spAutoFit/>
+          </a:bodyPr>
+          <a:lstStyle/>
+          <a:p>
+            <a:pPr>
+              <a:lnSpc>
+                <a:spcPct val="112000"/>
+              </a:lnSpc>
+              <a:spcBef>
+                <a:spcPts val="0"/>
+              </a:spcBef>
+              <a:spcAft>
+                <a:spcPts val="600"/>
+              </a:spcAft>
+            </a:pPr>
+            <a:r>
+              <a:rPr sz="2700" b="0" i="0">
+                <a:solidFill>
+                  <a:srgbClr val="0A0A0A"/>
                 </a:solidFill>
                 <a:latin typeface="Inknut Antiqua"/>
               </a:rPr>
-              <a:t>chuleta de html</a:t>
+              <a:t>deberes: reunir el material</a:t>
+            </a:r>
+          </a:p>
+        </p:txBody>
+      </p:sp>
+      <p:sp>
+        <p:nvSpPr>
+          <p:cNvPr id="8" name="TextBox 7"/>
+          <p:cNvSpPr txBox="1"/>
+          <p:nvPr/>
+        </p:nvSpPr>
+        <p:spPr>
+          <a:xfrm>
+            <a:off x="777240" y="2057400"/>
+            <a:ext cx="10637215" cy="4251960"/>
+          </a:xfrm>
+          <a:prstGeom prst="rect">
+            <a:avLst/>
+          </a:prstGeom>
+          <a:noFill/>
+        </p:spPr>
+        <p:txBody>
+          <a:bodyPr wrap="square" lIns="0" rIns="0" tIns="0" bIns="0">
+            <a:spAutoFit/>
+          </a:bodyPr>
+          <a:lstStyle/>
+          <a:p>
+            <a:pPr>
+              <a:lnSpc>
+                <a:spcPct val="142000"/>
+              </a:lnSpc>
+              <a:spcBef>
+                <a:spcPts val="0"/>
+              </a:spcBef>
+              <a:spcAft>
+                <a:spcPts val="900"/>
+              </a:spcAft>
+            </a:pPr>
+            <a:r>
+              <a:rPr sz="1500" b="0" i="0">
+                <a:solidFill>
+                  <a:srgbClr val="444444"/>
+                </a:solidFill>
+                <a:latin typeface="Iowan Old Style"/>
+              </a:rPr>
+              <a:t>No hay que programar nada. Es preparar el contenido, que es lo que más tarda y no se puede improvisar en clase. Sin esto, la sesión 2 no cunde.</a:t>
             </a:r>
           </a:p>
           <a:p>
@@ -15245,17 +15733,193 @@
                 <a:spcPts val="0"/>
               </a:spcBef>
               <a:spcAft>
-                <a:spcPts val="600"/>
-              </a:spcAft>
-            </a:pPr>
-            <a:r>
-              <a:rPr sz="1700" b="0" i="0">
-                <a:solidFill>
-                  <a:srgbClr val="BBBBBB"/>
+                <a:spcPts val="500"/>
+              </a:spcAft>
+            </a:pPr>
+            <a:r>
+              <a:rPr sz="1450" b="0" i="0">
+                <a:solidFill>
+                  <a:srgbClr val="444444"/>
                 </a:solidFill>
                 <a:latin typeface="Iowan Old Style"/>
               </a:rPr>
-              <a:t>Todo lo de hoy en una hoja. Para dentro de tres meses, cuando estés sola delante del ordenador.</a:t>
+              <a:t>☐  Tu bio, escrita y revisada.</a:t>
+            </a:r>
+          </a:p>
+          <a:p>
+            <a:pPr>
+              <a:lnSpc>
+                <a:spcPct val="140000"/>
+              </a:lnSpc>
+              <a:spcBef>
+                <a:spcPts val="0"/>
+              </a:spcBef>
+              <a:spcAft>
+                <a:spcPts val="500"/>
+              </a:spcAft>
+            </a:pPr>
+            <a:r>
+              <a:rPr sz="1450" b="0" i="0">
+                <a:solidFill>
+                  <a:srgbClr val="444444"/>
+                </a:solidFill>
+                <a:latin typeface="Iowan Old Style"/>
+              </a:rPr>
+              <a:t>☐  La ficha de cada proyecto: título, año, técnica, lugar, dos o tres líneas.</a:t>
+            </a:r>
+          </a:p>
+          <a:p>
+            <a:pPr>
+              <a:lnSpc>
+                <a:spcPct val="140000"/>
+              </a:lnSpc>
+              <a:spcBef>
+                <a:spcPts val="0"/>
+              </a:spcBef>
+              <a:spcAft>
+                <a:spcPts val="500"/>
+              </a:spcAft>
+            </a:pPr>
+            <a:r>
+              <a:rPr sz="1450" b="0" i="0">
+                <a:solidFill>
+                  <a:srgbClr val="444444"/>
+                </a:solidFill>
+                <a:latin typeface="Iowan Old Style"/>
+              </a:rPr>
+              <a:t>☐  Tu CV: exposiciones, formación, lo que quieras incluir.</a:t>
+            </a:r>
+          </a:p>
+          <a:p>
+            <a:pPr>
+              <a:lnSpc>
+                <a:spcPct val="140000"/>
+              </a:lnSpc>
+              <a:spcBef>
+                <a:spcPts val="0"/>
+              </a:spcBef>
+              <a:spcAft>
+                <a:spcPts val="500"/>
+              </a:spcAft>
+            </a:pPr>
+            <a:r>
+              <a:rPr sz="1450" b="0" i="0">
+                <a:solidFill>
+                  <a:srgbClr val="444444"/>
+                </a:solidFill>
+                <a:latin typeface="Iowan Old Style"/>
+              </a:rPr>
+              <a:t>☐  Dos o tres webs que te gusten. Apunta qué te gusta de cada una.</a:t>
+            </a:r>
+          </a:p>
+          <a:p>
+            <a:pPr>
+              <a:lnSpc>
+                <a:spcPct val="140000"/>
+              </a:lnSpc>
+              <a:spcBef>
+                <a:spcPts val="0"/>
+              </a:spcBef>
+              <a:spcAft>
+                <a:spcPts val="500"/>
+              </a:spcAft>
+            </a:pPr>
+            <a:r>
+              <a:rPr sz="1450" b="0" i="0">
+                <a:solidFill>
+                  <a:srgbClr val="444444"/>
+                </a:solidFill>
+                <a:latin typeface="Iowan Old Style"/>
+              </a:rPr>
+              <a:t>☐  Entre 5 y 10, en una carpeta.</a:t>
+            </a:r>
+          </a:p>
+          <a:p>
+            <a:pPr>
+              <a:lnSpc>
+                <a:spcPct val="140000"/>
+              </a:lnSpc>
+              <a:spcBef>
+                <a:spcPts val="0"/>
+              </a:spcBef>
+              <a:spcAft>
+                <a:spcPts val="500"/>
+              </a:spcAft>
+            </a:pPr>
+            <a:r>
+              <a:rPr sz="1450" b="0" i="0">
+                <a:solidFill>
+                  <a:srgbClr val="444444"/>
+                </a:solidFill>
+                <a:latin typeface="Iowan Old Style"/>
+              </a:rPr>
+              <a:t>☐  Reducidas a 1600 píxeles de ancho, con Vista Previa, Paint o squoosh.app.</a:t>
+            </a:r>
+          </a:p>
+          <a:p>
+            <a:pPr>
+              <a:lnSpc>
+                <a:spcPct val="140000"/>
+              </a:lnSpc>
+              <a:spcBef>
+                <a:spcPts val="0"/>
+              </a:spcBef>
+              <a:spcAft>
+                <a:spcPts val="500"/>
+              </a:spcAft>
+            </a:pPr>
+            <a:r>
+              <a:rPr sz="1450" b="0" i="0">
+                <a:solidFill>
+                  <a:srgbClr val="444444"/>
+                </a:solidFill>
+                <a:latin typeface="Iowan Old Style"/>
+              </a:rPr>
+              <a:t>☐  Sin espacios, sin acentos, en minúsculas: obra-2024.jpg, no Obra 2024.JPG.</a:t>
+            </a:r>
+          </a:p>
+          <a:p>
+            <a:pPr>
+              <a:lnSpc>
+                <a:spcPct val="125000"/>
+              </a:lnSpc>
+              <a:spcBef>
+                <a:spcPts val="1000"/>
+              </a:spcBef>
+              <a:spcAft>
+                <a:spcPts val="300"/>
+              </a:spcAft>
+            </a:pPr>
+            <a:r>
+              <a:rPr sz="1000" b="0" i="0" spc="300">
+                <a:solidFill>
+                  <a:srgbClr val="8A8A8A"/>
+                </a:solidFill>
+                <a:latin typeface="Menlo"/>
+              </a:rPr>
+              <a:t>OJO CON EL PESO</a:t>
+            </a:r>
+          </a:p>
+          <a:p>
+            <a:pPr>
+              <a:lnSpc>
+                <a:spcPct val="140000"/>
+              </a:lnSpc>
+              <a:spcBef>
+                <a:spcPts val="0"/>
+              </a:spcBef>
+              <a:spcAft>
+                <a:spcPts val="800"/>
+              </a:spcAft>
+            </a:pPr>
+            <a:r>
+              <a:rPr sz="1400" b="0" i="0">
+                <a:solidFill>
+                  <a:srgbClr val="444444"/>
+                </a:solidFill>
+                <a:latin typeface="Iowan Old Style"/>
+              </a:rPr>
+              <a:t>Una foto de cámara pesa 8 MB y tarda una eternidad. Reducida son 300 KB y se ve igual en pantalla.</a:t>
             </a:r>
           </a:p>
         </p:txBody>
@@ -15293,7 +15957,7 @@
             <a:avLst/>
           </a:prstGeom>
           <a:solidFill>
-            <a:srgbClr val="FFFFFF"/>
+            <a:srgbClr val="0A0A0A"/>
           </a:solidFill>
           <a:ln>
             <a:noFill/>
@@ -15330,8 +15994,8 @@
         </p:nvSpPr>
         <p:spPr>
           <a:xfrm>
-            <a:off x="777240" y="310896"/>
-            <a:ext cx="10637215" cy="219456"/>
+            <a:off x="777240" y="1920240"/>
+            <a:ext cx="10637215" cy="3108960"/>
           </a:xfrm>
           <a:prstGeom prst="rect">
             <a:avLst/>
@@ -15352,425 +16016,61 @@
                 <a:spcPts val="0"/>
               </a:spcBef>
               <a:spcAft>
+                <a:spcPts val="1400"/>
+              </a:spcAft>
+            </a:pPr>
+            <a:r>
+              <a:rPr sz="1200" b="0" i="0" spc="600">
+                <a:solidFill>
+                  <a:srgbClr val="8A8A8A"/>
+                </a:solidFill>
+                <a:latin typeface="Menlo"/>
+              </a:rPr>
+              <a:t>PARA LLEVARSE</a:t>
+            </a:r>
+          </a:p>
+          <a:p>
+            <a:pPr>
+              <a:lnSpc>
+                <a:spcPct val="110000"/>
+              </a:lnSpc>
+              <a:spcBef>
+                <a:spcPts val="0"/>
+              </a:spcBef>
+              <a:spcAft>
+                <a:spcPts val="1800"/>
+              </a:spcAft>
+            </a:pPr>
+            <a:r>
+              <a:rPr sz="4000" b="0" i="0">
+                <a:solidFill>
+                  <a:srgbClr val="FFFFFF"/>
+                </a:solidFill>
+                <a:latin typeface="Inknut Antiqua"/>
+              </a:rPr>
+              <a:t>chuleta de html</a:t>
+            </a:r>
+          </a:p>
+          <a:p>
+            <a:pPr>
+              <a:lnSpc>
+                <a:spcPct val="140000"/>
+              </a:lnSpc>
+              <a:spcBef>
+                <a:spcPts val="0"/>
+              </a:spcBef>
+              <a:spcAft>
                 <a:spcPts val="600"/>
               </a:spcAft>
             </a:pPr>
             <a:r>
-              <a:rPr sz="950" b="0" i="0" spc="800">
-                <a:solidFill>
-                  <a:srgbClr val="8A8A8A"/>
-                </a:solidFill>
-                <a:latin typeface="Menlo"/>
-              </a:rPr>
-              <a:t>TEORÍA</a:t>
-            </a:r>
-          </a:p>
-        </p:txBody>
-      </p:sp>
-      <p:sp>
-        <p:nvSpPr>
-          <p:cNvPr id="4" name="TextBox 3"/>
-          <p:cNvSpPr txBox="1"/>
-          <p:nvPr/>
-        </p:nvSpPr>
-        <p:spPr>
-          <a:xfrm>
-            <a:off x="777240" y="777240"/>
-            <a:ext cx="10637215" cy="822960"/>
-          </a:xfrm>
-          <a:prstGeom prst="rect">
-            <a:avLst/>
-          </a:prstGeom>
-          <a:noFill/>
-        </p:spPr>
-        <p:txBody>
-          <a:bodyPr wrap="square" lIns="0" rIns="0" tIns="0" bIns="0">
-            <a:spAutoFit/>
-          </a:bodyPr>
-          <a:lstStyle/>
-          <a:p>
-            <a:pPr>
-              <a:lnSpc>
-                <a:spcPct val="112000"/>
-              </a:lnSpc>
-              <a:spcBef>
-                <a:spcPts val="0"/>
-              </a:spcBef>
-              <a:spcAft>
-                <a:spcPts val="600"/>
-              </a:spcAft>
-            </a:pPr>
-            <a:r>
-              <a:rPr sz="2700" b="0" i="0">
-                <a:solidFill>
-                  <a:srgbClr val="0A0A0A"/>
-                </a:solidFill>
-                <a:latin typeface="Inknut Antiqua"/>
-              </a:rPr>
-              <a:t>chuleta · html</a:t>
-            </a:r>
-          </a:p>
-        </p:txBody>
-      </p:sp>
-      <p:sp>
-        <p:nvSpPr>
-          <p:cNvPr id="5" name="TextBox 4"/>
-          <p:cNvSpPr txBox="1"/>
-          <p:nvPr/>
-        </p:nvSpPr>
-        <p:spPr>
-          <a:xfrm>
-            <a:off x="777240" y="1417320"/>
-            <a:ext cx="10637215" cy="4892040"/>
-          </a:xfrm>
-          <a:prstGeom prst="rect">
-            <a:avLst/>
-          </a:prstGeom>
-          <a:noFill/>
-        </p:spPr>
-        <p:txBody>
-          <a:bodyPr wrap="square" lIns="0" rIns="0" tIns="0" bIns="0">
-            <a:spAutoFit/>
-          </a:bodyPr>
-          <a:lstStyle/>
-          <a:p>
-            <a:pPr>
-              <a:lnSpc>
-                <a:spcPct val="140000"/>
-              </a:lnSpc>
-              <a:spcBef>
-                <a:spcPts val="0"/>
-              </a:spcBef>
-              <a:spcAft>
-                <a:spcPts val="500"/>
-              </a:spcAft>
-            </a:pPr>
-            <a:r>
-              <a:rPr sz="1450" b="0" i="0">
-                <a:solidFill>
-                  <a:srgbClr val="444444"/>
+              <a:rPr sz="1700" b="0" i="0">
+                <a:solidFill>
+                  <a:srgbClr val="BBBBBB"/>
                 </a:solidFill>
                 <a:latin typeface="Iowan Old Style"/>
               </a:rPr>
-              <a:t>·  ¿Has guardado el archivo?</a:t>
-            </a:r>
-          </a:p>
-          <a:p>
-            <a:pPr>
-              <a:lnSpc>
-                <a:spcPct val="140000"/>
-              </a:lnSpc>
-              <a:spcBef>
-                <a:spcPts val="0"/>
-              </a:spcBef>
-              <a:spcAft>
-                <a:spcPts val="500"/>
-              </a:spcAft>
-            </a:pPr>
-            <a:r>
-              <a:rPr sz="1450" b="0" i="0">
-                <a:solidFill>
-                  <a:srgbClr val="444444"/>
-                </a:solidFill>
-                <a:latin typeface="Iowan Old Style"/>
-              </a:rPr>
-              <a:t>·  ¿Has recargado? Forzada: Cmd+Shift+R o Ctrl+F5.</a:t>
-            </a:r>
-          </a:p>
-          <a:p>
-            <a:pPr>
-              <a:lnSpc>
-                <a:spcPct val="140000"/>
-              </a:lnSpc>
-              <a:spcBef>
-                <a:spcPts val="0"/>
-              </a:spcBef>
-              <a:spcAft>
-                <a:spcPts val="500"/>
-              </a:spcAft>
-            </a:pPr>
-            <a:r>
-              <a:rPr sz="1450" b="0" i="0">
-                <a:solidFill>
-                  <a:srgbClr val="444444"/>
-                </a:solidFill>
-                <a:latin typeface="Iowan Old Style"/>
-              </a:rPr>
-              <a:t>·  ¿Falta cerrar una etiqueta o una comilla? VS Code lo marca en color.</a:t>
-            </a:r>
-          </a:p>
-          <a:p>
-            <a:pPr>
-              <a:lnSpc>
-                <a:spcPct val="140000"/>
-              </a:lnSpc>
-              <a:spcBef>
-                <a:spcPts val="0"/>
-              </a:spcBef>
-              <a:spcAft>
-                <a:spcPts val="500"/>
-              </a:spcAft>
-            </a:pPr>
-            <a:r>
-              <a:rPr sz="1450" b="0" i="0">
-                <a:solidFill>
-                  <a:srgbClr val="444444"/>
-                </a:solidFill>
-                <a:latin typeface="Iowan Old Style"/>
-              </a:rPr>
-              <a:t>·  ¿Una imagen no sale? El nombre y el src tienen que coincidir exactamente.</a:t>
-            </a:r>
-          </a:p>
-          <a:p>
-            <a:pPr>
-              <a:lnSpc>
-                <a:spcPct val="135000"/>
-              </a:lnSpc>
-              <a:spcAft>
-                <a:spcPts val="500"/>
-              </a:spcAft>
-            </a:pPr>
-            <a:r>
-              <a:rPr sz="1250">
-                <a:solidFill>
-                  <a:srgbClr val="0A0A0A"/>
-                </a:solidFill>
-                <a:latin typeface="Menlo"/>
-              </a:rPr>
-              <a:t>&lt;head&gt;    </a:t>
-            </a:r>
-            <a:r>
-              <a:rPr sz="1350">
-                <a:solidFill>
-                  <a:srgbClr val="444444"/>
-                </a:solidFill>
-                <a:latin typeface="Iowan Old Style"/>
-              </a:rPr>
-              <a:t>Lo que no se ve: título de la pestaña, enlace al CSS.</a:t>
-            </a:r>
-          </a:p>
-          <a:p>
-            <a:pPr>
-              <a:lnSpc>
-                <a:spcPct val="135000"/>
-              </a:lnSpc>
-              <a:spcAft>
-                <a:spcPts val="500"/>
-              </a:spcAft>
-            </a:pPr>
-            <a:r>
-              <a:rPr sz="1250">
-                <a:solidFill>
-                  <a:srgbClr val="0A0A0A"/>
-                </a:solidFill>
-                <a:latin typeface="Menlo"/>
-              </a:rPr>
-              <a:t>&lt;body&gt;    </a:t>
-            </a:r>
-            <a:r>
-              <a:rPr sz="1350">
-                <a:solidFill>
-                  <a:srgbClr val="444444"/>
-                </a:solidFill>
-                <a:latin typeface="Iowan Old Style"/>
-              </a:rPr>
-              <a:t>Lo que sí se ve.</a:t>
-            </a:r>
-          </a:p>
-          <a:p>
-            <a:pPr>
-              <a:lnSpc>
-                <a:spcPct val="135000"/>
-              </a:lnSpc>
-              <a:spcAft>
-                <a:spcPts val="500"/>
-              </a:spcAft>
-            </a:pPr>
-            <a:r>
-              <a:rPr sz="1250">
-                <a:solidFill>
-                  <a:srgbClr val="0A0A0A"/>
-                </a:solidFill>
-                <a:latin typeface="Menlo"/>
-              </a:rPr>
-              <a:t>&lt;header&gt;    </a:t>
-            </a:r>
-            <a:r>
-              <a:rPr sz="1350">
-                <a:solidFill>
-                  <a:srgbClr val="444444"/>
-                </a:solidFill>
-                <a:latin typeface="Iowan Old Style"/>
-              </a:rPr>
-              <a:t>Cabecera: tu nombre y el menú.</a:t>
-            </a:r>
-          </a:p>
-          <a:p>
-            <a:pPr>
-              <a:lnSpc>
-                <a:spcPct val="135000"/>
-              </a:lnSpc>
-              <a:spcAft>
-                <a:spcPts val="500"/>
-              </a:spcAft>
-            </a:pPr>
-            <a:r>
-              <a:rPr sz="1250">
-                <a:solidFill>
-                  <a:srgbClr val="0A0A0A"/>
-                </a:solidFill>
-                <a:latin typeface="Menlo"/>
-              </a:rPr>
-              <a:t>&lt;main&gt;    </a:t>
-            </a:r>
-            <a:r>
-              <a:rPr sz="1350">
-                <a:solidFill>
-                  <a:srgbClr val="444444"/>
-                </a:solidFill>
-                <a:latin typeface="Iowan Old Style"/>
-              </a:rPr>
-              <a:t>El contenido propio de cada página.</a:t>
-            </a:r>
-          </a:p>
-          <a:p>
-            <a:pPr>
-              <a:lnSpc>
-                <a:spcPct val="135000"/>
-              </a:lnSpc>
-              <a:spcAft>
-                <a:spcPts val="500"/>
-              </a:spcAft>
-            </a:pPr>
-            <a:r>
-              <a:rPr sz="1250">
-                <a:solidFill>
-                  <a:srgbClr val="0A0A0A"/>
-                </a:solidFill>
-                <a:latin typeface="Menlo"/>
-              </a:rPr>
-              <a:t>&lt;footer&gt;    </a:t>
-            </a:r>
-            <a:r>
-              <a:rPr sz="1350">
-                <a:solidFill>
-                  <a:srgbClr val="444444"/>
-                </a:solidFill>
-                <a:latin typeface="Iowan Old Style"/>
-              </a:rPr>
-              <a:t>Pie: contacto, créditos.</a:t>
-            </a:r>
-          </a:p>
-          <a:p>
-            <a:pPr>
-              <a:lnSpc>
-                <a:spcPct val="135000"/>
-              </a:lnSpc>
-              <a:spcAft>
-                <a:spcPts val="500"/>
-              </a:spcAft>
-            </a:pPr>
-            <a:r>
-              <a:rPr sz="1250">
-                <a:solidFill>
-                  <a:srgbClr val="0A0A0A"/>
-                </a:solidFill>
-                <a:latin typeface="Menlo"/>
-              </a:rPr>
-              <a:t>&lt;article&gt;    </a:t>
-            </a:r>
-            <a:r>
-              <a:rPr sz="1350">
-                <a:solidFill>
-                  <a:srgbClr val="444444"/>
-                </a:solidFill>
-                <a:latin typeface="Iowan Old Style"/>
-              </a:rPr>
-              <a:t>Una unidad suelta: un proyecto, una obra.</a:t>
-            </a:r>
-          </a:p>
-          <a:p>
-            <a:pPr>
-              <a:lnSpc>
-                <a:spcPct val="135000"/>
-              </a:lnSpc>
-              <a:spcAft>
-                <a:spcPts val="500"/>
-              </a:spcAft>
-            </a:pPr>
-            <a:r>
-              <a:rPr sz="1250">
-                <a:solidFill>
-                  <a:srgbClr val="0A0A0A"/>
-                </a:solidFill>
-                <a:latin typeface="Menlo"/>
-              </a:rPr>
-              <a:t>&lt;a href="cv.html"&gt;    </a:t>
-            </a:r>
-            <a:r>
-              <a:rPr sz="1350">
-                <a:solidFill>
-                  <a:srgbClr val="444444"/>
-                </a:solidFill>
-                <a:latin typeface="Iowan Old Style"/>
-              </a:rPr>
-              <a:t>Enlace a otra página tuya.</a:t>
-            </a:r>
-          </a:p>
-          <a:p>
-            <a:pPr>
-              <a:lnSpc>
-                <a:spcPct val="135000"/>
-              </a:lnSpc>
-              <a:spcAft>
-                <a:spcPts val="500"/>
-              </a:spcAft>
-            </a:pPr>
-            <a:r>
-              <a:rPr sz="1250">
-                <a:solidFill>
-                  <a:srgbClr val="0A0A0A"/>
-                </a:solidFill>
-                <a:latin typeface="Menlo"/>
-              </a:rPr>
-              <a:t>&lt;a href="https://…"&gt;    </a:t>
-            </a:r>
-            <a:r>
-              <a:rPr sz="1350">
-                <a:solidFill>
-                  <a:srgbClr val="444444"/>
-                </a:solidFill>
-                <a:latin typeface="Iowan Old Style"/>
-              </a:rPr>
-              <a:t>A otra web. Necesita el https://.</a:t>
-            </a:r>
-          </a:p>
-          <a:p>
-            <a:pPr>
-              <a:lnSpc>
-                <a:spcPct val="135000"/>
-              </a:lnSpc>
-              <a:spcAft>
-                <a:spcPts val="500"/>
-              </a:spcAft>
-            </a:pPr>
-            <a:r>
-              <a:rPr sz="1250">
-                <a:solidFill>
-                  <a:srgbClr val="0A0A0A"/>
-                </a:solidFill>
-                <a:latin typeface="Menlo"/>
-              </a:rPr>
-              <a:t>&lt;a href="mailto:…"&gt;    </a:t>
-            </a:r>
-            <a:r>
-              <a:rPr sz="1350">
-                <a:solidFill>
-                  <a:srgbClr val="444444"/>
-                </a:solidFill>
-                <a:latin typeface="Iowan Old Style"/>
-              </a:rPr>
-              <a:t>Abre el programa de correo.</a:t>
+              <a:t>Todo lo de hoy en una hoja. Para dentro de tres meses, cuando estés sola delante del ordenador.</a:t>
             </a:r>
           </a:p>
         </p:txBody>
@@ -15808,7 +16108,7 @@
             <a:avLst/>
           </a:prstGeom>
           <a:solidFill>
-            <a:srgbClr val="FAFAFA"/>
+            <a:srgbClr val="FFFFFF"/>
           </a:solidFill>
           <a:ln>
             <a:noFill/>
@@ -15891,7 +16191,7 @@
         <p:spPr>
           <a:xfrm>
             <a:off x="777240" y="777240"/>
-            <a:ext cx="10637215" cy="274320"/>
+            <a:ext cx="10637215" cy="822960"/>
           </a:xfrm>
           <a:prstGeom prst="rect">
             <a:avLst/>
@@ -15906,7 +16206,7 @@
           <a:p>
             <a:pPr>
               <a:lnSpc>
-                <a:spcPct val="125000"/>
+                <a:spcPct val="112000"/>
               </a:lnSpc>
               <a:spcBef>
                 <a:spcPts val="0"/>
@@ -15916,71 +16216,27 @@
               </a:spcAft>
             </a:pPr>
             <a:r>
-              <a:rPr sz="1000" b="0" i="0" spc="300">
-                <a:solidFill>
-                  <a:srgbClr val="8A8A8A"/>
-                </a:solidFill>
-                <a:latin typeface="Menlo"/>
-              </a:rPr>
-              <a:t>MUESTRARIO   ·   PARA MIRAR POR DENTRO</a:t>
-            </a:r>
-          </a:p>
-        </p:txBody>
-      </p:sp>
-      <p:sp>
-        <p:nvSpPr>
-          <p:cNvPr id="5" name="Rectangle 4"/>
-          <p:cNvSpPr/>
-          <p:nvPr/>
-        </p:nvSpPr>
-        <p:spPr>
-          <a:xfrm>
-            <a:off x="777240" y="1161288"/>
-            <a:ext cx="10637215" cy="9525"/>
-          </a:xfrm>
-          <a:prstGeom prst="rect">
-            <a:avLst/>
-          </a:prstGeom>
-          <a:solidFill>
-            <a:srgbClr val="D8D8D8"/>
-          </a:solidFill>
-          <a:ln>
-            <a:noFill/>
-          </a:ln>
-          <a:effectLst/>
-        </p:spPr>
-        <p:style>
-          <a:lnRef idx="1">
-            <a:schemeClr val="accent1"/>
-          </a:lnRef>
-          <a:fillRef idx="3">
-            <a:schemeClr val="accent1"/>
-          </a:fillRef>
-          <a:effectRef idx="2">
-            <a:schemeClr val="accent1"/>
-          </a:effectRef>
-          <a:fontRef idx="minor">
-            <a:schemeClr val="lt1"/>
-          </a:fontRef>
-        </p:style>
-        <p:txBody>
-          <a:bodyPr rtlCol="0" anchor="ctr"/>
-          <a:lstStyle/>
-          <a:p>
-            <a:pPr algn="ctr"/>
-          </a:p>
-        </p:txBody>
-      </p:sp>
-      <p:sp>
-        <p:nvSpPr>
-          <p:cNvPr id="6" name="TextBox 5"/>
+              <a:rPr sz="2700" b="0" i="0">
+                <a:solidFill>
+                  <a:srgbClr val="0A0A0A"/>
+                </a:solidFill>
+                <a:latin typeface="Inknut Antiqua"/>
+              </a:rPr>
+              <a:t>chuleta · html</a:t>
+            </a:r>
+          </a:p>
+        </p:txBody>
+      </p:sp>
+      <p:sp>
+        <p:nvSpPr>
+          <p:cNvPr id="5" name="TextBox 4"/>
           <p:cNvSpPr txBox="1"/>
           <p:nvPr/>
         </p:nvSpPr>
         <p:spPr>
           <a:xfrm>
             <a:off x="777240" y="1417320"/>
-            <a:ext cx="10637215" cy="822960"/>
+            <a:ext cx="10637215" cy="4892040"/>
           </a:xfrm>
           <a:prstGeom prst="rect">
             <a:avLst/>
@@ -15995,184 +16251,341 @@
           <a:p>
             <a:pPr>
               <a:lnSpc>
-                <a:spcPct val="112000"/>
-              </a:lnSpc>
-              <a:spcBef>
-                <a:spcPts val="0"/>
-              </a:spcBef>
-              <a:spcAft>
-                <a:spcPts val="600"/>
-              </a:spcAft>
-            </a:pPr>
-            <a:r>
-              <a:rPr sz="2700" b="0" i="0">
+                <a:spcPct val="140000"/>
+              </a:lnSpc>
+              <a:spcBef>
+                <a:spcPts val="0"/>
+              </a:spcBef>
+              <a:spcAft>
+                <a:spcPts val="500"/>
+              </a:spcAft>
+            </a:pPr>
+            <a:r>
+              <a:rPr sz="1450" b="0" i="0">
+                <a:solidFill>
+                  <a:srgbClr val="444444"/>
+                </a:solidFill>
+                <a:latin typeface="Iowan Old Style"/>
+              </a:rPr>
+              <a:t>·  ¿Has guardado el archivo?</a:t>
+            </a:r>
+          </a:p>
+          <a:p>
+            <a:pPr>
+              <a:lnSpc>
+                <a:spcPct val="140000"/>
+              </a:lnSpc>
+              <a:spcBef>
+                <a:spcPts val="0"/>
+              </a:spcBef>
+              <a:spcAft>
+                <a:spcPts val="500"/>
+              </a:spcAft>
+            </a:pPr>
+            <a:r>
+              <a:rPr sz="1450" b="0" i="0">
+                <a:solidFill>
+                  <a:srgbClr val="444444"/>
+                </a:solidFill>
+                <a:latin typeface="Iowan Old Style"/>
+              </a:rPr>
+              <a:t>·  ¿Has recargado? Forzada: Cmd+Shift+R o Ctrl+F5.</a:t>
+            </a:r>
+          </a:p>
+          <a:p>
+            <a:pPr>
+              <a:lnSpc>
+                <a:spcPct val="140000"/>
+              </a:lnSpc>
+              <a:spcBef>
+                <a:spcPts val="0"/>
+              </a:spcBef>
+              <a:spcAft>
+                <a:spcPts val="500"/>
+              </a:spcAft>
+            </a:pPr>
+            <a:r>
+              <a:rPr sz="1450" b="0" i="0">
+                <a:solidFill>
+                  <a:srgbClr val="444444"/>
+                </a:solidFill>
+                <a:latin typeface="Iowan Old Style"/>
+              </a:rPr>
+              <a:t>·  ¿Falta cerrar una etiqueta o una comilla? VS Code lo marca en color.</a:t>
+            </a:r>
+          </a:p>
+          <a:p>
+            <a:pPr>
+              <a:lnSpc>
+                <a:spcPct val="140000"/>
+              </a:lnSpc>
+              <a:spcBef>
+                <a:spcPts val="0"/>
+              </a:spcBef>
+              <a:spcAft>
+                <a:spcPts val="500"/>
+              </a:spcAft>
+            </a:pPr>
+            <a:r>
+              <a:rPr sz="1450" b="0" i="0">
+                <a:solidFill>
+                  <a:srgbClr val="444444"/>
+                </a:solidFill>
+                <a:latin typeface="Iowan Old Style"/>
+              </a:rPr>
+              <a:t>·  ¿Una imagen no sale? El nombre y el src tienen que coincidir exactamente.</a:t>
+            </a:r>
+          </a:p>
+          <a:p>
+            <a:pPr>
+              <a:lnSpc>
+                <a:spcPct val="135000"/>
+              </a:lnSpc>
+              <a:spcAft>
+                <a:spcPts val="500"/>
+              </a:spcAft>
+            </a:pPr>
+            <a:r>
+              <a:rPr sz="1250">
                 <a:solidFill>
                   <a:srgbClr val="0A0A0A"/>
                 </a:solidFill>
-                <a:latin typeface="Inknut Antiqua"/>
-              </a:rPr>
-              <a:t>hecho solo con html y un poco de css</a:t>
-            </a:r>
-          </a:p>
-        </p:txBody>
-      </p:sp>
-      <p:sp>
-        <p:nvSpPr>
-          <p:cNvPr id="7" name="TextBox 6"/>
-          <p:cNvSpPr txBox="1"/>
-          <p:nvPr/>
-        </p:nvSpPr>
-        <p:spPr>
-          <a:xfrm>
-            <a:off x="777240" y="2057400"/>
-            <a:ext cx="10637215" cy="4251960"/>
-          </a:xfrm>
-          <a:prstGeom prst="rect">
-            <a:avLst/>
-          </a:prstGeom>
-          <a:noFill/>
-        </p:spPr>
-        <p:txBody>
-          <a:bodyPr wrap="square" lIns="0" rIns="0" tIns="0" bIns="0">
-            <a:spAutoFit/>
-          </a:bodyPr>
-          <a:lstStyle/>
-          <a:p>
-            <a:pPr>
-              <a:lnSpc>
-                <a:spcPct val="142000"/>
-              </a:lnSpc>
-              <a:spcBef>
-                <a:spcPts val="0"/>
-              </a:spcBef>
-              <a:spcAft>
-                <a:spcPts val="900"/>
-              </a:spcAft>
-            </a:pPr>
-            <a:r>
-              <a:rPr sz="1500" b="0" i="0">
+                <a:latin typeface="Menlo"/>
+              </a:rPr>
+              <a:t>&lt;head&gt;    </a:t>
+            </a:r>
+            <a:r>
+              <a:rPr sz="1350">
                 <a:solidFill>
                   <a:srgbClr val="444444"/>
                 </a:solidFill>
                 <a:latin typeface="Iowan Old Style"/>
               </a:rPr>
-              <a:t>Cada una es un único archivo, muy comentado. Ábrelas, mira el código con botón derecho → Ver código fuente, y róbalo.</a:t>
-            </a:r>
-          </a:p>
-          <a:p>
-            <a:pPr>
-              <a:lnSpc>
-                <a:spcPct val="132000"/>
-              </a:lnSpc>
-              <a:spcAft>
-                <a:spcPts val="600"/>
-              </a:spcAft>
-            </a:pPr>
-            <a:r>
-              <a:rPr sz="1300">
+              <a:t>Lo que no se ve: título de la pestaña, enlace al CSS.</a:t>
+            </a:r>
+          </a:p>
+          <a:p>
+            <a:pPr>
+              <a:lnSpc>
+                <a:spcPct val="135000"/>
+              </a:lnSpc>
+              <a:spcAft>
+                <a:spcPts val="500"/>
+              </a:spcAft>
+            </a:pPr>
+            <a:r>
+              <a:rPr sz="1250">
                 <a:solidFill>
                   <a:srgbClr val="0A0A0A"/>
                 </a:solidFill>
-                <a:latin typeface="Inknut Antiqua"/>
-                <a:hlinkClick r:id="rId2"/>
-              </a:rPr>
-              <a:t>→ la web que se explica   </a:t>
-            </a:r>
+                <a:latin typeface="Menlo"/>
+              </a:rPr>
+              <a:t>&lt;body&gt;    </a:t>
+            </a:r>
+            <a:r>
+              <a:rPr sz="1350">
+                <a:solidFill>
+                  <a:srgbClr val="444444"/>
+                </a:solidFill>
+                <a:latin typeface="Iowan Old Style"/>
+              </a:rPr>
+              <a:t>Lo que sí se ve.</a:t>
+            </a:r>
+          </a:p>
+          <a:p>
+            <a:pPr>
+              <a:lnSpc>
+                <a:spcPct val="135000"/>
+              </a:lnSpc>
+              <a:spcAft>
+                <a:spcPts val="500"/>
+              </a:spcAft>
+            </a:pPr>
             <a:r>
               <a:rPr sz="1250">
                 <a:solidFill>
-                  <a:srgbClr val="8A8A8A"/>
+                  <a:srgbClr val="0A0A0A"/>
+                </a:solidFill>
+                <a:latin typeface="Menlo"/>
+              </a:rPr>
+              <a:t>&lt;header&gt;    </a:t>
+            </a:r>
+            <a:r>
+              <a:rPr sz="1350">
+                <a:solidFill>
+                  <a:srgbClr val="444444"/>
                 </a:solidFill>
                 <a:latin typeface="Iowan Old Style"/>
               </a:rPr>
-              <a:t>Pasa el ratón y cada elemento te dice qué es.</a:t>
-            </a:r>
-          </a:p>
-          <a:p>
-            <a:pPr>
-              <a:lnSpc>
-                <a:spcPct val="132000"/>
-              </a:lnSpc>
-              <a:spcAft>
-                <a:spcPts val="600"/>
-              </a:spcAft>
-            </a:pPr>
-            <a:r>
-              <a:rPr sz="1300">
+              <a:t>Cabecera: tu nombre y el menú.</a:t>
+            </a:r>
+          </a:p>
+          <a:p>
+            <a:pPr>
+              <a:lnSpc>
+                <a:spcPct val="135000"/>
+              </a:lnSpc>
+              <a:spcAft>
+                <a:spcPts val="500"/>
+              </a:spcAft>
+            </a:pPr>
+            <a:r>
+              <a:rPr sz="1250">
                 <a:solidFill>
                   <a:srgbClr val="0A0A0A"/>
                 </a:solidFill>
-                <a:latin typeface="Inknut Antiqua"/>
-                <a:hlinkClick r:id="rId3"/>
-              </a:rPr>
-              <a:t>→ cadáver exquisito   </a:t>
-            </a:r>
+                <a:latin typeface="Menlo"/>
+              </a:rPr>
+              <a:t>&lt;main&gt;    </a:t>
+            </a:r>
+            <a:r>
+              <a:rPr sz="1350">
+                <a:solidFill>
+                  <a:srgbClr val="444444"/>
+                </a:solidFill>
+                <a:latin typeface="Iowan Old Style"/>
+              </a:rPr>
+              <a:t>El contenido propio de cada página.</a:t>
+            </a:r>
+          </a:p>
+          <a:p>
+            <a:pPr>
+              <a:lnSpc>
+                <a:spcPct val="135000"/>
+              </a:lnSpc>
+              <a:spcAft>
+                <a:spcPts val="500"/>
+              </a:spcAft>
+            </a:pPr>
             <a:r>
               <a:rPr sz="1250">
                 <a:solidFill>
-                  <a:srgbClr val="8A8A8A"/>
+                  <a:srgbClr val="0A0A0A"/>
+                </a:solidFill>
+                <a:latin typeface="Menlo"/>
+              </a:rPr>
+              <a:t>&lt;footer&gt;    </a:t>
+            </a:r>
+            <a:r>
+              <a:rPr sz="1350">
+                <a:solidFill>
+                  <a:srgbClr val="444444"/>
                 </a:solidFill>
                 <a:latin typeface="Iowan Old Style"/>
               </a:rPr>
-              <a:t>Generador de frases al azar: listas y un botón mínimo.</a:t>
-            </a:r>
-          </a:p>
-          <a:p>
-            <a:pPr>
-              <a:lnSpc>
-                <a:spcPct val="132000"/>
-              </a:lnSpc>
-              <a:spcAft>
-                <a:spcPts val="600"/>
-              </a:spcAft>
-            </a:pPr>
-            <a:r>
-              <a:rPr sz="1300">
+              <a:t>Pie: contacto, créditos.</a:t>
+            </a:r>
+          </a:p>
+          <a:p>
+            <a:pPr>
+              <a:lnSpc>
+                <a:spcPct val="135000"/>
+              </a:lnSpc>
+              <a:spcAft>
+                <a:spcPts val="500"/>
+              </a:spcAft>
+            </a:pPr>
+            <a:r>
+              <a:rPr sz="1250">
                 <a:solidFill>
                   <a:srgbClr val="0A0A0A"/>
                 </a:solidFill>
-                <a:latin typeface="Inknut Antiqua"/>
-                <a:hlinkClick r:id="rId4"/>
-              </a:rPr>
-              <a:t>→ archivador de textos   </a:t>
-            </a:r>
+                <a:latin typeface="Menlo"/>
+              </a:rPr>
+              <a:t>&lt;article&gt;    </a:t>
+            </a:r>
+            <a:r>
+              <a:rPr sz="1350">
+                <a:solidFill>
+                  <a:srgbClr val="444444"/>
+                </a:solidFill>
+                <a:latin typeface="Iowan Old Style"/>
+              </a:rPr>
+              <a:t>Una unidad suelta: un proyecto, una obra.</a:t>
+            </a:r>
+          </a:p>
+          <a:p>
+            <a:pPr>
+              <a:lnSpc>
+                <a:spcPct val="135000"/>
+              </a:lnSpc>
+              <a:spcAft>
+                <a:spcPts val="500"/>
+              </a:spcAft>
+            </a:pPr>
             <a:r>
               <a:rPr sz="1250">
                 <a:solidFill>
-                  <a:srgbClr val="8A8A8A"/>
+                  <a:srgbClr val="0A0A0A"/>
+                </a:solidFill>
+                <a:latin typeface="Menlo"/>
+              </a:rPr>
+              <a:t>&lt;a href="cv.html"&gt;    </a:t>
+            </a:r>
+            <a:r>
+              <a:rPr sz="1350">
+                <a:solidFill>
+                  <a:srgbClr val="444444"/>
                 </a:solidFill>
                 <a:latin typeface="Iowan Old Style"/>
               </a:rPr>
-              <a:t>Fichas giradas con filtros por etiqueta.</a:t>
-            </a:r>
-          </a:p>
-          <a:p>
-            <a:pPr>
-              <a:lnSpc>
-                <a:spcPct val="132000"/>
-              </a:lnSpc>
-              <a:spcAft>
-                <a:spcPts val="600"/>
-              </a:spcAft>
-            </a:pPr>
-            <a:r>
-              <a:rPr sz="1300">
+              <a:t>Enlace a otra página tuya.</a:t>
+            </a:r>
+          </a:p>
+          <a:p>
+            <a:pPr>
+              <a:lnSpc>
+                <a:spcPct val="135000"/>
+              </a:lnSpc>
+              <a:spcAft>
+                <a:spcPts val="500"/>
+              </a:spcAft>
+            </a:pPr>
+            <a:r>
+              <a:rPr sz="1250">
                 <a:solidFill>
                   <a:srgbClr val="0A0A0A"/>
                 </a:solidFill>
-                <a:latin typeface="Inknut Antiqua"/>
-                <a:hlinkClick r:id="rId5"/>
-              </a:rPr>
-              <a:t>→ ver las 26   </a:t>
-            </a:r>
+                <a:latin typeface="Menlo"/>
+              </a:rPr>
+              <a:t>&lt;a href="https://…"&gt;    </a:t>
+            </a:r>
+            <a:r>
+              <a:rPr sz="1350">
+                <a:solidFill>
+                  <a:srgbClr val="444444"/>
+                </a:solidFill>
+                <a:latin typeface="Iowan Old Style"/>
+              </a:rPr>
+              <a:t>A otra web. Necesita el https://.</a:t>
+            </a:r>
+          </a:p>
+          <a:p>
+            <a:pPr>
+              <a:lnSpc>
+                <a:spcPct val="135000"/>
+              </a:lnSpc>
+              <a:spcAft>
+                <a:spcPts val="500"/>
+              </a:spcAft>
+            </a:pPr>
             <a:r>
               <a:rPr sz="1250">
                 <a:solidFill>
-                  <a:srgbClr val="8A8A8A"/>
+                  <a:srgbClr val="0A0A0A"/>
+                </a:solidFill>
+                <a:latin typeface="Menlo"/>
+              </a:rPr>
+              <a:t>&lt;a href="mailto:…"&gt;    </a:t>
+            </a:r>
+            <a:r>
+              <a:rPr sz="1350">
+                <a:solidFill>
+                  <a:srgbClr val="444444"/>
                 </a:solidFill>
                 <a:latin typeface="Iowan Old Style"/>
               </a:rPr>
-              <a:t>El muestrario entero, ordenado por tipo.</a:t>
+              <a:t>Abre el programa de correo.</a:t>
             </a:r>
           </a:p>
         </p:txBody>
@@ -16186,6 +16599,408 @@
 </file>
 
 <file path=ppt/slides/slide44.xml><?xml version="1.0" encoding="utf-8"?>
+<p:sld xmlns:a="http://schemas.openxmlformats.org/drawingml/2006/main" xmlns:p="http://schemas.openxmlformats.org/presentationml/2006/main" xmlns:r="http://schemas.openxmlformats.org/officeDocument/2006/relationships">
+  <p:cSld>
+    <p:spTree>
+      <p:nvGrpSpPr>
+        <p:cNvPr id="1" name=""/>
+        <p:cNvGrpSpPr/>
+        <p:nvPr/>
+      </p:nvGrpSpPr>
+      <p:grpSpPr/>
+      <p:sp>
+        <p:nvSpPr>
+          <p:cNvPr id="2" name="Rectangle 1"/>
+          <p:cNvSpPr/>
+          <p:nvPr/>
+        </p:nvSpPr>
+        <p:spPr>
+          <a:xfrm>
+            <a:off x="0" y="0"/>
+            <a:ext cx="12191695" cy="6858000"/>
+          </a:xfrm>
+          <a:prstGeom prst="rect">
+            <a:avLst/>
+          </a:prstGeom>
+          <a:solidFill>
+            <a:srgbClr val="FAFAFA"/>
+          </a:solidFill>
+          <a:ln>
+            <a:noFill/>
+          </a:ln>
+          <a:effectLst/>
+        </p:spPr>
+        <p:style>
+          <a:lnRef idx="1">
+            <a:schemeClr val="accent1"/>
+          </a:lnRef>
+          <a:fillRef idx="3">
+            <a:schemeClr val="accent1"/>
+          </a:fillRef>
+          <a:effectRef idx="2">
+            <a:schemeClr val="accent1"/>
+          </a:effectRef>
+          <a:fontRef idx="minor">
+            <a:schemeClr val="lt1"/>
+          </a:fontRef>
+        </p:style>
+        <p:txBody>
+          <a:bodyPr rtlCol="0" anchor="ctr"/>
+          <a:lstStyle/>
+          <a:p>
+            <a:pPr algn="ctr"/>
+          </a:p>
+        </p:txBody>
+      </p:sp>
+      <p:sp>
+        <p:nvSpPr>
+          <p:cNvPr id="3" name="TextBox 2"/>
+          <p:cNvSpPr txBox="1"/>
+          <p:nvPr/>
+        </p:nvSpPr>
+        <p:spPr>
+          <a:xfrm>
+            <a:off x="777240" y="310896"/>
+            <a:ext cx="10637215" cy="219456"/>
+          </a:xfrm>
+          <a:prstGeom prst="rect">
+            <a:avLst/>
+          </a:prstGeom>
+          <a:noFill/>
+        </p:spPr>
+        <p:txBody>
+          <a:bodyPr wrap="square" lIns="0" rIns="0" tIns="0" bIns="0">
+            <a:spAutoFit/>
+          </a:bodyPr>
+          <a:lstStyle/>
+          <a:p>
+            <a:pPr>
+              <a:lnSpc>
+                <a:spcPct val="125000"/>
+              </a:lnSpc>
+              <a:spcBef>
+                <a:spcPts val="0"/>
+              </a:spcBef>
+              <a:spcAft>
+                <a:spcPts val="600"/>
+              </a:spcAft>
+            </a:pPr>
+            <a:r>
+              <a:rPr sz="950" b="0" i="0" spc="800">
+                <a:solidFill>
+                  <a:srgbClr val="8A8A8A"/>
+                </a:solidFill>
+                <a:latin typeface="Menlo"/>
+              </a:rPr>
+              <a:t>TEORÍA</a:t>
+            </a:r>
+          </a:p>
+        </p:txBody>
+      </p:sp>
+      <p:sp>
+        <p:nvSpPr>
+          <p:cNvPr id="4" name="TextBox 3"/>
+          <p:cNvSpPr txBox="1"/>
+          <p:nvPr/>
+        </p:nvSpPr>
+        <p:spPr>
+          <a:xfrm>
+            <a:off x="777240" y="777240"/>
+            <a:ext cx="10637215" cy="274320"/>
+          </a:xfrm>
+          <a:prstGeom prst="rect">
+            <a:avLst/>
+          </a:prstGeom>
+          <a:noFill/>
+        </p:spPr>
+        <p:txBody>
+          <a:bodyPr wrap="square" lIns="0" rIns="0" tIns="0" bIns="0">
+            <a:spAutoFit/>
+          </a:bodyPr>
+          <a:lstStyle/>
+          <a:p>
+            <a:pPr>
+              <a:lnSpc>
+                <a:spcPct val="125000"/>
+              </a:lnSpc>
+              <a:spcBef>
+                <a:spcPts val="0"/>
+              </a:spcBef>
+              <a:spcAft>
+                <a:spcPts val="600"/>
+              </a:spcAft>
+            </a:pPr>
+            <a:r>
+              <a:rPr sz="1000" b="0" i="0" spc="300">
+                <a:solidFill>
+                  <a:srgbClr val="8A8A8A"/>
+                </a:solidFill>
+                <a:latin typeface="Menlo"/>
+              </a:rPr>
+              <a:t>MUESTRARIO   ·   PARA MIRAR POR DENTRO</a:t>
+            </a:r>
+          </a:p>
+        </p:txBody>
+      </p:sp>
+      <p:sp>
+        <p:nvSpPr>
+          <p:cNvPr id="5" name="Rectangle 4"/>
+          <p:cNvSpPr/>
+          <p:nvPr/>
+        </p:nvSpPr>
+        <p:spPr>
+          <a:xfrm>
+            <a:off x="777240" y="1161288"/>
+            <a:ext cx="10637215" cy="9525"/>
+          </a:xfrm>
+          <a:prstGeom prst="rect">
+            <a:avLst/>
+          </a:prstGeom>
+          <a:solidFill>
+            <a:srgbClr val="D8D8D8"/>
+          </a:solidFill>
+          <a:ln>
+            <a:noFill/>
+          </a:ln>
+          <a:effectLst/>
+        </p:spPr>
+        <p:style>
+          <a:lnRef idx="1">
+            <a:schemeClr val="accent1"/>
+          </a:lnRef>
+          <a:fillRef idx="3">
+            <a:schemeClr val="accent1"/>
+          </a:fillRef>
+          <a:effectRef idx="2">
+            <a:schemeClr val="accent1"/>
+          </a:effectRef>
+          <a:fontRef idx="minor">
+            <a:schemeClr val="lt1"/>
+          </a:fontRef>
+        </p:style>
+        <p:txBody>
+          <a:bodyPr rtlCol="0" anchor="ctr"/>
+          <a:lstStyle/>
+          <a:p>
+            <a:pPr algn="ctr"/>
+          </a:p>
+        </p:txBody>
+      </p:sp>
+      <p:sp>
+        <p:nvSpPr>
+          <p:cNvPr id="6" name="TextBox 5"/>
+          <p:cNvSpPr txBox="1"/>
+          <p:nvPr/>
+        </p:nvSpPr>
+        <p:spPr>
+          <a:xfrm>
+            <a:off x="777240" y="1417320"/>
+            <a:ext cx="10637215" cy="822960"/>
+          </a:xfrm>
+          <a:prstGeom prst="rect">
+            <a:avLst/>
+          </a:prstGeom>
+          <a:noFill/>
+        </p:spPr>
+        <p:txBody>
+          <a:bodyPr wrap="square" lIns="0" rIns="0" tIns="0" bIns="0">
+            <a:spAutoFit/>
+          </a:bodyPr>
+          <a:lstStyle/>
+          <a:p>
+            <a:pPr>
+              <a:lnSpc>
+                <a:spcPct val="112000"/>
+              </a:lnSpc>
+              <a:spcBef>
+                <a:spcPts val="0"/>
+              </a:spcBef>
+              <a:spcAft>
+                <a:spcPts val="600"/>
+              </a:spcAft>
+            </a:pPr>
+            <a:r>
+              <a:rPr sz="2700" b="0" i="0">
+                <a:solidFill>
+                  <a:srgbClr val="0A0A0A"/>
+                </a:solidFill>
+                <a:latin typeface="Inknut Antiqua"/>
+              </a:rPr>
+              <a:t>hecho solo con html y un poco de css</a:t>
+            </a:r>
+          </a:p>
+        </p:txBody>
+      </p:sp>
+      <p:sp>
+        <p:nvSpPr>
+          <p:cNvPr id="7" name="TextBox 6"/>
+          <p:cNvSpPr txBox="1"/>
+          <p:nvPr/>
+        </p:nvSpPr>
+        <p:spPr>
+          <a:xfrm>
+            <a:off x="777240" y="2057400"/>
+            <a:ext cx="10637215" cy="4251960"/>
+          </a:xfrm>
+          <a:prstGeom prst="rect">
+            <a:avLst/>
+          </a:prstGeom>
+          <a:noFill/>
+        </p:spPr>
+        <p:txBody>
+          <a:bodyPr wrap="square" lIns="0" rIns="0" tIns="0" bIns="0">
+            <a:spAutoFit/>
+          </a:bodyPr>
+          <a:lstStyle/>
+          <a:p>
+            <a:pPr>
+              <a:lnSpc>
+                <a:spcPct val="142000"/>
+              </a:lnSpc>
+              <a:spcBef>
+                <a:spcPts val="0"/>
+              </a:spcBef>
+              <a:spcAft>
+                <a:spcPts val="900"/>
+              </a:spcAft>
+            </a:pPr>
+            <a:r>
+              <a:rPr sz="1500" b="0" i="0">
+                <a:solidFill>
+                  <a:srgbClr val="444444"/>
+                </a:solidFill>
+                <a:latin typeface="Iowan Old Style"/>
+              </a:rPr>
+              <a:t>Cada una es un único archivo, muy comentado. Ábrelas, mira el código con botón derecho → Ver código fuente, y róbalo.</a:t>
+            </a:r>
+          </a:p>
+          <a:p>
+            <a:pPr>
+              <a:lnSpc>
+                <a:spcPct val="132000"/>
+              </a:lnSpc>
+              <a:spcAft>
+                <a:spcPts val="600"/>
+              </a:spcAft>
+            </a:pPr>
+            <a:r>
+              <a:rPr sz="1300">
+                <a:solidFill>
+                  <a:srgbClr val="0A0A0A"/>
+                </a:solidFill>
+                <a:latin typeface="Inknut Antiqua"/>
+                <a:hlinkClick r:id="rId2"/>
+              </a:rPr>
+              <a:t>→ la web que se explica   </a:t>
+            </a:r>
+            <a:r>
+              <a:rPr sz="1250">
+                <a:solidFill>
+                  <a:srgbClr val="8A8A8A"/>
+                </a:solidFill>
+                <a:latin typeface="Iowan Old Style"/>
+              </a:rPr>
+              <a:t>Pasa el ratón y cada elemento te dice qué es.</a:t>
+            </a:r>
+          </a:p>
+          <a:p>
+            <a:pPr>
+              <a:lnSpc>
+                <a:spcPct val="132000"/>
+              </a:lnSpc>
+              <a:spcAft>
+                <a:spcPts val="600"/>
+              </a:spcAft>
+            </a:pPr>
+            <a:r>
+              <a:rPr sz="1300">
+                <a:solidFill>
+                  <a:srgbClr val="0A0A0A"/>
+                </a:solidFill>
+                <a:latin typeface="Inknut Antiqua"/>
+                <a:hlinkClick r:id="rId3"/>
+              </a:rPr>
+              <a:t>→ cadáver exquisito   </a:t>
+            </a:r>
+            <a:r>
+              <a:rPr sz="1250">
+                <a:solidFill>
+                  <a:srgbClr val="8A8A8A"/>
+                </a:solidFill>
+                <a:latin typeface="Iowan Old Style"/>
+              </a:rPr>
+              <a:t>Generador de frases al azar: listas y un botón mínimo.</a:t>
+            </a:r>
+          </a:p>
+          <a:p>
+            <a:pPr>
+              <a:lnSpc>
+                <a:spcPct val="132000"/>
+              </a:lnSpc>
+              <a:spcAft>
+                <a:spcPts val="600"/>
+              </a:spcAft>
+            </a:pPr>
+            <a:r>
+              <a:rPr sz="1300">
+                <a:solidFill>
+                  <a:srgbClr val="0A0A0A"/>
+                </a:solidFill>
+                <a:latin typeface="Inknut Antiqua"/>
+                <a:hlinkClick r:id="rId4"/>
+              </a:rPr>
+              <a:t>→ archivador de textos   </a:t>
+            </a:r>
+            <a:r>
+              <a:rPr sz="1250">
+                <a:solidFill>
+                  <a:srgbClr val="8A8A8A"/>
+                </a:solidFill>
+                <a:latin typeface="Iowan Old Style"/>
+              </a:rPr>
+              <a:t>Fichas giradas con filtros por etiqueta.</a:t>
+            </a:r>
+          </a:p>
+          <a:p>
+            <a:pPr>
+              <a:lnSpc>
+                <a:spcPct val="132000"/>
+              </a:lnSpc>
+              <a:spcAft>
+                <a:spcPts val="600"/>
+              </a:spcAft>
+            </a:pPr>
+            <a:r>
+              <a:rPr sz="1300">
+                <a:solidFill>
+                  <a:srgbClr val="0A0A0A"/>
+                </a:solidFill>
+                <a:latin typeface="Inknut Antiqua"/>
+                <a:hlinkClick r:id="rId5"/>
+              </a:rPr>
+              <a:t>→ ver las 26   </a:t>
+            </a:r>
+            <a:r>
+              <a:rPr sz="1250">
+                <a:solidFill>
+                  <a:srgbClr val="8A8A8A"/>
+                </a:solidFill>
+                <a:latin typeface="Iowan Old Style"/>
+              </a:rPr>
+              <a:t>El muestrario entero, ordenado por tipo.</a:t>
+            </a:r>
+          </a:p>
+        </p:txBody>
+      </p:sp>
+    </p:spTree>
+  </p:cSld>
+  <p:clrMapOvr>
+    <a:masterClrMapping/>
+  </p:clrMapOvr>
+</p:sld>
+</file>
+
+<file path=ppt/slides/slide45.xml><?xml version="1.0" encoding="utf-8"?>
 <p:sld xmlns:a="http://schemas.openxmlformats.org/drawingml/2006/main" xmlns:p="http://schemas.openxmlformats.org/presentationml/2006/main" xmlns:r="http://schemas.openxmlformats.org/officeDocument/2006/relationships">
   <p:cSld>
     <p:spTree>
